--- a/training/slides/GenAI-Observability-Technical-Deepdive.pptx
+++ b/training/slides/GenAI-Observability-Technical-Deepdive.pptx
@@ -2862,7 +2862,7 @@
         <a:spcBef>
           <a:spcPct val="20000"/>
         </a:spcBef>
-        <a:buFont typeface="Arial"/>
+        <a:buFont typeface="Poppins"/>
         <a:buChar char="•"/>
         <a:defRPr sz="3200" kern="1200">
           <a:solidFill>
@@ -2877,7 +2877,7 @@
         <a:spcBef>
           <a:spcPct val="20000"/>
         </a:spcBef>
-        <a:buFont typeface="Arial"/>
+        <a:buFont typeface="Poppins"/>
         <a:buChar char="–"/>
         <a:defRPr sz="2800" kern="1200">
           <a:solidFill>
@@ -2892,7 +2892,7 @@
         <a:spcBef>
           <a:spcPct val="20000"/>
         </a:spcBef>
-        <a:buFont typeface="Arial"/>
+        <a:buFont typeface="Poppins"/>
         <a:buChar char="•"/>
         <a:defRPr sz="2400" kern="1200">
           <a:solidFill>
@@ -2907,7 +2907,7 @@
         <a:spcBef>
           <a:spcPct val="20000"/>
         </a:spcBef>
-        <a:buFont typeface="Arial"/>
+        <a:buFont typeface="Poppins"/>
         <a:buChar char="–"/>
         <a:defRPr sz="2000" kern="1200">
           <a:solidFill>
@@ -2922,7 +2922,7 @@
         <a:spcBef>
           <a:spcPct val="20000"/>
         </a:spcBef>
-        <a:buFont typeface="Arial"/>
+        <a:buFont typeface="Poppins"/>
         <a:buChar char="»"/>
         <a:defRPr sz="2000" kern="1200">
           <a:solidFill>
@@ -2937,7 +2937,7 @@
         <a:spcBef>
           <a:spcPct val="20000"/>
         </a:spcBef>
-        <a:buFont typeface="Arial"/>
+        <a:buFont typeface="Poppins"/>
         <a:buChar char="•"/>
         <a:defRPr sz="2000" kern="1200">
           <a:solidFill>
@@ -2952,7 +2952,7 @@
         <a:spcBef>
           <a:spcPct val="20000"/>
         </a:spcBef>
-        <a:buFont typeface="Arial"/>
+        <a:buFont typeface="Poppins"/>
         <a:buChar char="•"/>
         <a:defRPr sz="2000" kern="1200">
           <a:solidFill>
@@ -2967,7 +2967,7 @@
         <a:spcBef>
           <a:spcPct val="20000"/>
         </a:spcBef>
-        <a:buFont typeface="Arial"/>
+        <a:buFont typeface="Poppins"/>
         <a:buChar char="•"/>
         <a:defRPr sz="2000" kern="1200">
           <a:solidFill>
@@ -2982,7 +2982,7 @@
         <a:spcBef>
           <a:spcPct val="20000"/>
         </a:spcBef>
-        <a:buFont typeface="Arial"/>
+        <a:buFont typeface="Poppins"/>
         <a:buChar char="•"/>
         <a:defRPr sz="2000" kern="1200">
           <a:solidFill>
@@ -3099,7 +3099,7 @@
     <p:bg>
       <p:bgPr>
         <a:solidFill>
-          <a:srgbClr val="16213E"/>
+          <a:srgbClr val="2A363B"/>
         </a:solidFill>
         <a:effectLst/>
       </p:bgPr>
@@ -3126,7 +3126,7 @@
             <a:avLst/>
           </a:prstGeom>
           <a:solidFill>
-            <a:srgbClr val="0F3460"/>
+            <a:srgbClr val="3F474A"/>
           </a:solidFill>
           <a:ln>
             <a:noFill/>
@@ -3170,7 +3170,7 @@
             <a:avLst/>
           </a:prstGeom>
           <a:solidFill>
-            <a:srgbClr val="1F9E97"/>
+            <a:srgbClr val="5FA8CC"/>
           </a:solidFill>
           <a:ln>
             <a:noFill/>
@@ -3229,7 +3229,7 @@
             <a:r>
               <a:rPr sz="1400" b="1" i="0">
                 <a:solidFill>
-                  <a:srgbClr val="1F9E97"/>
+                  <a:srgbClr val="5FA8CC"/>
                 </a:solidFill>
                 <a:latin typeface="Calibri"/>
               </a:rPr>
@@ -3307,7 +3307,7 @@
             <a:r>
               <a:rPr sz="1600" b="0" i="1">
                 <a:solidFill>
-                  <a:srgbClr val="C9D6EC"/>
+                  <a:srgbClr val="C7D3D8"/>
                 </a:solidFill>
                 <a:latin typeface="Calibri"/>
               </a:rPr>
@@ -3333,7 +3333,7 @@
             </a:avLst>
           </a:prstGeom>
           <a:solidFill>
-            <a:srgbClr val="0F3460"/>
+            <a:srgbClr val="3F474A"/>
           </a:solidFill>
           <a:ln>
             <a:noFill/>
@@ -3392,7 +3392,7 @@
             <a:r>
               <a:rPr sz="1150" b="1" i="0">
                 <a:solidFill>
-                  <a:srgbClr val="E0982A"/>
+                  <a:srgbClr val="E3A253"/>
                 </a:solidFill>
                 <a:latin typeface="Calibri"/>
               </a:rPr>
@@ -3431,7 +3431,7 @@
             <a:r>
               <a:rPr sz="1050" b="0" i="0">
                 <a:solidFill>
-                  <a:srgbClr val="8A9BC4"/>
+                  <a:srgbClr val="B7BEC2"/>
                 </a:solidFill>
                 <a:latin typeface="Calibri"/>
               </a:rPr>
@@ -3440,6 +3440,28 @@
           </a:p>
         </p:txBody>
       </p:sp>
+      <p:pic>
+        <p:nvPicPr>
+          <p:cNvPr id="900" name="Getamazednow AI badge"/>
+          <p:cNvPicPr/>
+          <p:nvPr/>
+        </p:nvPicPr>
+        <p:blipFill>
+          <a:blip r:embed="rIdGaiLogo"/>
+          <a:stretch>
+            <a:fillRect/>
+          </a:stretch>
+        </p:blipFill>
+        <p:spPr>
+          <a:xfrm>
+            <a:off x="10896295" y="457200"/>
+            <a:ext cx="838200" cy="838200"/>
+          </a:xfrm>
+          <a:prstGeom prst="rect">
+            <a:avLst/>
+          </a:prstGeom>
+        </p:spPr>
+      </p:pic>
     </p:spTree>
   </p:cSld>
   <p:clrMapOvr>
@@ -3496,7 +3518,7 @@
             <a:r>
               <a:rPr sz="1150" b="1" i="0">
                 <a:solidFill>
-                  <a:srgbClr val="1F9E97"/>
+                  <a:srgbClr val="5FA8CC"/>
                 </a:solidFill>
                 <a:latin typeface="Calibri"/>
               </a:rPr>
@@ -3535,7 +3557,7 @@
             <a:r>
               <a:rPr sz="2600" b="1" i="0">
                 <a:solidFill>
-                  <a:srgbClr val="16213E"/>
+                  <a:srgbClr val="2A363B"/>
                 </a:solidFill>
                 <a:latin typeface="Calibri"/>
               </a:rPr>
@@ -3574,7 +3596,7 @@
             <a:r>
               <a:rPr sz="900" b="0" i="0">
                 <a:solidFill>
-                  <a:srgbClr val="8592A6"/>
+                  <a:srgbClr val="8A97A0"/>
                 </a:solidFill>
                 <a:latin typeface="Calibri"/>
               </a:rPr>
@@ -3613,7 +3635,7 @@
             <a:r>
               <a:rPr sz="900" b="0" i="0">
                 <a:solidFill>
-                  <a:srgbClr val="8592A6"/>
+                  <a:srgbClr val="8A97A0"/>
                 </a:solidFill>
                 <a:latin typeface="Calibri"/>
               </a:rPr>
@@ -3664,7 +3686,7 @@
                   </a:txBody>
                   <a:tcPr marT="50800" marB="50800" anchor="ctr">
                     <a:solidFill>
-                      <a:srgbClr val="16213E"/>
+                      <a:srgbClr val="2A363B"/>
                     </a:solidFill>
                   </a:tcPr>
                 </a:tc>
@@ -3686,7 +3708,7 @@
                   </a:txBody>
                   <a:tcPr marT="50800" marB="50800" anchor="ctr">
                     <a:solidFill>
-                      <a:srgbClr val="16213E"/>
+                      <a:srgbClr val="2A363B"/>
                     </a:solidFill>
                   </a:tcPr>
                 </a:tc>
@@ -3708,7 +3730,7 @@
                   </a:txBody>
                   <a:tcPr marT="50800" marB="50800" anchor="ctr">
                     <a:solidFill>
-                      <a:srgbClr val="16213E"/>
+                      <a:srgbClr val="2A363B"/>
                     </a:solidFill>
                   </a:tcPr>
                 </a:tc>
@@ -3722,7 +3744,7 @@
                       <a:r>
                         <a:rPr sz="1100">
                           <a:solidFill>
-                            <a:srgbClr val="222222"/>
+                            <a:srgbClr val="2C3234"/>
                           </a:solidFill>
                           <a:latin typeface="Calibri"/>
                         </a:rPr>
@@ -3744,7 +3766,7 @@
                       <a:r>
                         <a:rPr sz="1100">
                           <a:solidFill>
-                            <a:srgbClr val="222222"/>
+                            <a:srgbClr val="2C3234"/>
                           </a:solidFill>
                           <a:latin typeface="Calibri"/>
                         </a:rPr>
@@ -3766,7 +3788,7 @@
                       <a:r>
                         <a:rPr sz="1100">
                           <a:solidFill>
-                            <a:srgbClr val="222222"/>
+                            <a:srgbClr val="2C3234"/>
                           </a:solidFill>
                           <a:latin typeface="Calibri"/>
                         </a:rPr>
@@ -3790,7 +3812,7 @@
                       <a:r>
                         <a:rPr sz="1100">
                           <a:solidFill>
-                            <a:srgbClr val="222222"/>
+                            <a:srgbClr val="2C3234"/>
                           </a:solidFill>
                           <a:latin typeface="Calibri"/>
                         </a:rPr>
@@ -3800,7 +3822,7 @@
                   </a:txBody>
                   <a:tcPr marT="38100" marB="38100" marL="76200" anchor="ctr">
                     <a:solidFill>
-                      <a:srgbClr val="F6F7F9"/>
+                      <a:srgbClr val="F6F7F7"/>
                     </a:solidFill>
                   </a:tcPr>
                 </a:tc>
@@ -3812,7 +3834,7 @@
                       <a:r>
                         <a:rPr sz="1100">
                           <a:solidFill>
-                            <a:srgbClr val="222222"/>
+                            <a:srgbClr val="2C3234"/>
                           </a:solidFill>
                           <a:latin typeface="Calibri"/>
                         </a:rPr>
@@ -3822,7 +3844,7 @@
                   </a:txBody>
                   <a:tcPr marT="38100" marB="38100" marL="76200" anchor="ctr">
                     <a:solidFill>
-                      <a:srgbClr val="F6F7F9"/>
+                      <a:srgbClr val="F6F7F7"/>
                     </a:solidFill>
                   </a:tcPr>
                 </a:tc>
@@ -3834,7 +3856,7 @@
                       <a:r>
                         <a:rPr sz="1100">
                           <a:solidFill>
-                            <a:srgbClr val="222222"/>
+                            <a:srgbClr val="2C3234"/>
                           </a:solidFill>
                           <a:latin typeface="Calibri"/>
                         </a:rPr>
@@ -3844,7 +3866,7 @@
                   </a:txBody>
                   <a:tcPr marT="38100" marB="38100" marL="76200" anchor="ctr">
                     <a:solidFill>
-                      <a:srgbClr val="F6F7F9"/>
+                      <a:srgbClr val="F6F7F7"/>
                     </a:solidFill>
                   </a:tcPr>
                 </a:tc>
@@ -3858,7 +3880,7 @@
                       <a:r>
                         <a:rPr sz="1100">
                           <a:solidFill>
-                            <a:srgbClr val="222222"/>
+                            <a:srgbClr val="2C3234"/>
                           </a:solidFill>
                           <a:latin typeface="Calibri"/>
                         </a:rPr>
@@ -3880,7 +3902,7 @@
                       <a:r>
                         <a:rPr sz="1100">
                           <a:solidFill>
-                            <a:srgbClr val="222222"/>
+                            <a:srgbClr val="2C3234"/>
                           </a:solidFill>
                           <a:latin typeface="Calibri"/>
                         </a:rPr>
@@ -3902,7 +3924,7 @@
                       <a:r>
                         <a:rPr sz="1100">
                           <a:solidFill>
-                            <a:srgbClr val="222222"/>
+                            <a:srgbClr val="2C3234"/>
                           </a:solidFill>
                           <a:latin typeface="Calibri"/>
                         </a:rPr>
@@ -3926,7 +3948,7 @@
                       <a:r>
                         <a:rPr sz="1100">
                           <a:solidFill>
-                            <a:srgbClr val="222222"/>
+                            <a:srgbClr val="2C3234"/>
                           </a:solidFill>
                           <a:latin typeface="Calibri"/>
                         </a:rPr>
@@ -3936,7 +3958,7 @@
                   </a:txBody>
                   <a:tcPr marT="38100" marB="38100" marL="76200" anchor="ctr">
                     <a:solidFill>
-                      <a:srgbClr val="F6F7F9"/>
+                      <a:srgbClr val="F6F7F7"/>
                     </a:solidFill>
                   </a:tcPr>
                 </a:tc>
@@ -3948,7 +3970,7 @@
                       <a:r>
                         <a:rPr sz="1100">
                           <a:solidFill>
-                            <a:srgbClr val="222222"/>
+                            <a:srgbClr val="2C3234"/>
                           </a:solidFill>
                           <a:latin typeface="Calibri"/>
                         </a:rPr>
@@ -3958,7 +3980,7 @@
                   </a:txBody>
                   <a:tcPr marT="38100" marB="38100" marL="76200" anchor="ctr">
                     <a:solidFill>
-                      <a:srgbClr val="F6F7F9"/>
+                      <a:srgbClr val="F6F7F7"/>
                     </a:solidFill>
                   </a:tcPr>
                 </a:tc>
@@ -3970,7 +3992,7 @@
                       <a:r>
                         <a:rPr sz="1100">
                           <a:solidFill>
-                            <a:srgbClr val="222222"/>
+                            <a:srgbClr val="2C3234"/>
                           </a:solidFill>
                           <a:latin typeface="Calibri"/>
                         </a:rPr>
@@ -3980,7 +4002,7 @@
                   </a:txBody>
                   <a:tcPr marT="38100" marB="38100" marL="76200" anchor="ctr">
                     <a:solidFill>
-                      <a:srgbClr val="F6F7F9"/>
+                      <a:srgbClr val="F6F7F7"/>
                     </a:solidFill>
                   </a:tcPr>
                 </a:tc>
@@ -3994,7 +4016,7 @@
                       <a:r>
                         <a:rPr sz="1100">
                           <a:solidFill>
-                            <a:srgbClr val="222222"/>
+                            <a:srgbClr val="2C3234"/>
                           </a:solidFill>
                           <a:latin typeface="Calibri"/>
                         </a:rPr>
@@ -4016,7 +4038,7 @@
                       <a:r>
                         <a:rPr sz="1100">
                           <a:solidFill>
-                            <a:srgbClr val="222222"/>
+                            <a:srgbClr val="2C3234"/>
                           </a:solidFill>
                           <a:latin typeface="Calibri"/>
                         </a:rPr>
@@ -4038,7 +4060,7 @@
                       <a:r>
                         <a:rPr sz="1100">
                           <a:solidFill>
-                            <a:srgbClr val="222222"/>
+                            <a:srgbClr val="2C3234"/>
                           </a:solidFill>
                           <a:latin typeface="Calibri"/>
                         </a:rPr>
@@ -4062,7 +4084,7 @@
                       <a:r>
                         <a:rPr sz="1100">
                           <a:solidFill>
-                            <a:srgbClr val="222222"/>
+                            <a:srgbClr val="2C3234"/>
                           </a:solidFill>
                           <a:latin typeface="Calibri"/>
                         </a:rPr>
@@ -4072,7 +4094,7 @@
                   </a:txBody>
                   <a:tcPr marT="38100" marB="38100" marL="76200" anchor="ctr">
                     <a:solidFill>
-                      <a:srgbClr val="F6F7F9"/>
+                      <a:srgbClr val="F6F7F7"/>
                     </a:solidFill>
                   </a:tcPr>
                 </a:tc>
@@ -4084,7 +4106,7 @@
                       <a:r>
                         <a:rPr sz="1100">
                           <a:solidFill>
-                            <a:srgbClr val="222222"/>
+                            <a:srgbClr val="2C3234"/>
                           </a:solidFill>
                           <a:latin typeface="Calibri"/>
                         </a:rPr>
@@ -4094,7 +4116,7 @@
                   </a:txBody>
                   <a:tcPr marT="38100" marB="38100" marL="76200" anchor="ctr">
                     <a:solidFill>
-                      <a:srgbClr val="F6F7F9"/>
+                      <a:srgbClr val="F6F7F7"/>
                     </a:solidFill>
                   </a:tcPr>
                 </a:tc>
@@ -4106,7 +4128,7 @@
                       <a:r>
                         <a:rPr sz="1100">
                           <a:solidFill>
-                            <a:srgbClr val="222222"/>
+                            <a:srgbClr val="2C3234"/>
                           </a:solidFill>
                           <a:latin typeface="Calibri"/>
                         </a:rPr>
@@ -4116,7 +4138,7 @@
                   </a:txBody>
                   <a:tcPr marT="38100" marB="38100" marL="76200" anchor="ctr">
                     <a:solidFill>
-                      <a:srgbClr val="F6F7F9"/>
+                      <a:srgbClr val="F6F7F7"/>
                     </a:solidFill>
                   </a:tcPr>
                 </a:tc>
@@ -4130,7 +4152,7 @@
                       <a:r>
                         <a:rPr sz="1100">
                           <a:solidFill>
-                            <a:srgbClr val="222222"/>
+                            <a:srgbClr val="2C3234"/>
                           </a:solidFill>
                           <a:latin typeface="Calibri"/>
                         </a:rPr>
@@ -4152,7 +4174,7 @@
                       <a:r>
                         <a:rPr sz="1100">
                           <a:solidFill>
-                            <a:srgbClr val="222222"/>
+                            <a:srgbClr val="2C3234"/>
                           </a:solidFill>
                           <a:latin typeface="Calibri"/>
                         </a:rPr>
@@ -4174,7 +4196,7 @@
                       <a:r>
                         <a:rPr sz="1100">
                           <a:solidFill>
-                            <a:srgbClr val="222222"/>
+                            <a:srgbClr val="2C3234"/>
                           </a:solidFill>
                           <a:latin typeface="Calibri"/>
                         </a:rPr>
@@ -4198,7 +4220,7 @@
                       <a:r>
                         <a:rPr sz="1100">
                           <a:solidFill>
-                            <a:srgbClr val="222222"/>
+                            <a:srgbClr val="2C3234"/>
                           </a:solidFill>
                           <a:latin typeface="Calibri"/>
                         </a:rPr>
@@ -4208,7 +4230,7 @@
                   </a:txBody>
                   <a:tcPr marT="38100" marB="38100" marL="76200" anchor="ctr">
                     <a:solidFill>
-                      <a:srgbClr val="F6F7F9"/>
+                      <a:srgbClr val="F6F7F7"/>
                     </a:solidFill>
                   </a:tcPr>
                 </a:tc>
@@ -4220,7 +4242,7 @@
                       <a:r>
                         <a:rPr sz="1100">
                           <a:solidFill>
-                            <a:srgbClr val="222222"/>
+                            <a:srgbClr val="2C3234"/>
                           </a:solidFill>
                           <a:latin typeface="Calibri"/>
                         </a:rPr>
@@ -4230,7 +4252,7 @@
                   </a:txBody>
                   <a:tcPr marT="38100" marB="38100" marL="76200" anchor="ctr">
                     <a:solidFill>
-                      <a:srgbClr val="F6F7F9"/>
+                      <a:srgbClr val="F6F7F7"/>
                     </a:solidFill>
                   </a:tcPr>
                 </a:tc>
@@ -4242,7 +4264,7 @@
                       <a:r>
                         <a:rPr sz="1100">
                           <a:solidFill>
-                            <a:srgbClr val="222222"/>
+                            <a:srgbClr val="2C3234"/>
                           </a:solidFill>
                           <a:latin typeface="Calibri"/>
                         </a:rPr>
@@ -4252,7 +4274,7 @@
                   </a:txBody>
                   <a:tcPr marT="38100" marB="38100" marL="76200" anchor="ctr">
                     <a:solidFill>
-                      <a:srgbClr val="F6F7F9"/>
+                      <a:srgbClr val="F6F7F7"/>
                     </a:solidFill>
                   </a:tcPr>
                 </a:tc>
@@ -4291,7 +4313,7 @@
             <a:r>
               <a:rPr sz="1000" b="0" i="1">
                 <a:solidFill>
-                  <a:srgbClr val="8592A6"/>
+                  <a:srgbClr val="8A97A0"/>
                 </a:solidFill>
                 <a:latin typeface="Calibri"/>
               </a:rPr>
@@ -4356,7 +4378,7 @@
             <a:r>
               <a:rPr sz="1150" b="1" i="0">
                 <a:solidFill>
-                  <a:srgbClr val="1F9E97"/>
+                  <a:srgbClr val="5FA8CC"/>
                 </a:solidFill>
                 <a:latin typeface="Calibri"/>
               </a:rPr>
@@ -4395,7 +4417,7 @@
             <a:r>
               <a:rPr sz="2600" b="1" i="0">
                 <a:solidFill>
-                  <a:srgbClr val="16213E"/>
+                  <a:srgbClr val="2A363B"/>
                 </a:solidFill>
                 <a:latin typeface="Calibri"/>
               </a:rPr>
@@ -4434,7 +4456,7 @@
             <a:r>
               <a:rPr sz="900" b="0" i="0">
                 <a:solidFill>
-                  <a:srgbClr val="8592A6"/>
+                  <a:srgbClr val="8A97A0"/>
                 </a:solidFill>
                 <a:latin typeface="Calibri"/>
               </a:rPr>
@@ -4473,7 +4495,7 @@
             <a:r>
               <a:rPr sz="900" b="0" i="0">
                 <a:solidFill>
-                  <a:srgbClr val="8592A6"/>
+                  <a:srgbClr val="8A97A0"/>
                 </a:solidFill>
                 <a:latin typeface="Calibri"/>
               </a:rPr>
@@ -4524,7 +4546,7 @@
                   </a:txBody>
                   <a:tcPr marT="50800" marB="50800" anchor="ctr">
                     <a:solidFill>
-                      <a:srgbClr val="16213E"/>
+                      <a:srgbClr val="2A363B"/>
                     </a:solidFill>
                   </a:tcPr>
                 </a:tc>
@@ -4546,7 +4568,7 @@
                   </a:txBody>
                   <a:tcPr marT="50800" marB="50800" anchor="ctr">
                     <a:solidFill>
-                      <a:srgbClr val="16213E"/>
+                      <a:srgbClr val="2A363B"/>
                     </a:solidFill>
                   </a:tcPr>
                 </a:tc>
@@ -4568,7 +4590,7 @@
                   </a:txBody>
                   <a:tcPr marT="50800" marB="50800" anchor="ctr">
                     <a:solidFill>
-                      <a:srgbClr val="16213E"/>
+                      <a:srgbClr val="2A363B"/>
                     </a:solidFill>
                   </a:tcPr>
                 </a:tc>
@@ -4582,7 +4604,7 @@
                       <a:r>
                         <a:rPr sz="1100">
                           <a:solidFill>
-                            <a:srgbClr val="222222"/>
+                            <a:srgbClr val="2C3234"/>
                           </a:solidFill>
                           <a:latin typeface="Calibri"/>
                         </a:rPr>
@@ -4604,7 +4626,7 @@
                       <a:r>
                         <a:rPr sz="1100">
                           <a:solidFill>
-                            <a:srgbClr val="222222"/>
+                            <a:srgbClr val="2C3234"/>
                           </a:solidFill>
                           <a:latin typeface="Calibri"/>
                         </a:rPr>
@@ -4626,7 +4648,7 @@
                       <a:r>
                         <a:rPr sz="1100">
                           <a:solidFill>
-                            <a:srgbClr val="222222"/>
+                            <a:srgbClr val="2C3234"/>
                           </a:solidFill>
                           <a:latin typeface="Calibri"/>
                         </a:rPr>
@@ -4650,7 +4672,7 @@
                       <a:r>
                         <a:rPr sz="1100">
                           <a:solidFill>
-                            <a:srgbClr val="222222"/>
+                            <a:srgbClr val="2C3234"/>
                           </a:solidFill>
                           <a:latin typeface="Calibri"/>
                         </a:rPr>
@@ -4660,7 +4682,7 @@
                   </a:txBody>
                   <a:tcPr marT="38100" marB="38100" marL="76200" anchor="ctr">
                     <a:solidFill>
-                      <a:srgbClr val="F6F7F9"/>
+                      <a:srgbClr val="F6F7F7"/>
                     </a:solidFill>
                   </a:tcPr>
                 </a:tc>
@@ -4672,7 +4694,7 @@
                       <a:r>
                         <a:rPr sz="1100">
                           <a:solidFill>
-                            <a:srgbClr val="222222"/>
+                            <a:srgbClr val="2C3234"/>
                           </a:solidFill>
                           <a:latin typeface="Calibri"/>
                         </a:rPr>
@@ -4682,7 +4704,7 @@
                   </a:txBody>
                   <a:tcPr marT="38100" marB="38100" marL="76200" anchor="ctr">
                     <a:solidFill>
-                      <a:srgbClr val="F6F7F9"/>
+                      <a:srgbClr val="F6F7F7"/>
                     </a:solidFill>
                   </a:tcPr>
                 </a:tc>
@@ -4694,7 +4716,7 @@
                       <a:r>
                         <a:rPr sz="1100">
                           <a:solidFill>
-                            <a:srgbClr val="222222"/>
+                            <a:srgbClr val="2C3234"/>
                           </a:solidFill>
                           <a:latin typeface="Calibri"/>
                         </a:rPr>
@@ -4704,7 +4726,7 @@
                   </a:txBody>
                   <a:tcPr marT="38100" marB="38100" marL="76200" anchor="ctr">
                     <a:solidFill>
-                      <a:srgbClr val="F6F7F9"/>
+                      <a:srgbClr val="F6F7F7"/>
                     </a:solidFill>
                   </a:tcPr>
                 </a:tc>
@@ -4718,7 +4740,7 @@
                       <a:r>
                         <a:rPr sz="1100">
                           <a:solidFill>
-                            <a:srgbClr val="222222"/>
+                            <a:srgbClr val="2C3234"/>
                           </a:solidFill>
                           <a:latin typeface="Calibri"/>
                         </a:rPr>
@@ -4740,7 +4762,7 @@
                       <a:r>
                         <a:rPr sz="1100">
                           <a:solidFill>
-                            <a:srgbClr val="222222"/>
+                            <a:srgbClr val="2C3234"/>
                           </a:solidFill>
                           <a:latin typeface="Calibri"/>
                         </a:rPr>
@@ -4762,7 +4784,7 @@
                       <a:r>
                         <a:rPr sz="1100">
                           <a:solidFill>
-                            <a:srgbClr val="222222"/>
+                            <a:srgbClr val="2C3234"/>
                           </a:solidFill>
                           <a:latin typeface="Calibri"/>
                         </a:rPr>
@@ -4811,7 +4833,7 @@
             <a:r>
               <a:rPr sz="1300" b="0" i="1">
                 <a:solidFill>
-                  <a:srgbClr val="16213E"/>
+                  <a:srgbClr val="2A363B"/>
                 </a:solidFill>
                 <a:latin typeface="Calibri"/>
               </a:rPr>
@@ -4834,7 +4856,7 @@
     <p:bg>
       <p:bgPr>
         <a:solidFill>
-          <a:srgbClr val="16213E"/>
+          <a:srgbClr val="2A363B"/>
         </a:solidFill>
         <a:effectLst/>
       </p:bgPr>
@@ -4861,7 +4883,7 @@
             <a:avLst/>
           </a:prstGeom>
           <a:solidFill>
-            <a:srgbClr val="0F3460"/>
+            <a:srgbClr val="3F474A"/>
           </a:solidFill>
           <a:ln>
             <a:noFill/>
@@ -4920,7 +4942,7 @@
             <a:r>
               <a:rPr sz="6400" b="1" i="0">
                 <a:solidFill>
-                  <a:srgbClr val="1F9E97"/>
+                  <a:srgbClr val="5FA8CC"/>
                 </a:solidFill>
                 <a:latin typeface="Calibri"/>
               </a:rPr>
@@ -4998,7 +5020,7 @@
             <a:r>
               <a:rPr sz="1500" b="0" i="1">
                 <a:solidFill>
-                  <a:srgbClr val="C9D6EC"/>
+                  <a:srgbClr val="C7D3D8"/>
                 </a:solidFill>
                 <a:latin typeface="Calibri"/>
               </a:rPr>
@@ -5037,7 +5059,7 @@
             <a:r>
               <a:rPr sz="900" b="0" i="0">
                 <a:solidFill>
-                  <a:srgbClr val="B8C2D6"/>
+                  <a:srgbClr val="B7BEC2"/>
                 </a:solidFill>
                 <a:latin typeface="Calibri"/>
               </a:rPr>
@@ -5102,7 +5124,7 @@
             <a:r>
               <a:rPr sz="1150" b="1" i="0">
                 <a:solidFill>
-                  <a:srgbClr val="1F9E97"/>
+                  <a:srgbClr val="5FA8CC"/>
                 </a:solidFill>
                 <a:latin typeface="Calibri"/>
               </a:rPr>
@@ -5141,7 +5163,7 @@
             <a:r>
               <a:rPr sz="2600" b="1" i="0">
                 <a:solidFill>
-                  <a:srgbClr val="16213E"/>
+                  <a:srgbClr val="2A363B"/>
                 </a:solidFill>
                 <a:latin typeface="Calibri"/>
               </a:rPr>
@@ -5180,7 +5202,7 @@
             <a:r>
               <a:rPr sz="900" b="0" i="0">
                 <a:solidFill>
-                  <a:srgbClr val="8592A6"/>
+                  <a:srgbClr val="8A97A0"/>
                 </a:solidFill>
                 <a:latin typeface="Calibri"/>
               </a:rPr>
@@ -5219,7 +5241,7 @@
             <a:r>
               <a:rPr sz="900" b="0" i="0">
                 <a:solidFill>
-                  <a:srgbClr val="8592A6"/>
+                  <a:srgbClr val="8A97A0"/>
                 </a:solidFill>
                 <a:latin typeface="Calibri"/>
               </a:rPr>
@@ -5257,13 +5279,13 @@
               <a:spcAft>
                 <a:spcPts val="1800"/>
               </a:spcAft>
-              <a:buFont typeface="Arial"/>
+              <a:buFont typeface="Poppins"/>
               <a:buChar char="•"/>
             </a:pPr>
             <a:r>
               <a:rPr b="1" sz="1400">
                 <a:solidFill>
-                  <a:srgbClr val="222222"/>
+                  <a:srgbClr val="2C3234"/>
                 </a:solidFill>
                 <a:latin typeface="Calibri"/>
               </a:rPr>
@@ -5272,7 +5294,7 @@
             <a:r>
               <a:rPr sz="1400">
                 <a:solidFill>
-                  <a:srgbClr val="222222"/>
+                  <a:srgbClr val="2C3234"/>
                 </a:solidFill>
                 <a:latin typeface="Calibri"/>
               </a:rPr>
@@ -5287,13 +5309,13 @@
               <a:spcAft>
                 <a:spcPts val="1800"/>
               </a:spcAft>
-              <a:buFont typeface="Arial"/>
+              <a:buFont typeface="Poppins"/>
               <a:buChar char="•"/>
             </a:pPr>
             <a:r>
               <a:rPr b="1" sz="1400">
                 <a:solidFill>
-                  <a:srgbClr val="222222"/>
+                  <a:srgbClr val="2C3234"/>
                 </a:solidFill>
                 <a:latin typeface="Calibri"/>
               </a:rPr>
@@ -5302,7 +5324,7 @@
             <a:r>
               <a:rPr sz="1400">
                 <a:solidFill>
-                  <a:srgbClr val="222222"/>
+                  <a:srgbClr val="2C3234"/>
                 </a:solidFill>
                 <a:latin typeface="Calibri"/>
               </a:rPr>
@@ -5317,13 +5339,13 @@
               <a:spcAft>
                 <a:spcPts val="1800"/>
               </a:spcAft>
-              <a:buFont typeface="Arial"/>
+              <a:buFont typeface="Poppins"/>
               <a:buChar char="•"/>
             </a:pPr>
             <a:r>
               <a:rPr b="1" sz="1400">
                 <a:solidFill>
-                  <a:srgbClr val="222222"/>
+                  <a:srgbClr val="2C3234"/>
                 </a:solidFill>
                 <a:latin typeface="Calibri"/>
               </a:rPr>
@@ -5332,7 +5354,7 @@
             <a:r>
               <a:rPr sz="1400">
                 <a:solidFill>
-                  <a:srgbClr val="222222"/>
+                  <a:srgbClr val="2C3234"/>
                 </a:solidFill>
                 <a:latin typeface="Calibri"/>
               </a:rPr>
@@ -5347,13 +5369,13 @@
               <a:spcAft>
                 <a:spcPts val="1800"/>
               </a:spcAft>
-              <a:buFont typeface="Arial"/>
+              <a:buFont typeface="Poppins"/>
               <a:buChar char="•"/>
             </a:pPr>
             <a:r>
               <a:rPr b="1" sz="1400">
                 <a:solidFill>
-                  <a:srgbClr val="222222"/>
+                  <a:srgbClr val="2C3234"/>
                 </a:solidFill>
                 <a:latin typeface="Calibri"/>
               </a:rPr>
@@ -5362,7 +5384,7 @@
             <a:r>
               <a:rPr sz="1400">
                 <a:solidFill>
-                  <a:srgbClr val="222222"/>
+                  <a:srgbClr val="2C3234"/>
                 </a:solidFill>
                 <a:latin typeface="Calibri"/>
               </a:rPr>
@@ -5388,7 +5410,7 @@
             </a:avLst>
           </a:prstGeom>
           <a:solidFill>
-            <a:srgbClr val="16213E"/>
+            <a:srgbClr val="2A363B"/>
           </a:solidFill>
           <a:ln>
             <a:noFill/>
@@ -5512,7 +5534,7 @@
             <a:r>
               <a:rPr sz="1150" b="1" i="0">
                 <a:solidFill>
-                  <a:srgbClr val="1F9E97"/>
+                  <a:srgbClr val="5FA8CC"/>
                 </a:solidFill>
                 <a:latin typeface="Calibri"/>
               </a:rPr>
@@ -5551,7 +5573,7 @@
             <a:r>
               <a:rPr sz="2600" b="1" i="0">
                 <a:solidFill>
-                  <a:srgbClr val="16213E"/>
+                  <a:srgbClr val="2A363B"/>
                 </a:solidFill>
                 <a:latin typeface="Calibri"/>
               </a:rPr>
@@ -5590,7 +5612,7 @@
             <a:r>
               <a:rPr sz="900" b="0" i="0">
                 <a:solidFill>
-                  <a:srgbClr val="8592A6"/>
+                  <a:srgbClr val="8A97A0"/>
                 </a:solidFill>
                 <a:latin typeface="Calibri"/>
               </a:rPr>
@@ -5629,7 +5651,7 @@
             <a:r>
               <a:rPr sz="900" b="0" i="0">
                 <a:solidFill>
-                  <a:srgbClr val="8592A6"/>
+                  <a:srgbClr val="8A97A0"/>
                 </a:solidFill>
                 <a:latin typeface="Calibri"/>
               </a:rPr>
@@ -5680,7 +5702,7 @@
                   </a:txBody>
                   <a:tcPr marT="50800" marB="50800" anchor="ctr">
                     <a:solidFill>
-                      <a:srgbClr val="16213E"/>
+                      <a:srgbClr val="2A363B"/>
                     </a:solidFill>
                   </a:tcPr>
                 </a:tc>
@@ -5702,7 +5724,7 @@
                   </a:txBody>
                   <a:tcPr marT="50800" marB="50800" anchor="ctr">
                     <a:solidFill>
-                      <a:srgbClr val="16213E"/>
+                      <a:srgbClr val="2A363B"/>
                     </a:solidFill>
                   </a:tcPr>
                 </a:tc>
@@ -5724,7 +5746,7 @@
                   </a:txBody>
                   <a:tcPr marT="50800" marB="50800" anchor="ctr">
                     <a:solidFill>
-                      <a:srgbClr val="16213E"/>
+                      <a:srgbClr val="2A363B"/>
                     </a:solidFill>
                   </a:tcPr>
                 </a:tc>
@@ -5738,7 +5760,7 @@
                       <a:r>
                         <a:rPr sz="1200">
                           <a:solidFill>
-                            <a:srgbClr val="222222"/>
+                            <a:srgbClr val="2C3234"/>
                           </a:solidFill>
                           <a:latin typeface="Calibri"/>
                         </a:rPr>
@@ -5760,7 +5782,7 @@
                       <a:r>
                         <a:rPr sz="1200">
                           <a:solidFill>
-                            <a:srgbClr val="222222"/>
+                            <a:srgbClr val="2C3234"/>
                           </a:solidFill>
                           <a:latin typeface="Calibri"/>
                         </a:rPr>
@@ -5782,7 +5804,7 @@
                       <a:r>
                         <a:rPr sz="1200">
                           <a:solidFill>
-                            <a:srgbClr val="222222"/>
+                            <a:srgbClr val="2C3234"/>
                           </a:solidFill>
                           <a:latin typeface="Calibri"/>
                         </a:rPr>
@@ -5806,7 +5828,7 @@
                       <a:r>
                         <a:rPr sz="1200">
                           <a:solidFill>
-                            <a:srgbClr val="222222"/>
+                            <a:srgbClr val="2C3234"/>
                           </a:solidFill>
                           <a:latin typeface="Calibri"/>
                         </a:rPr>
@@ -5816,7 +5838,7 @@
                   </a:txBody>
                   <a:tcPr marT="38100" marB="38100" marL="76200" anchor="ctr">
                     <a:solidFill>
-                      <a:srgbClr val="F6F7F9"/>
+                      <a:srgbClr val="F6F7F7"/>
                     </a:solidFill>
                   </a:tcPr>
                 </a:tc>
@@ -5828,7 +5850,7 @@
                       <a:r>
                         <a:rPr sz="1200">
                           <a:solidFill>
-                            <a:srgbClr val="222222"/>
+                            <a:srgbClr val="2C3234"/>
                           </a:solidFill>
                           <a:latin typeface="Calibri"/>
                         </a:rPr>
@@ -5838,7 +5860,7 @@
                   </a:txBody>
                   <a:tcPr marT="38100" marB="38100" marL="76200" anchor="ctr">
                     <a:solidFill>
-                      <a:srgbClr val="F6F7F9"/>
+                      <a:srgbClr val="F6F7F7"/>
                     </a:solidFill>
                   </a:tcPr>
                 </a:tc>
@@ -5850,7 +5872,7 @@
                       <a:r>
                         <a:rPr sz="1200">
                           <a:solidFill>
-                            <a:srgbClr val="222222"/>
+                            <a:srgbClr val="2C3234"/>
                           </a:solidFill>
                           <a:latin typeface="Calibri"/>
                         </a:rPr>
@@ -5860,7 +5882,7 @@
                   </a:txBody>
                   <a:tcPr marT="38100" marB="38100" marL="76200" anchor="ctr">
                     <a:solidFill>
-                      <a:srgbClr val="F6F7F9"/>
+                      <a:srgbClr val="F6F7F7"/>
                     </a:solidFill>
                   </a:tcPr>
                 </a:tc>
@@ -5874,7 +5896,7 @@
                       <a:r>
                         <a:rPr sz="1200">
                           <a:solidFill>
-                            <a:srgbClr val="222222"/>
+                            <a:srgbClr val="2C3234"/>
                           </a:solidFill>
                           <a:latin typeface="Calibri"/>
                         </a:rPr>
@@ -5896,7 +5918,7 @@
                       <a:r>
                         <a:rPr sz="1200">
                           <a:solidFill>
-                            <a:srgbClr val="222222"/>
+                            <a:srgbClr val="2C3234"/>
                           </a:solidFill>
                           <a:latin typeface="Calibri"/>
                         </a:rPr>
@@ -5918,7 +5940,7 @@
                       <a:r>
                         <a:rPr sz="1200">
                           <a:solidFill>
-                            <a:srgbClr val="222222"/>
+                            <a:srgbClr val="2C3234"/>
                           </a:solidFill>
                           <a:latin typeface="Calibri"/>
                         </a:rPr>
@@ -5942,7 +5964,7 @@
                       <a:r>
                         <a:rPr sz="1200">
                           <a:solidFill>
-                            <a:srgbClr val="222222"/>
+                            <a:srgbClr val="2C3234"/>
                           </a:solidFill>
                           <a:latin typeface="Calibri"/>
                         </a:rPr>
@@ -5952,7 +5974,7 @@
                   </a:txBody>
                   <a:tcPr marT="38100" marB="38100" marL="76200" anchor="ctr">
                     <a:solidFill>
-                      <a:srgbClr val="F6F7F9"/>
+                      <a:srgbClr val="F6F7F7"/>
                     </a:solidFill>
                   </a:tcPr>
                 </a:tc>
@@ -5964,7 +5986,7 @@
                       <a:r>
                         <a:rPr sz="1200">
                           <a:solidFill>
-                            <a:srgbClr val="222222"/>
+                            <a:srgbClr val="2C3234"/>
                           </a:solidFill>
                           <a:latin typeface="Calibri"/>
                         </a:rPr>
@@ -5974,7 +5996,7 @@
                   </a:txBody>
                   <a:tcPr marT="38100" marB="38100" marL="76200" anchor="ctr">
                     <a:solidFill>
-                      <a:srgbClr val="F6F7F9"/>
+                      <a:srgbClr val="F6F7F7"/>
                     </a:solidFill>
                   </a:tcPr>
                 </a:tc>
@@ -5986,7 +6008,7 @@
                       <a:r>
                         <a:rPr sz="1200">
                           <a:solidFill>
-                            <a:srgbClr val="222222"/>
+                            <a:srgbClr val="2C3234"/>
                           </a:solidFill>
                           <a:latin typeface="Calibri"/>
                         </a:rPr>
@@ -5996,7 +6018,7 @@
                   </a:txBody>
                   <a:tcPr marT="38100" marB="38100" marL="76200" anchor="ctr">
                     <a:solidFill>
-                      <a:srgbClr val="F6F7F9"/>
+                      <a:srgbClr val="F6F7F7"/>
                     </a:solidFill>
                   </a:tcPr>
                 </a:tc>
@@ -6010,7 +6032,7 @@
                       <a:r>
                         <a:rPr sz="1200">
                           <a:solidFill>
-                            <a:srgbClr val="222222"/>
+                            <a:srgbClr val="2C3234"/>
                           </a:solidFill>
                           <a:latin typeface="Calibri"/>
                         </a:rPr>
@@ -6032,7 +6054,7 @@
                       <a:r>
                         <a:rPr sz="1200">
                           <a:solidFill>
-                            <a:srgbClr val="222222"/>
+                            <a:srgbClr val="2C3234"/>
                           </a:solidFill>
                           <a:latin typeface="Calibri"/>
                         </a:rPr>
@@ -6054,7 +6076,7 @@
                       <a:r>
                         <a:rPr sz="1200">
                           <a:solidFill>
-                            <a:srgbClr val="222222"/>
+                            <a:srgbClr val="2C3234"/>
                           </a:solidFill>
                           <a:latin typeface="Calibri"/>
                         </a:rPr>
@@ -6078,7 +6100,7 @@
                       <a:r>
                         <a:rPr sz="1200">
                           <a:solidFill>
-                            <a:srgbClr val="222222"/>
+                            <a:srgbClr val="2C3234"/>
                           </a:solidFill>
                           <a:latin typeface="Calibri"/>
                         </a:rPr>
@@ -6088,7 +6110,7 @@
                   </a:txBody>
                   <a:tcPr marT="38100" marB="38100" marL="76200" anchor="ctr">
                     <a:solidFill>
-                      <a:srgbClr val="F6F7F9"/>
+                      <a:srgbClr val="F6F7F7"/>
                     </a:solidFill>
                   </a:tcPr>
                 </a:tc>
@@ -6100,7 +6122,7 @@
                       <a:r>
                         <a:rPr sz="1200">
                           <a:solidFill>
-                            <a:srgbClr val="222222"/>
+                            <a:srgbClr val="2C3234"/>
                           </a:solidFill>
                           <a:latin typeface="Calibri"/>
                         </a:rPr>
@@ -6110,7 +6132,7 @@
                   </a:txBody>
                   <a:tcPr marT="38100" marB="38100" marL="76200" anchor="ctr">
                     <a:solidFill>
-                      <a:srgbClr val="F6F7F9"/>
+                      <a:srgbClr val="F6F7F7"/>
                     </a:solidFill>
                   </a:tcPr>
                 </a:tc>
@@ -6122,7 +6144,7 @@
                       <a:r>
                         <a:rPr sz="1200">
                           <a:solidFill>
-                            <a:srgbClr val="222222"/>
+                            <a:srgbClr val="2C3234"/>
                           </a:solidFill>
                           <a:latin typeface="Calibri"/>
                         </a:rPr>
@@ -6132,7 +6154,7 @@
                   </a:txBody>
                   <a:tcPr marT="38100" marB="38100" marL="76200" anchor="ctr">
                     <a:solidFill>
-                      <a:srgbClr val="F6F7F9"/>
+                      <a:srgbClr val="F6F7F7"/>
                     </a:solidFill>
                   </a:tcPr>
                 </a:tc>
@@ -6171,7 +6193,7 @@
             <a:r>
               <a:rPr sz="1150" b="0" i="1">
                 <a:solidFill>
-                  <a:srgbClr val="3E5C76"/>
+                  <a:srgbClr val="545E63"/>
                 </a:solidFill>
                 <a:latin typeface="Calibri"/>
               </a:rPr>
@@ -6236,7 +6258,7 @@
             <a:r>
               <a:rPr sz="1150" b="1" i="0">
                 <a:solidFill>
-                  <a:srgbClr val="1F9E97"/>
+                  <a:srgbClr val="5FA8CC"/>
                 </a:solidFill>
                 <a:latin typeface="Calibri"/>
               </a:rPr>
@@ -6275,7 +6297,7 @@
             <a:r>
               <a:rPr sz="2600" b="1" i="0">
                 <a:solidFill>
-                  <a:srgbClr val="16213E"/>
+                  <a:srgbClr val="2A363B"/>
                 </a:solidFill>
                 <a:latin typeface="Calibri"/>
               </a:rPr>
@@ -6314,7 +6336,7 @@
             <a:r>
               <a:rPr sz="900" b="0" i="0">
                 <a:solidFill>
-                  <a:srgbClr val="8592A6"/>
+                  <a:srgbClr val="8A97A0"/>
                 </a:solidFill>
                 <a:latin typeface="Calibri"/>
               </a:rPr>
@@ -6353,7 +6375,7 @@
             <a:r>
               <a:rPr sz="900" b="0" i="0">
                 <a:solidFill>
-                  <a:srgbClr val="8592A6"/>
+                  <a:srgbClr val="8A97A0"/>
                 </a:solidFill>
                 <a:latin typeface="Calibri"/>
               </a:rPr>
@@ -6387,7 +6409,7 @@
           <a:effectLst/>
           <a:effectLst>
             <a:outerShdw blurRad="90000" dist="30000" dir="5400000" rotWithShape="0">
-              <a:srgbClr val="16213E">
+              <a:srgbClr val="2A363B">
                 <a:alpha val="20000"/>
               </a:srgbClr>
             </a:outerShdw>
@@ -6430,7 +6452,7 @@
             <a:avLst/>
           </a:prstGeom>
           <a:solidFill>
-            <a:srgbClr val="C0392B"/>
+            <a:srgbClr val="A02E2E"/>
           </a:solidFill>
           <a:ln>
             <a:noFill/>
@@ -6489,7 +6511,7 @@
             <a:r>
               <a:rPr sz="1450" b="1" i="0">
                 <a:solidFill>
-                  <a:srgbClr val="16213E"/>
+                  <a:srgbClr val="2A363B"/>
                 </a:solidFill>
                 <a:latin typeface="Calibri"/>
               </a:rPr>
@@ -6498,7 +6520,7 @@
             <a:r>
               <a:rPr sz="1350" b="0" i="0">
                 <a:solidFill>
-                  <a:srgbClr val="222222"/>
+                  <a:srgbClr val="2C3234"/>
                 </a:solidFill>
                 <a:latin typeface="Calibri"/>
               </a:rPr>
@@ -6537,7 +6559,7 @@
             <a:r>
               <a:rPr sz="1450" b="1" i="0">
                 <a:solidFill>
-                  <a:srgbClr val="16213E"/>
+                  <a:srgbClr val="2A363B"/>
                 </a:solidFill>
                 <a:latin typeface="Calibri"/>
               </a:rPr>
@@ -6546,7 +6568,7 @@
             <a:r>
               <a:rPr sz="1350" b="0" i="0">
                 <a:solidFill>
-                  <a:srgbClr val="222222"/>
+                  <a:srgbClr val="2C3234"/>
                 </a:solidFill>
                 <a:latin typeface="Calibri"/>
               </a:rPr>
@@ -6585,7 +6607,7 @@
             <a:r>
               <a:rPr sz="1450" b="1" i="0">
                 <a:solidFill>
-                  <a:srgbClr val="16213E"/>
+                  <a:srgbClr val="2A363B"/>
                 </a:solidFill>
                 <a:latin typeface="Calibri"/>
               </a:rPr>
@@ -6594,7 +6616,7 @@
             <a:r>
               <a:rPr sz="1350" b="0" i="0">
                 <a:solidFill>
-                  <a:srgbClr val="222222"/>
+                  <a:srgbClr val="2C3234"/>
                 </a:solidFill>
                 <a:latin typeface="Calibri"/>
               </a:rPr>
@@ -6633,7 +6655,7 @@
             <a:r>
               <a:rPr sz="1450" b="1" i="0">
                 <a:solidFill>
-                  <a:srgbClr val="16213E"/>
+                  <a:srgbClr val="2A363B"/>
                 </a:solidFill>
                 <a:latin typeface="Calibri"/>
               </a:rPr>
@@ -6642,7 +6664,7 @@
             <a:r>
               <a:rPr sz="1350" b="0" i="0">
                 <a:solidFill>
-                  <a:srgbClr val="222222"/>
+                  <a:srgbClr val="2C3234"/>
                 </a:solidFill>
                 <a:latin typeface="Calibri"/>
               </a:rPr>
@@ -6707,7 +6729,7 @@
             <a:r>
               <a:rPr sz="1150" b="1" i="0">
                 <a:solidFill>
-                  <a:srgbClr val="1F9E97"/>
+                  <a:srgbClr val="5FA8CC"/>
                 </a:solidFill>
                 <a:latin typeface="Calibri"/>
               </a:rPr>
@@ -6746,7 +6768,7 @@
             <a:r>
               <a:rPr sz="2600" b="1" i="0">
                 <a:solidFill>
-                  <a:srgbClr val="16213E"/>
+                  <a:srgbClr val="2A363B"/>
                 </a:solidFill>
                 <a:latin typeface="Calibri"/>
               </a:rPr>
@@ -6785,7 +6807,7 @@
             <a:r>
               <a:rPr sz="900" b="0" i="0">
                 <a:solidFill>
-                  <a:srgbClr val="8592A6"/>
+                  <a:srgbClr val="8A97A0"/>
                 </a:solidFill>
                 <a:latin typeface="Calibri"/>
               </a:rPr>
@@ -6824,7 +6846,7 @@
             <a:r>
               <a:rPr sz="900" b="0" i="0">
                 <a:solidFill>
-                  <a:srgbClr val="8592A6"/>
+                  <a:srgbClr val="8A97A0"/>
                 </a:solidFill>
                 <a:latin typeface="Calibri"/>
               </a:rPr>
@@ -6863,7 +6885,7 @@
             <a:r>
               <a:rPr sz="1500" b="0" i="1">
                 <a:solidFill>
-                  <a:srgbClr val="16213E"/>
+                  <a:srgbClr val="2A363B"/>
                 </a:solidFill>
                 <a:latin typeface="Calibri"/>
               </a:rPr>
@@ -6901,13 +6923,13 @@
               <a:spcAft>
                 <a:spcPts val="1200"/>
               </a:spcAft>
-              <a:buFont typeface="Arial"/>
+              <a:buFont typeface="Poppins"/>
               <a:buChar char="•"/>
             </a:pPr>
             <a:r>
               <a:rPr sz="1350">
                 <a:solidFill>
-                  <a:srgbClr val="222222"/>
+                  <a:srgbClr val="2C3234"/>
                 </a:solidFill>
                 <a:latin typeface="Calibri"/>
               </a:rPr>
@@ -6922,13 +6944,13 @@
               <a:spcAft>
                 <a:spcPts val="1200"/>
               </a:spcAft>
-              <a:buFont typeface="Arial"/>
+              <a:buFont typeface="Poppins"/>
               <a:buChar char="•"/>
             </a:pPr>
             <a:r>
               <a:rPr sz="1350">
                 <a:solidFill>
-                  <a:srgbClr val="222222"/>
+                  <a:srgbClr val="2C3234"/>
                 </a:solidFill>
                 <a:latin typeface="Calibri"/>
               </a:rPr>
@@ -6943,13 +6965,13 @@
               <a:spcAft>
                 <a:spcPts val="1200"/>
               </a:spcAft>
-              <a:buFont typeface="Arial"/>
+              <a:buFont typeface="Poppins"/>
               <a:buChar char="•"/>
             </a:pPr>
             <a:r>
               <a:rPr sz="1350">
                 <a:solidFill>
-                  <a:srgbClr val="222222"/>
+                  <a:srgbClr val="2C3234"/>
                 </a:solidFill>
                 <a:latin typeface="Calibri"/>
               </a:rPr>
@@ -6975,7 +6997,7 @@
             </a:avLst>
           </a:prstGeom>
           <a:solidFill>
-            <a:srgbClr val="16213E"/>
+            <a:srgbClr val="2A363B"/>
           </a:solidFill>
           <a:ln>
             <a:noFill/>
@@ -7099,7 +7121,7 @@
             <a:r>
               <a:rPr sz="1150" b="1" i="0">
                 <a:solidFill>
-                  <a:srgbClr val="1F9E97"/>
+                  <a:srgbClr val="5FA8CC"/>
                 </a:solidFill>
                 <a:latin typeface="Calibri"/>
               </a:rPr>
@@ -7138,7 +7160,7 @@
             <a:r>
               <a:rPr sz="2600" b="1" i="0">
                 <a:solidFill>
-                  <a:srgbClr val="16213E"/>
+                  <a:srgbClr val="2A363B"/>
                 </a:solidFill>
                 <a:latin typeface="Calibri"/>
               </a:rPr>
@@ -7177,7 +7199,7 @@
             <a:r>
               <a:rPr sz="900" b="0" i="0">
                 <a:solidFill>
-                  <a:srgbClr val="8592A6"/>
+                  <a:srgbClr val="8A97A0"/>
                 </a:solidFill>
                 <a:latin typeface="Calibri"/>
               </a:rPr>
@@ -7216,7 +7238,7 @@
             <a:r>
               <a:rPr sz="900" b="0" i="0">
                 <a:solidFill>
-                  <a:srgbClr val="8592A6"/>
+                  <a:srgbClr val="8A97A0"/>
                 </a:solidFill>
                 <a:latin typeface="Calibri"/>
               </a:rPr>
@@ -7242,7 +7264,7 @@
             </a:avLst>
           </a:prstGeom>
           <a:solidFill>
-            <a:srgbClr val="F6F7F9"/>
+            <a:srgbClr val="F6F7F7"/>
           </a:solidFill>
           <a:ln>
             <a:noFill/>
@@ -7250,7 +7272,7 @@
           <a:effectLst/>
           <a:effectLst>
             <a:outerShdw blurRad="90000" dist="30000" dir="5400000" rotWithShape="0">
-              <a:srgbClr val="16213E">
+              <a:srgbClr val="2A363B">
                 <a:alpha val="20000"/>
               </a:srgbClr>
             </a:outerShdw>
@@ -7308,7 +7330,7 @@
             <a:r>
               <a:rPr sz="3200" b="1" i="0">
                 <a:solidFill>
-                  <a:srgbClr val="1F9E97"/>
+                  <a:srgbClr val="5FA8CC"/>
                 </a:solidFill>
                 <a:latin typeface="Calibri"/>
               </a:rPr>
@@ -7347,7 +7369,7 @@
             <a:r>
               <a:rPr sz="1800" b="1" i="0">
                 <a:solidFill>
-                  <a:srgbClr val="16213E"/>
+                  <a:srgbClr val="2A363B"/>
                 </a:solidFill>
                 <a:latin typeface="Calibri"/>
               </a:rPr>
@@ -7386,7 +7408,7 @@
             <a:r>
               <a:rPr sz="1250" b="0" i="0">
                 <a:solidFill>
-                  <a:srgbClr val="3E5C76"/>
+                  <a:srgbClr val="545E63"/>
                 </a:solidFill>
                 <a:latin typeface="Calibri"/>
               </a:rPr>
@@ -7412,7 +7434,7 @@
             </a:avLst>
           </a:prstGeom>
           <a:solidFill>
-            <a:srgbClr val="F6F7F9"/>
+            <a:srgbClr val="F6F7F7"/>
           </a:solidFill>
           <a:ln>
             <a:noFill/>
@@ -7420,7 +7442,7 @@
           <a:effectLst/>
           <a:effectLst>
             <a:outerShdw blurRad="90000" dist="30000" dir="5400000" rotWithShape="0">
-              <a:srgbClr val="16213E">
+              <a:srgbClr val="2A363B">
                 <a:alpha val="20000"/>
               </a:srgbClr>
             </a:outerShdw>
@@ -7478,7 +7500,7 @@
             <a:r>
               <a:rPr sz="3200" b="1" i="0">
                 <a:solidFill>
-                  <a:srgbClr val="1F9E97"/>
+                  <a:srgbClr val="5FA8CC"/>
                 </a:solidFill>
                 <a:latin typeface="Calibri"/>
               </a:rPr>
@@ -7517,7 +7539,7 @@
             <a:r>
               <a:rPr sz="1800" b="1" i="0">
                 <a:solidFill>
-                  <a:srgbClr val="16213E"/>
+                  <a:srgbClr val="2A363B"/>
                 </a:solidFill>
                 <a:latin typeface="Calibri"/>
               </a:rPr>
@@ -7556,7 +7578,7 @@
             <a:r>
               <a:rPr sz="1250" b="0" i="0">
                 <a:solidFill>
-                  <a:srgbClr val="3E5C76"/>
+                  <a:srgbClr val="545E63"/>
                 </a:solidFill>
                 <a:latin typeface="Calibri"/>
               </a:rPr>
@@ -7582,7 +7604,7 @@
             </a:avLst>
           </a:prstGeom>
           <a:solidFill>
-            <a:srgbClr val="F6F7F9"/>
+            <a:srgbClr val="F6F7F7"/>
           </a:solidFill>
           <a:ln>
             <a:noFill/>
@@ -7590,7 +7612,7 @@
           <a:effectLst/>
           <a:effectLst>
             <a:outerShdw blurRad="90000" dist="30000" dir="5400000" rotWithShape="0">
-              <a:srgbClr val="16213E">
+              <a:srgbClr val="2A363B">
                 <a:alpha val="20000"/>
               </a:srgbClr>
             </a:outerShdw>
@@ -7648,7 +7670,7 @@
             <a:r>
               <a:rPr sz="3200" b="1" i="0">
                 <a:solidFill>
-                  <a:srgbClr val="1F9E97"/>
+                  <a:srgbClr val="5FA8CC"/>
                 </a:solidFill>
                 <a:latin typeface="Calibri"/>
               </a:rPr>
@@ -7687,7 +7709,7 @@
             <a:r>
               <a:rPr sz="1800" b="1" i="0">
                 <a:solidFill>
-                  <a:srgbClr val="16213E"/>
+                  <a:srgbClr val="2A363B"/>
                 </a:solidFill>
                 <a:latin typeface="Calibri"/>
               </a:rPr>
@@ -7726,7 +7748,7 @@
             <a:r>
               <a:rPr sz="1250" b="0" i="0">
                 <a:solidFill>
-                  <a:srgbClr val="3E5C76"/>
+                  <a:srgbClr val="545E63"/>
                 </a:solidFill>
                 <a:latin typeface="Calibri"/>
               </a:rPr>
@@ -7749,7 +7771,7 @@
     <p:bg>
       <p:bgPr>
         <a:solidFill>
-          <a:srgbClr val="16213E"/>
+          <a:srgbClr val="2A363B"/>
         </a:solidFill>
         <a:effectLst/>
       </p:bgPr>
@@ -7776,7 +7798,7 @@
             <a:avLst/>
           </a:prstGeom>
           <a:solidFill>
-            <a:srgbClr val="0F3460"/>
+            <a:srgbClr val="3F474A"/>
           </a:solidFill>
           <a:ln>
             <a:noFill/>
@@ -7835,7 +7857,7 @@
             <a:r>
               <a:rPr sz="6400" b="1" i="0">
                 <a:solidFill>
-                  <a:srgbClr val="1F9E97"/>
+                  <a:srgbClr val="5FA8CC"/>
                 </a:solidFill>
                 <a:latin typeface="Calibri"/>
               </a:rPr>
@@ -7913,7 +7935,7 @@
             <a:r>
               <a:rPr sz="1500" b="0" i="1">
                 <a:solidFill>
-                  <a:srgbClr val="C9D6EC"/>
+                  <a:srgbClr val="C7D3D8"/>
                 </a:solidFill>
                 <a:latin typeface="Calibri"/>
               </a:rPr>
@@ -7952,7 +7974,7 @@
             <a:r>
               <a:rPr sz="900" b="0" i="0">
                 <a:solidFill>
-                  <a:srgbClr val="B8C2D6"/>
+                  <a:srgbClr val="B7BEC2"/>
                 </a:solidFill>
                 <a:latin typeface="Calibri"/>
               </a:rPr>
@@ -8017,7 +8039,7 @@
             <a:r>
               <a:rPr sz="1150" b="1" i="0">
                 <a:solidFill>
-                  <a:srgbClr val="1F9E97"/>
+                  <a:srgbClr val="5FA8CC"/>
                 </a:solidFill>
                 <a:latin typeface="Calibri"/>
               </a:rPr>
@@ -8056,7 +8078,7 @@
             <a:r>
               <a:rPr sz="2600" b="1" i="0">
                 <a:solidFill>
-                  <a:srgbClr val="16213E"/>
+                  <a:srgbClr val="2A363B"/>
                 </a:solidFill>
                 <a:latin typeface="Calibri"/>
               </a:rPr>
@@ -8095,7 +8117,7 @@
             <a:r>
               <a:rPr sz="900" b="0" i="0">
                 <a:solidFill>
-                  <a:srgbClr val="8592A6"/>
+                  <a:srgbClr val="8A97A0"/>
                 </a:solidFill>
                 <a:latin typeface="Calibri"/>
               </a:rPr>
@@ -8134,7 +8156,7 @@
             <a:r>
               <a:rPr sz="900" b="0" i="0">
                 <a:solidFill>
-                  <a:srgbClr val="8592A6"/>
+                  <a:srgbClr val="8A97A0"/>
                 </a:solidFill>
                 <a:latin typeface="Calibri"/>
               </a:rPr>
@@ -8223,7 +8245,7 @@
             <a:r>
               <a:rPr sz="1150" b="1" i="0">
                 <a:solidFill>
-                  <a:srgbClr val="1F9E97"/>
+                  <a:srgbClr val="5FA8CC"/>
                 </a:solidFill>
                 <a:latin typeface="Calibri"/>
               </a:rPr>
@@ -8262,7 +8284,7 @@
             <a:r>
               <a:rPr sz="2600" b="1" i="0">
                 <a:solidFill>
-                  <a:srgbClr val="16213E"/>
+                  <a:srgbClr val="2A363B"/>
                 </a:solidFill>
                 <a:latin typeface="Calibri"/>
               </a:rPr>
@@ -8301,7 +8323,7 @@
             <a:r>
               <a:rPr sz="900" b="0" i="0">
                 <a:solidFill>
-                  <a:srgbClr val="8592A6"/>
+                  <a:srgbClr val="8A97A0"/>
                 </a:solidFill>
                 <a:latin typeface="Calibri"/>
               </a:rPr>
@@ -8340,7 +8362,7 @@
             <a:r>
               <a:rPr sz="900" b="0" i="0">
                 <a:solidFill>
-                  <a:srgbClr val="8592A6"/>
+                  <a:srgbClr val="8A97A0"/>
                 </a:solidFill>
                 <a:latin typeface="Calibri"/>
               </a:rPr>
@@ -8379,7 +8401,7 @@
             <a:r>
               <a:rPr sz="1250" b="1" i="0">
                 <a:solidFill>
-                  <a:srgbClr val="1F9E97"/>
+                  <a:srgbClr val="5FA8CC"/>
                 </a:solidFill>
                 <a:latin typeface="Calibri"/>
               </a:rPr>
@@ -8417,13 +8439,13 @@
               <a:spcAft>
                 <a:spcPts val="1300"/>
               </a:spcAft>
-              <a:buFont typeface="Arial"/>
+              <a:buFont typeface="Poppins"/>
               <a:buChar char="•"/>
             </a:pPr>
             <a:r>
               <a:rPr sz="1250">
                 <a:solidFill>
-                  <a:srgbClr val="222222"/>
+                  <a:srgbClr val="2C3234"/>
                 </a:solidFill>
                 <a:latin typeface="Calibri"/>
               </a:rPr>
@@ -8438,13 +8460,13 @@
               <a:spcAft>
                 <a:spcPts val="1300"/>
               </a:spcAft>
-              <a:buFont typeface="Arial"/>
+              <a:buFont typeface="Poppins"/>
               <a:buChar char="•"/>
             </a:pPr>
             <a:r>
               <a:rPr sz="1250">
                 <a:solidFill>
-                  <a:srgbClr val="222222"/>
+                  <a:srgbClr val="2C3234"/>
                 </a:solidFill>
                 <a:latin typeface="Calibri"/>
               </a:rPr>
@@ -8459,13 +8481,13 @@
               <a:spcAft>
                 <a:spcPts val="1300"/>
               </a:spcAft>
-              <a:buFont typeface="Arial"/>
+              <a:buFont typeface="Poppins"/>
               <a:buChar char="•"/>
             </a:pPr>
             <a:r>
               <a:rPr sz="1250">
                 <a:solidFill>
-                  <a:srgbClr val="222222"/>
+                  <a:srgbClr val="2C3234"/>
                 </a:solidFill>
                 <a:latin typeface="Calibri"/>
               </a:rPr>
@@ -8480,13 +8502,13 @@
               <a:spcAft>
                 <a:spcPts val="1300"/>
               </a:spcAft>
-              <a:buFont typeface="Arial"/>
+              <a:buFont typeface="Poppins"/>
               <a:buChar char="•"/>
             </a:pPr>
             <a:r>
               <a:rPr sz="1250">
                 <a:solidFill>
-                  <a:srgbClr val="222222"/>
+                  <a:srgbClr val="2C3234"/>
                 </a:solidFill>
                 <a:latin typeface="Calibri"/>
               </a:rPr>
@@ -8525,7 +8547,7 @@
             <a:r>
               <a:rPr sz="1250" b="1" i="0">
                 <a:solidFill>
-                  <a:srgbClr val="1F9E97"/>
+                  <a:srgbClr val="5FA8CC"/>
                 </a:solidFill>
                 <a:latin typeface="Calibri"/>
               </a:rPr>
@@ -8563,13 +8585,13 @@
               <a:spcAft>
                 <a:spcPts val="1000"/>
               </a:spcAft>
-              <a:buFont typeface="Arial"/>
+              <a:buFont typeface="Poppins"/>
               <a:buChar char="•"/>
             </a:pPr>
             <a:r>
               <a:rPr sz="1250">
                 <a:solidFill>
-                  <a:srgbClr val="222222"/>
+                  <a:srgbClr val="2C3234"/>
                 </a:solidFill>
                 <a:latin typeface="Calibri"/>
               </a:rPr>
@@ -8584,13 +8606,13 @@
               <a:spcAft>
                 <a:spcPts val="1000"/>
               </a:spcAft>
-              <a:buFont typeface="Arial"/>
+              <a:buFont typeface="Poppins"/>
               <a:buChar char="•"/>
             </a:pPr>
             <a:r>
               <a:rPr sz="1250">
                 <a:solidFill>
-                  <a:srgbClr val="222222"/>
+                  <a:srgbClr val="2C3234"/>
                 </a:solidFill>
                 <a:latin typeface="Calibri"/>
               </a:rPr>
@@ -8605,13 +8627,13 @@
               <a:spcAft>
                 <a:spcPts val="1000"/>
               </a:spcAft>
-              <a:buFont typeface="Arial"/>
+              <a:buFont typeface="Poppins"/>
               <a:buChar char="•"/>
             </a:pPr>
             <a:r>
               <a:rPr sz="1250">
                 <a:solidFill>
-                  <a:srgbClr val="222222"/>
+                  <a:srgbClr val="2C3234"/>
                 </a:solidFill>
                 <a:latin typeface="Calibri"/>
               </a:rPr>
@@ -8626,13 +8648,13 @@
               <a:spcAft>
                 <a:spcPts val="1000"/>
               </a:spcAft>
-              <a:buFont typeface="Arial"/>
+              <a:buFont typeface="Poppins"/>
               <a:buChar char="•"/>
             </a:pPr>
             <a:r>
               <a:rPr sz="1250">
                 <a:solidFill>
-                  <a:srgbClr val="222222"/>
+                  <a:srgbClr val="2C3234"/>
                 </a:solidFill>
                 <a:latin typeface="Calibri"/>
               </a:rPr>
@@ -8647,13 +8669,13 @@
               <a:spcAft>
                 <a:spcPts val="1000"/>
               </a:spcAft>
-              <a:buFont typeface="Arial"/>
+              <a:buFont typeface="Poppins"/>
               <a:buChar char="•"/>
             </a:pPr>
             <a:r>
               <a:rPr sz="1250">
                 <a:solidFill>
-                  <a:srgbClr val="222222"/>
+                  <a:srgbClr val="2C3234"/>
                 </a:solidFill>
                 <a:latin typeface="Calibri"/>
               </a:rPr>
@@ -8718,7 +8740,7 @@
             <a:r>
               <a:rPr sz="1150" b="1" i="0">
                 <a:solidFill>
-                  <a:srgbClr val="1F9E97"/>
+                  <a:srgbClr val="5FA8CC"/>
                 </a:solidFill>
                 <a:latin typeface="Calibri"/>
               </a:rPr>
@@ -8757,7 +8779,7 @@
             <a:r>
               <a:rPr sz="2600" b="1" i="0">
                 <a:solidFill>
-                  <a:srgbClr val="16213E"/>
+                  <a:srgbClr val="2A363B"/>
                 </a:solidFill>
                 <a:latin typeface="Calibri"/>
               </a:rPr>
@@ -8796,7 +8818,7 @@
             <a:r>
               <a:rPr sz="900" b="0" i="0">
                 <a:solidFill>
-                  <a:srgbClr val="8592A6"/>
+                  <a:srgbClr val="8A97A0"/>
                 </a:solidFill>
                 <a:latin typeface="Calibri"/>
               </a:rPr>
@@ -8835,7 +8857,7 @@
             <a:r>
               <a:rPr sz="900" b="0" i="0">
                 <a:solidFill>
-                  <a:srgbClr val="8592A6"/>
+                  <a:srgbClr val="8A97A0"/>
                 </a:solidFill>
                 <a:latin typeface="Calibri"/>
               </a:rPr>
@@ -8869,7 +8891,7 @@
           <a:effectLst/>
           <a:effectLst>
             <a:outerShdw blurRad="90000" dist="30000" dir="5400000" rotWithShape="0">
-              <a:srgbClr val="16213E">
+              <a:srgbClr val="2A363B">
                 <a:alpha val="20000"/>
               </a:srgbClr>
             </a:outerShdw>
@@ -8912,7 +8934,7 @@
             <a:avLst/>
           </a:prstGeom>
           <a:solidFill>
-            <a:srgbClr val="E0982A"/>
+            <a:srgbClr val="E3A253"/>
           </a:solidFill>
           <a:ln>
             <a:noFill/>
@@ -8971,7 +8993,7 @@
             <a:r>
               <a:rPr sz="1700" b="1" i="0">
                 <a:solidFill>
-                  <a:srgbClr val="16213E"/>
+                  <a:srgbClr val="2A363B"/>
                 </a:solidFill>
                 <a:latin typeface="Calibri"/>
               </a:rPr>
@@ -9010,7 +9032,7 @@
             <a:r>
               <a:rPr sz="1350" b="0" i="0">
                 <a:solidFill>
-                  <a:srgbClr val="222222"/>
+                  <a:srgbClr val="2C3234"/>
                 </a:solidFill>
                 <a:latin typeface="Calibri"/>
               </a:rPr>
@@ -9049,7 +9071,7 @@
             <a:r>
               <a:rPr sz="1300" b="0" i="1">
                 <a:solidFill>
-                  <a:srgbClr val="16213E"/>
+                  <a:srgbClr val="2A363B"/>
                 </a:solidFill>
                 <a:latin typeface="Calibri"/>
               </a:rPr>
@@ -9072,7 +9094,7 @@
     <p:bg>
       <p:bgPr>
         <a:solidFill>
-          <a:srgbClr val="16213E"/>
+          <a:srgbClr val="2A363B"/>
         </a:solidFill>
         <a:effectLst/>
       </p:bgPr>
@@ -9099,7 +9121,7 @@
             <a:avLst/>
           </a:prstGeom>
           <a:solidFill>
-            <a:srgbClr val="0F3460"/>
+            <a:srgbClr val="3F474A"/>
           </a:solidFill>
           <a:ln>
             <a:noFill/>
@@ -9158,7 +9180,7 @@
             <a:r>
               <a:rPr sz="6400" b="1" i="0">
                 <a:solidFill>
-                  <a:srgbClr val="1F9E97"/>
+                  <a:srgbClr val="5FA8CC"/>
                 </a:solidFill>
                 <a:latin typeface="Calibri"/>
               </a:rPr>
@@ -9236,7 +9258,7 @@
             <a:r>
               <a:rPr sz="1500" b="0" i="1">
                 <a:solidFill>
-                  <a:srgbClr val="C9D6EC"/>
+                  <a:srgbClr val="C7D3D8"/>
                 </a:solidFill>
                 <a:latin typeface="Calibri"/>
               </a:rPr>
@@ -9275,7 +9297,7 @@
             <a:r>
               <a:rPr sz="900" b="0" i="0">
                 <a:solidFill>
-                  <a:srgbClr val="B8C2D6"/>
+                  <a:srgbClr val="B7BEC2"/>
                 </a:solidFill>
                 <a:latin typeface="Calibri"/>
               </a:rPr>
@@ -9340,7 +9362,7 @@
             <a:r>
               <a:rPr sz="1150" b="1" i="0">
                 <a:solidFill>
-                  <a:srgbClr val="1F9E97"/>
+                  <a:srgbClr val="5FA8CC"/>
                 </a:solidFill>
                 <a:latin typeface="Calibri"/>
               </a:rPr>
@@ -9379,7 +9401,7 @@
             <a:r>
               <a:rPr sz="2600" b="1" i="0">
                 <a:solidFill>
-                  <a:srgbClr val="16213E"/>
+                  <a:srgbClr val="2A363B"/>
                 </a:solidFill>
                 <a:latin typeface="Calibri"/>
               </a:rPr>
@@ -9418,7 +9440,7 @@
             <a:r>
               <a:rPr sz="900" b="0" i="0">
                 <a:solidFill>
-                  <a:srgbClr val="8592A6"/>
+                  <a:srgbClr val="8A97A0"/>
                 </a:solidFill>
                 <a:latin typeface="Calibri"/>
               </a:rPr>
@@ -9457,7 +9479,7 @@
             <a:r>
               <a:rPr sz="900" b="0" i="0">
                 <a:solidFill>
-                  <a:srgbClr val="8592A6"/>
+                  <a:srgbClr val="8A97A0"/>
                 </a:solidFill>
                 <a:latin typeface="Calibri"/>
               </a:rPr>
@@ -9507,7 +9529,7 @@
                   </a:txBody>
                   <a:tcPr marT="50800" marB="50800" anchor="ctr">
                     <a:solidFill>
-                      <a:srgbClr val="16213E"/>
+                      <a:srgbClr val="2A363B"/>
                     </a:solidFill>
                   </a:tcPr>
                 </a:tc>
@@ -9529,7 +9551,7 @@
                   </a:txBody>
                   <a:tcPr marT="50800" marB="50800" anchor="ctr">
                     <a:solidFill>
-                      <a:srgbClr val="16213E"/>
+                      <a:srgbClr val="2A363B"/>
                     </a:solidFill>
                   </a:tcPr>
                 </a:tc>
@@ -9543,7 +9565,7 @@
                       <a:r>
                         <a:rPr sz="1200">
                           <a:solidFill>
-                            <a:srgbClr val="222222"/>
+                            <a:srgbClr val="2C3234"/>
                           </a:solidFill>
                           <a:latin typeface="Calibri"/>
                         </a:rPr>
@@ -9565,7 +9587,7 @@
                       <a:r>
                         <a:rPr sz="1200">
                           <a:solidFill>
-                            <a:srgbClr val="222222"/>
+                            <a:srgbClr val="2C3234"/>
                           </a:solidFill>
                           <a:latin typeface="Calibri"/>
                         </a:rPr>
@@ -9589,7 +9611,7 @@
                       <a:r>
                         <a:rPr sz="1200">
                           <a:solidFill>
-                            <a:srgbClr val="222222"/>
+                            <a:srgbClr val="2C3234"/>
                           </a:solidFill>
                           <a:latin typeface="Calibri"/>
                         </a:rPr>
@@ -9599,7 +9621,7 @@
                   </a:txBody>
                   <a:tcPr marT="38100" marB="38100" marL="76200" anchor="ctr">
                     <a:solidFill>
-                      <a:srgbClr val="F6F7F9"/>
+                      <a:srgbClr val="F6F7F7"/>
                     </a:solidFill>
                   </a:tcPr>
                 </a:tc>
@@ -9611,7 +9633,7 @@
                       <a:r>
                         <a:rPr sz="1200">
                           <a:solidFill>
-                            <a:srgbClr val="222222"/>
+                            <a:srgbClr val="2C3234"/>
                           </a:solidFill>
                           <a:latin typeface="Calibri"/>
                         </a:rPr>
@@ -9621,7 +9643,7 @@
                   </a:txBody>
                   <a:tcPr marT="38100" marB="38100" marL="76200" anchor="ctr">
                     <a:solidFill>
-                      <a:srgbClr val="F6F7F9"/>
+                      <a:srgbClr val="F6F7F7"/>
                     </a:solidFill>
                   </a:tcPr>
                 </a:tc>
@@ -9635,7 +9657,7 @@
                       <a:r>
                         <a:rPr sz="1200">
                           <a:solidFill>
-                            <a:srgbClr val="222222"/>
+                            <a:srgbClr val="2C3234"/>
                           </a:solidFill>
                           <a:latin typeface="Calibri"/>
                         </a:rPr>
@@ -9657,7 +9679,7 @@
                       <a:r>
                         <a:rPr sz="1200">
                           <a:solidFill>
-                            <a:srgbClr val="222222"/>
+                            <a:srgbClr val="2C3234"/>
                           </a:solidFill>
                           <a:latin typeface="Calibri"/>
                         </a:rPr>
@@ -9681,7 +9703,7 @@
                       <a:r>
                         <a:rPr sz="1200">
                           <a:solidFill>
-                            <a:srgbClr val="222222"/>
+                            <a:srgbClr val="2C3234"/>
                           </a:solidFill>
                           <a:latin typeface="Calibri"/>
                         </a:rPr>
@@ -9691,7 +9713,7 @@
                   </a:txBody>
                   <a:tcPr marT="38100" marB="38100" marL="76200" anchor="ctr">
                     <a:solidFill>
-                      <a:srgbClr val="F6F7F9"/>
+                      <a:srgbClr val="F6F7F7"/>
                     </a:solidFill>
                   </a:tcPr>
                 </a:tc>
@@ -9703,7 +9725,7 @@
                       <a:r>
                         <a:rPr sz="1200">
                           <a:solidFill>
-                            <a:srgbClr val="222222"/>
+                            <a:srgbClr val="2C3234"/>
                           </a:solidFill>
                           <a:latin typeface="Calibri"/>
                         </a:rPr>
@@ -9713,7 +9735,7 @@
                   </a:txBody>
                   <a:tcPr marT="38100" marB="38100" marL="76200" anchor="ctr">
                     <a:solidFill>
-                      <a:srgbClr val="F6F7F9"/>
+                      <a:srgbClr val="F6F7F7"/>
                     </a:solidFill>
                   </a:tcPr>
                 </a:tc>
@@ -9752,7 +9774,7 @@
             <a:r>
               <a:rPr sz="1250" b="0" i="1">
                 <a:solidFill>
-                  <a:srgbClr val="3E5C76"/>
+                  <a:srgbClr val="545E63"/>
                 </a:solidFill>
                 <a:latin typeface="Calibri"/>
               </a:rPr>
@@ -9817,7 +9839,7 @@
             <a:r>
               <a:rPr sz="1150" b="1" i="0">
                 <a:solidFill>
-                  <a:srgbClr val="1F9E97"/>
+                  <a:srgbClr val="5FA8CC"/>
                 </a:solidFill>
                 <a:latin typeface="Calibri"/>
               </a:rPr>
@@ -9856,7 +9878,7 @@
             <a:r>
               <a:rPr sz="2600" b="1" i="0">
                 <a:solidFill>
-                  <a:srgbClr val="16213E"/>
+                  <a:srgbClr val="2A363B"/>
                 </a:solidFill>
                 <a:latin typeface="Calibri"/>
               </a:rPr>
@@ -9895,7 +9917,7 @@
             <a:r>
               <a:rPr sz="900" b="0" i="0">
                 <a:solidFill>
-                  <a:srgbClr val="8592A6"/>
+                  <a:srgbClr val="8A97A0"/>
                 </a:solidFill>
                 <a:latin typeface="Calibri"/>
               </a:rPr>
@@ -9934,7 +9956,7 @@
             <a:r>
               <a:rPr sz="900" b="0" i="0">
                 <a:solidFill>
-                  <a:srgbClr val="8592A6"/>
+                  <a:srgbClr val="8A97A0"/>
                 </a:solidFill>
                 <a:latin typeface="Calibri"/>
               </a:rPr>
@@ -10010,7 +10032,7 @@
         <a:srgbClr val="F79646"/>
       </a:accent6>
       <a:hlink>
-        <a:srgbClr val="0000FF"/>
+        <a:srgbClr val="2E7DA6"/>
       </a:hlink>
       <a:folHlink>
         <a:srgbClr val="800080"/>
@@ -10060,8 +10082,8 @@
         <a:font script="Hang" typeface="맑은 고딕"/>
         <a:font script="Hans" typeface="宋体"/>
         <a:font script="Hant" typeface="新細明體"/>
-        <a:font script="Arab" typeface="Arial"/>
-        <a:font script="Hebr" typeface="Arial"/>
+        <a:font script="Arab" typeface="Poppins"/>
+        <a:font script="Hebr" typeface="Poppins"/>
         <a:font script="Thai" typeface="Cordia New"/>
         <a:font script="Ethi" typeface="Nyala"/>
         <a:font script="Beng" typeface="Vrinda"/>
@@ -10083,7 +10105,7 @@
         <a:font script="Laoo" typeface="DokChampa"/>
         <a:font script="Sinh" typeface="Iskoola Pota"/>
         <a:font script="Mong" typeface="Mongolian Baiti"/>
-        <a:font script="Viet" typeface="Arial"/>
+        <a:font script="Viet" typeface="Poppins"/>
         <a:font script="Uigh" typeface="Microsoft Uighur"/>
         <a:font script="Geor" typeface="Sylfaen"/>
       </a:minorFont>

--- a/training/slides/GenAI-Observability-Technical-Deepdive.pptx
+++ b/training/slides/GenAI-Observability-Technical-Deepdive.pptx
@@ -5,24 +5,24 @@
     <p:sldMasterId id="2147483648" r:id="rId1"/>
   </p:sldMasterIdLst>
   <p:sldIdLst>
-    <p:sldId id="256" r:id="rId7"/>
-    <p:sldId id="257" r:id="rId8"/>
-    <p:sldId id="258" r:id="rId9"/>
-    <p:sldId id="259" r:id="rId10"/>
-    <p:sldId id="260" r:id="rId11"/>
-    <p:sldId id="261" r:id="rId12"/>
-    <p:sldId id="262" r:id="rId13"/>
-    <p:sldId id="263" r:id="rId14"/>
-    <p:sldId id="264" r:id="rId15"/>
-    <p:sldId id="265" r:id="rId16"/>
-    <p:sldId id="266" r:id="rId17"/>
-    <p:sldId id="267" r:id="rId18"/>
-    <p:sldId id="268" r:id="rId19"/>
-    <p:sldId id="269" r:id="rId20"/>
-    <p:sldId id="270" r:id="rId21"/>
-    <p:sldId id="271" r:id="rId22"/>
+    <p:sldId id="256" r:id="rId2"/>
+    <p:sldId id="257" r:id="rId3"/>
+    <p:sldId id="258" r:id="rId4"/>
+    <p:sldId id="259" r:id="rId5"/>
+    <p:sldId id="260" r:id="rId6"/>
+    <p:sldId id="261" r:id="rId7"/>
+    <p:sldId id="262" r:id="rId8"/>
+    <p:sldId id="263" r:id="rId9"/>
+    <p:sldId id="264" r:id="rId10"/>
+    <p:sldId id="265" r:id="rId11"/>
+    <p:sldId id="266" r:id="rId12"/>
+    <p:sldId id="267" r:id="rId13"/>
+    <p:sldId id="268" r:id="rId14"/>
+    <p:sldId id="269" r:id="rId15"/>
+    <p:sldId id="270" r:id="rId16"/>
+    <p:sldId id="271" r:id="rId17"/>
   </p:sldIdLst>
-  <p:sldSz cx="12191695" cy="6858000" type="screen4x3"/>
+  <p:sldSz cx="12192000" cy="6858000"/>
   <p:notesSz cx="6858000" cy="9144000"/>
   <p:defaultTextStyle>
     <a:defPPr>
@@ -119,6 +119,22 @@
       </a:defRPr>
     </a:lvl9pPr>
   </p:defaultTextStyle>
+  <p:extLst>
+    <p:ext uri="{EFAFB233-063F-42B5-8137-9DF3F51BA10A}">
+      <p15:sldGuideLst xmlns:p15="http://schemas.microsoft.com/office/powerpoint/2012/main">
+        <p15:guide id="1" orient="horz" pos="2160">
+          <p15:clr>
+            <a:srgbClr val="A4A3A4"/>
+          </p15:clr>
+        </p15:guide>
+        <p15:guide id="2" pos="2880">
+          <p15:clr>
+            <a:srgbClr val="A4A3A4"/>
+          </p15:clr>
+        </p15:guide>
+      </p15:sldGuideLst>
+    </p:ext>
+  </p:extLst>
 </p:presentation>
 </file>
 
@@ -160,10 +176,9 @@
           <a:lstStyle/>
           <a:p>
             <a:r>
-              <a:rPr lang="en-US" smtClean="0"/>
+              <a:rPr lang="en-US"/>
               <a:t>Click to edit Master title style</a:t>
             </a:r>
-            <a:endParaRPr lang="en-US"/>
           </a:p>
         </p:txBody>
       </p:sp>
@@ -279,10 +294,9 @@
           </a:lstStyle>
           <a:p>
             <a:r>
-              <a:rPr lang="en-US" smtClean="0"/>
+              <a:rPr lang="en-US"/>
               <a:t>Click to edit Master subtitle style</a:t>
             </a:r>
-            <a:endParaRPr lang="en-US"/>
           </a:p>
         </p:txBody>
       </p:sp>
@@ -303,7 +317,7 @@
           <a:p>
             <a:fld id="{5BCAD085-E8A6-8845-BD4E-CB4CCA059FC4}" type="datetimeFigureOut">
               <a:rPr lang="en-US" smtClean="0"/>
-              <a:t>1/27/13</a:t>
+              <a:t>7/15/26</a:t>
             </a:fld>
             <a:endParaRPr lang="en-US"/>
           </a:p>
@@ -397,10 +411,9 @@
           <a:lstStyle/>
           <a:p>
             <a:r>
-              <a:rPr lang="en-US" smtClean="0"/>
+              <a:rPr lang="en-US"/>
               <a:t>Click to edit Master title style</a:t>
             </a:r>
-            <a:endParaRPr lang="en-US"/>
           </a:p>
         </p:txBody>
       </p:sp>
@@ -421,38 +434,37 @@
           <a:p>
             <a:pPr lvl="0"/>
             <a:r>
-              <a:rPr lang="en-US" smtClean="0"/>
+              <a:rPr lang="en-US"/>
               <a:t>Click to edit Master text styles</a:t>
             </a:r>
           </a:p>
           <a:p>
             <a:pPr lvl="1"/>
             <a:r>
-              <a:rPr lang="en-US" smtClean="0"/>
+              <a:rPr lang="en-US"/>
               <a:t>Second level</a:t>
             </a:r>
           </a:p>
           <a:p>
             <a:pPr lvl="2"/>
             <a:r>
-              <a:rPr lang="en-US" smtClean="0"/>
+              <a:rPr lang="en-US"/>
               <a:t>Third level</a:t>
             </a:r>
           </a:p>
           <a:p>
             <a:pPr lvl="3"/>
             <a:r>
-              <a:rPr lang="en-US" smtClean="0"/>
+              <a:rPr lang="en-US"/>
               <a:t>Fourth level</a:t>
             </a:r>
           </a:p>
           <a:p>
             <a:pPr lvl="4"/>
             <a:r>
-              <a:rPr lang="en-US" smtClean="0"/>
+              <a:rPr lang="en-US"/>
               <a:t>Fifth level</a:t>
             </a:r>
-            <a:endParaRPr lang="en-US"/>
           </a:p>
         </p:txBody>
       </p:sp>
@@ -473,7 +485,7 @@
           <a:p>
             <a:fld id="{5BCAD085-E8A6-8845-BD4E-CB4CCA059FC4}" type="datetimeFigureOut">
               <a:rPr lang="en-US" smtClean="0"/>
-              <a:t>1/27/13</a:t>
+              <a:t>7/15/26</a:t>
             </a:fld>
             <a:endParaRPr lang="en-US"/>
           </a:p>
@@ -572,10 +584,9 @@
           <a:lstStyle/>
           <a:p>
             <a:r>
-              <a:rPr lang="en-US" smtClean="0"/>
+              <a:rPr lang="en-US"/>
               <a:t>Click to edit Master title style</a:t>
             </a:r>
-            <a:endParaRPr lang="en-US"/>
           </a:p>
         </p:txBody>
       </p:sp>
@@ -601,38 +612,37 @@
           <a:p>
             <a:pPr lvl="0"/>
             <a:r>
-              <a:rPr lang="en-US" smtClean="0"/>
+              <a:rPr lang="en-US"/>
               <a:t>Click to edit Master text styles</a:t>
             </a:r>
           </a:p>
           <a:p>
             <a:pPr lvl="1"/>
             <a:r>
-              <a:rPr lang="en-US" smtClean="0"/>
+              <a:rPr lang="en-US"/>
               <a:t>Second level</a:t>
             </a:r>
           </a:p>
           <a:p>
             <a:pPr lvl="2"/>
             <a:r>
-              <a:rPr lang="en-US" smtClean="0"/>
+              <a:rPr lang="en-US"/>
               <a:t>Third level</a:t>
             </a:r>
           </a:p>
           <a:p>
             <a:pPr lvl="3"/>
             <a:r>
-              <a:rPr lang="en-US" smtClean="0"/>
+              <a:rPr lang="en-US"/>
               <a:t>Fourth level</a:t>
             </a:r>
           </a:p>
           <a:p>
             <a:pPr lvl="4"/>
             <a:r>
-              <a:rPr lang="en-US" smtClean="0"/>
+              <a:rPr lang="en-US"/>
               <a:t>Fifth level</a:t>
             </a:r>
-            <a:endParaRPr lang="en-US"/>
           </a:p>
         </p:txBody>
       </p:sp>
@@ -653,7 +663,7 @@
           <a:p>
             <a:fld id="{5BCAD085-E8A6-8845-BD4E-CB4CCA059FC4}" type="datetimeFigureOut">
               <a:rPr lang="en-US" smtClean="0"/>
-              <a:t>1/27/13</a:t>
+              <a:t>7/15/26</a:t>
             </a:fld>
             <a:endParaRPr lang="en-US"/>
           </a:p>
@@ -747,10 +757,9 @@
           <a:lstStyle/>
           <a:p>
             <a:r>
-              <a:rPr lang="en-US" smtClean="0"/>
+              <a:rPr lang="en-US"/>
               <a:t>Click to edit Master title style</a:t>
             </a:r>
-            <a:endParaRPr lang="en-US"/>
           </a:p>
         </p:txBody>
       </p:sp>
@@ -771,38 +780,37 @@
           <a:p>
             <a:pPr lvl="0"/>
             <a:r>
-              <a:rPr lang="en-US" smtClean="0"/>
+              <a:rPr lang="en-US"/>
               <a:t>Click to edit Master text styles</a:t>
             </a:r>
           </a:p>
           <a:p>
             <a:pPr lvl="1"/>
             <a:r>
-              <a:rPr lang="en-US" smtClean="0"/>
+              <a:rPr lang="en-US"/>
               <a:t>Second level</a:t>
             </a:r>
           </a:p>
           <a:p>
             <a:pPr lvl="2"/>
             <a:r>
-              <a:rPr lang="en-US" smtClean="0"/>
+              <a:rPr lang="en-US"/>
               <a:t>Third level</a:t>
             </a:r>
           </a:p>
           <a:p>
             <a:pPr lvl="3"/>
             <a:r>
-              <a:rPr lang="en-US" smtClean="0"/>
+              <a:rPr lang="en-US"/>
               <a:t>Fourth level</a:t>
             </a:r>
           </a:p>
           <a:p>
             <a:pPr lvl="4"/>
             <a:r>
-              <a:rPr lang="en-US" smtClean="0"/>
+              <a:rPr lang="en-US"/>
               <a:t>Fifth level</a:t>
             </a:r>
-            <a:endParaRPr lang="en-US"/>
           </a:p>
         </p:txBody>
       </p:sp>
@@ -823,7 +831,7 @@
           <a:p>
             <a:fld id="{5BCAD085-E8A6-8845-BD4E-CB4CCA059FC4}" type="datetimeFigureOut">
               <a:rPr lang="en-US" smtClean="0"/>
-              <a:t>1/27/13</a:t>
+              <a:t>7/15/26</a:t>
             </a:fld>
             <a:endParaRPr lang="en-US"/>
           </a:p>
@@ -926,10 +934,9 @@
           </a:lstStyle>
           <a:p>
             <a:r>
-              <a:rPr lang="en-US" smtClean="0"/>
+              <a:rPr lang="en-US"/>
               <a:t>Click to edit Master title style</a:t>
             </a:r>
-            <a:endParaRPr lang="en-US"/>
           </a:p>
         </p:txBody>
       </p:sp>
@@ -1046,7 +1053,7 @@
           <a:p>
             <a:pPr lvl="0"/>
             <a:r>
-              <a:rPr lang="en-US" smtClean="0"/>
+              <a:rPr lang="en-US"/>
               <a:t>Click to edit Master text styles</a:t>
             </a:r>
           </a:p>
@@ -1069,7 +1076,7 @@
           <a:p>
             <a:fld id="{5BCAD085-E8A6-8845-BD4E-CB4CCA059FC4}" type="datetimeFigureOut">
               <a:rPr lang="en-US" smtClean="0"/>
-              <a:t>1/27/13</a:t>
+              <a:t>7/15/26</a:t>
             </a:fld>
             <a:endParaRPr lang="en-US"/>
           </a:p>
@@ -1163,10 +1170,9 @@
           <a:lstStyle/>
           <a:p>
             <a:r>
-              <a:rPr lang="en-US" smtClean="0"/>
+              <a:rPr lang="en-US"/>
               <a:t>Click to edit Master title style</a:t>
             </a:r>
-            <a:endParaRPr lang="en-US"/>
           </a:p>
         </p:txBody>
       </p:sp>
@@ -1220,38 +1226,37 @@
           <a:p>
             <a:pPr lvl="0"/>
             <a:r>
-              <a:rPr lang="en-US" smtClean="0"/>
+              <a:rPr lang="en-US"/>
               <a:t>Click to edit Master text styles</a:t>
             </a:r>
           </a:p>
           <a:p>
             <a:pPr lvl="1"/>
             <a:r>
-              <a:rPr lang="en-US" smtClean="0"/>
+              <a:rPr lang="en-US"/>
               <a:t>Second level</a:t>
             </a:r>
           </a:p>
           <a:p>
             <a:pPr lvl="2"/>
             <a:r>
-              <a:rPr lang="en-US" smtClean="0"/>
+              <a:rPr lang="en-US"/>
               <a:t>Third level</a:t>
             </a:r>
           </a:p>
           <a:p>
             <a:pPr lvl="3"/>
             <a:r>
-              <a:rPr lang="en-US" smtClean="0"/>
+              <a:rPr lang="en-US"/>
               <a:t>Fourth level</a:t>
             </a:r>
           </a:p>
           <a:p>
             <a:pPr lvl="4"/>
             <a:r>
-              <a:rPr lang="en-US" smtClean="0"/>
+              <a:rPr lang="en-US"/>
               <a:t>Fifth level</a:t>
             </a:r>
-            <a:endParaRPr lang="en-US"/>
           </a:p>
         </p:txBody>
       </p:sp>
@@ -1305,38 +1310,37 @@
           <a:p>
             <a:pPr lvl="0"/>
             <a:r>
-              <a:rPr lang="en-US" smtClean="0"/>
+              <a:rPr lang="en-US"/>
               <a:t>Click to edit Master text styles</a:t>
             </a:r>
           </a:p>
           <a:p>
             <a:pPr lvl="1"/>
             <a:r>
-              <a:rPr lang="en-US" smtClean="0"/>
+              <a:rPr lang="en-US"/>
               <a:t>Second level</a:t>
             </a:r>
           </a:p>
           <a:p>
             <a:pPr lvl="2"/>
             <a:r>
-              <a:rPr lang="en-US" smtClean="0"/>
+              <a:rPr lang="en-US"/>
               <a:t>Third level</a:t>
             </a:r>
           </a:p>
           <a:p>
             <a:pPr lvl="3"/>
             <a:r>
-              <a:rPr lang="en-US" smtClean="0"/>
+              <a:rPr lang="en-US"/>
               <a:t>Fourth level</a:t>
             </a:r>
           </a:p>
           <a:p>
             <a:pPr lvl="4"/>
             <a:r>
-              <a:rPr lang="en-US" smtClean="0"/>
+              <a:rPr lang="en-US"/>
               <a:t>Fifth level</a:t>
             </a:r>
-            <a:endParaRPr lang="en-US"/>
           </a:p>
         </p:txBody>
       </p:sp>
@@ -1357,7 +1361,7 @@
           <a:p>
             <a:fld id="{5BCAD085-E8A6-8845-BD4E-CB4CCA059FC4}" type="datetimeFigureOut">
               <a:rPr lang="en-US" smtClean="0"/>
-              <a:t>1/27/13</a:t>
+              <a:t>7/15/26</a:t>
             </a:fld>
             <a:endParaRPr lang="en-US"/>
           </a:p>
@@ -1455,10 +1459,9 @@
           </a:lstStyle>
           <a:p>
             <a:r>
-              <a:rPr lang="en-US" smtClean="0"/>
+              <a:rPr lang="en-US"/>
               <a:t>Click to edit Master title style</a:t>
             </a:r>
-            <a:endParaRPr lang="en-US"/>
           </a:p>
         </p:txBody>
       </p:sp>
@@ -1521,7 +1524,7 @@
           <a:p>
             <a:pPr lvl="0"/>
             <a:r>
-              <a:rPr lang="en-US" smtClean="0"/>
+              <a:rPr lang="en-US"/>
               <a:t>Click to edit Master text styles</a:t>
             </a:r>
           </a:p>
@@ -1577,38 +1580,37 @@
           <a:p>
             <a:pPr lvl="0"/>
             <a:r>
-              <a:rPr lang="en-US" smtClean="0"/>
+              <a:rPr lang="en-US"/>
               <a:t>Click to edit Master text styles</a:t>
             </a:r>
           </a:p>
           <a:p>
             <a:pPr lvl="1"/>
             <a:r>
-              <a:rPr lang="en-US" smtClean="0"/>
+              <a:rPr lang="en-US"/>
               <a:t>Second level</a:t>
             </a:r>
           </a:p>
           <a:p>
             <a:pPr lvl="2"/>
             <a:r>
-              <a:rPr lang="en-US" smtClean="0"/>
+              <a:rPr lang="en-US"/>
               <a:t>Third level</a:t>
             </a:r>
           </a:p>
           <a:p>
             <a:pPr lvl="3"/>
             <a:r>
-              <a:rPr lang="en-US" smtClean="0"/>
+              <a:rPr lang="en-US"/>
               <a:t>Fourth level</a:t>
             </a:r>
           </a:p>
           <a:p>
             <a:pPr lvl="4"/>
             <a:r>
-              <a:rPr lang="en-US" smtClean="0"/>
+              <a:rPr lang="en-US"/>
               <a:t>Fifth level</a:t>
             </a:r>
-            <a:endParaRPr lang="en-US"/>
           </a:p>
         </p:txBody>
       </p:sp>
@@ -1671,7 +1673,7 @@
           <a:p>
             <a:pPr lvl="0"/>
             <a:r>
-              <a:rPr lang="en-US" smtClean="0"/>
+              <a:rPr lang="en-US"/>
               <a:t>Click to edit Master text styles</a:t>
             </a:r>
           </a:p>
@@ -1727,38 +1729,37 @@
           <a:p>
             <a:pPr lvl="0"/>
             <a:r>
-              <a:rPr lang="en-US" smtClean="0"/>
+              <a:rPr lang="en-US"/>
               <a:t>Click to edit Master text styles</a:t>
             </a:r>
           </a:p>
           <a:p>
             <a:pPr lvl="1"/>
             <a:r>
-              <a:rPr lang="en-US" smtClean="0"/>
+              <a:rPr lang="en-US"/>
               <a:t>Second level</a:t>
             </a:r>
           </a:p>
           <a:p>
             <a:pPr lvl="2"/>
             <a:r>
-              <a:rPr lang="en-US" smtClean="0"/>
+              <a:rPr lang="en-US"/>
               <a:t>Third level</a:t>
             </a:r>
           </a:p>
           <a:p>
             <a:pPr lvl="3"/>
             <a:r>
-              <a:rPr lang="en-US" smtClean="0"/>
+              <a:rPr lang="en-US"/>
               <a:t>Fourth level</a:t>
             </a:r>
           </a:p>
           <a:p>
             <a:pPr lvl="4"/>
             <a:r>
-              <a:rPr lang="en-US" smtClean="0"/>
+              <a:rPr lang="en-US"/>
               <a:t>Fifth level</a:t>
             </a:r>
-            <a:endParaRPr lang="en-US"/>
           </a:p>
         </p:txBody>
       </p:sp>
@@ -1779,7 +1780,7 @@
           <a:p>
             <a:fld id="{5BCAD085-E8A6-8845-BD4E-CB4CCA059FC4}" type="datetimeFigureOut">
               <a:rPr lang="en-US" smtClean="0"/>
-              <a:t>1/27/13</a:t>
+              <a:t>7/15/26</a:t>
             </a:fld>
             <a:endParaRPr lang="en-US"/>
           </a:p>
@@ -1873,10 +1874,9 @@
           <a:lstStyle/>
           <a:p>
             <a:r>
-              <a:rPr lang="en-US" smtClean="0"/>
+              <a:rPr lang="en-US"/>
               <a:t>Click to edit Master title style</a:t>
             </a:r>
-            <a:endParaRPr lang="en-US"/>
           </a:p>
         </p:txBody>
       </p:sp>
@@ -1897,7 +1897,7 @@
           <a:p>
             <a:fld id="{5BCAD085-E8A6-8845-BD4E-CB4CCA059FC4}" type="datetimeFigureOut">
               <a:rPr lang="en-US" smtClean="0"/>
-              <a:t>1/27/13</a:t>
+              <a:t>7/15/26</a:t>
             </a:fld>
             <a:endParaRPr lang="en-US"/>
           </a:p>
@@ -1992,7 +1992,7 @@
           <a:p>
             <a:fld id="{5BCAD085-E8A6-8845-BD4E-CB4CCA059FC4}" type="datetimeFigureOut">
               <a:rPr lang="en-US" smtClean="0"/>
-              <a:t>1/27/13</a:t>
+              <a:t>7/15/26</a:t>
             </a:fld>
             <a:endParaRPr lang="en-US"/>
           </a:p>
@@ -2095,10 +2095,9 @@
           </a:lstStyle>
           <a:p>
             <a:r>
-              <a:rPr lang="en-US" smtClean="0"/>
+              <a:rPr lang="en-US"/>
               <a:t>Click to edit Master title style</a:t>
             </a:r>
-            <a:endParaRPr lang="en-US"/>
           </a:p>
         </p:txBody>
       </p:sp>
@@ -2152,38 +2151,37 @@
           <a:p>
             <a:pPr lvl="0"/>
             <a:r>
-              <a:rPr lang="en-US" smtClean="0"/>
+              <a:rPr lang="en-US"/>
               <a:t>Click to edit Master text styles</a:t>
             </a:r>
           </a:p>
           <a:p>
             <a:pPr lvl="1"/>
             <a:r>
-              <a:rPr lang="en-US" smtClean="0"/>
+              <a:rPr lang="en-US"/>
               <a:t>Second level</a:t>
             </a:r>
           </a:p>
           <a:p>
             <a:pPr lvl="2"/>
             <a:r>
-              <a:rPr lang="en-US" smtClean="0"/>
+              <a:rPr lang="en-US"/>
               <a:t>Third level</a:t>
             </a:r>
           </a:p>
           <a:p>
             <a:pPr lvl="3"/>
             <a:r>
-              <a:rPr lang="en-US" smtClean="0"/>
+              <a:rPr lang="en-US"/>
               <a:t>Fourth level</a:t>
             </a:r>
           </a:p>
           <a:p>
             <a:pPr lvl="4"/>
             <a:r>
-              <a:rPr lang="en-US" smtClean="0"/>
+              <a:rPr lang="en-US"/>
               <a:t>Fifth level</a:t>
             </a:r>
-            <a:endParaRPr lang="en-US"/>
           </a:p>
         </p:txBody>
       </p:sp>
@@ -2246,7 +2244,7 @@
           <a:p>
             <a:pPr lvl="0"/>
             <a:r>
-              <a:rPr lang="en-US" smtClean="0"/>
+              <a:rPr lang="en-US"/>
               <a:t>Click to edit Master text styles</a:t>
             </a:r>
           </a:p>
@@ -2269,7 +2267,7 @@
           <a:p>
             <a:fld id="{5BCAD085-E8A6-8845-BD4E-CB4CCA059FC4}" type="datetimeFigureOut">
               <a:rPr lang="en-US" smtClean="0"/>
-              <a:t>1/27/13</a:t>
+              <a:t>7/15/26</a:t>
             </a:fld>
             <a:endParaRPr lang="en-US"/>
           </a:p>
@@ -2372,10 +2370,9 @@
           </a:lstStyle>
           <a:p>
             <a:r>
-              <a:rPr lang="en-US" smtClean="0"/>
+              <a:rPr lang="en-US"/>
               <a:t>Click to edit Master title style</a:t>
             </a:r>
-            <a:endParaRPr lang="en-US"/>
           </a:p>
         </p:txBody>
       </p:sp>
@@ -2499,7 +2496,7 @@
           <a:p>
             <a:pPr lvl="0"/>
             <a:r>
-              <a:rPr lang="en-US" smtClean="0"/>
+              <a:rPr lang="en-US"/>
               <a:t>Click to edit Master text styles</a:t>
             </a:r>
           </a:p>
@@ -2522,7 +2519,7 @@
           <a:p>
             <a:fld id="{5BCAD085-E8A6-8845-BD4E-CB4CCA059FC4}" type="datetimeFigureOut">
               <a:rPr lang="en-US" smtClean="0"/>
-              <a:t>1/27/13</a:t>
+              <a:t>7/15/26</a:t>
             </a:fld>
             <a:endParaRPr lang="en-US"/>
           </a:p>
@@ -2631,10 +2628,9 @@
           <a:lstStyle/>
           <a:p>
             <a:r>
-              <a:rPr lang="en-US" smtClean="0"/>
+              <a:rPr lang="en-US"/>
               <a:t>Click to edit Master title style</a:t>
             </a:r>
-            <a:endParaRPr lang="en-US"/>
           </a:p>
         </p:txBody>
       </p:sp>
@@ -2665,38 +2661,37 @@
           <a:p>
             <a:pPr lvl="0"/>
             <a:r>
-              <a:rPr lang="en-US" smtClean="0"/>
+              <a:rPr lang="en-US"/>
               <a:t>Click to edit Master text styles</a:t>
             </a:r>
           </a:p>
           <a:p>
             <a:pPr lvl="1"/>
             <a:r>
-              <a:rPr lang="en-US" smtClean="0"/>
+              <a:rPr lang="en-US"/>
               <a:t>Second level</a:t>
             </a:r>
           </a:p>
           <a:p>
             <a:pPr lvl="2"/>
             <a:r>
-              <a:rPr lang="en-US" smtClean="0"/>
+              <a:rPr lang="en-US"/>
               <a:t>Third level</a:t>
             </a:r>
           </a:p>
           <a:p>
             <a:pPr lvl="3"/>
             <a:r>
-              <a:rPr lang="en-US" smtClean="0"/>
+              <a:rPr lang="en-US"/>
               <a:t>Fourth level</a:t>
             </a:r>
           </a:p>
           <a:p>
             <a:pPr lvl="4"/>
             <a:r>
-              <a:rPr lang="en-US" smtClean="0"/>
+              <a:rPr lang="en-US"/>
               <a:t>Fifth level</a:t>
             </a:r>
-            <a:endParaRPr lang="en-US"/>
           </a:p>
         </p:txBody>
       </p:sp>
@@ -2735,7 +2730,7 @@
           <a:p>
             <a:fld id="{5BCAD085-E8A6-8845-BD4E-CB4CCA059FC4}" type="datetimeFigureOut">
               <a:rPr lang="en-US" smtClean="0"/>
-              <a:t>1/27/13</a:t>
+              <a:t>7/15/26</a:t>
             </a:fld>
             <a:endParaRPr lang="en-US"/>
           </a:p>
@@ -3094,7 +3089,7 @@
 </file>
 
 <file path=ppt/slides/slide1.xml><?xml version="1.0" encoding="utf-8"?>
-<p:sld xmlns:a="http://schemas.openxmlformats.org/drawingml/2006/main" xmlns:p="http://schemas.openxmlformats.org/presentationml/2006/main" xmlns:r="http://schemas.openxmlformats.org/officeDocument/2006/relationships">
+<p:sld xmlns:a="http://schemas.openxmlformats.org/drawingml/2006/main" xmlns:r="http://schemas.openxmlformats.org/officeDocument/2006/relationships" xmlns:p="http://schemas.openxmlformats.org/presentationml/2006/main">
   <p:cSld>
     <p:bg>
       <p:bgPr>
@@ -3110,20 +3105,170 @@
         <p:cNvGrpSpPr/>
         <p:nvPr/>
       </p:nvGrpSpPr>
-      <p:grpSpPr/>
-      <p:sp>
-        <p:nvSpPr>
-          <p:cNvPr id="2" name="Oval 1"/>
+      <p:grpSpPr>
+        <a:xfrm>
+          <a:off x="0" y="0"/>
+          <a:ext cx="0" cy="0"/>
+          <a:chOff x="0" y="0"/>
+          <a:chExt cx="0" cy="0"/>
+        </a:xfrm>
+      </p:grpSpPr>
+      <p:pic>
+        <p:nvPicPr>
+          <p:cNvPr id="901" name="Picture 900" descr="GenAIObsPPT-2.jpg"/>
+          <p:cNvPicPr>
+            <a:picLocks noChangeAspect="1"/>
+          </p:cNvPicPr>
+          <p:nvPr/>
+        </p:nvPicPr>
+        <p:blipFill>
+          <a:blip r:embed="rId2"/>
+          <a:stretch>
+            <a:fillRect/>
+          </a:stretch>
+        </p:blipFill>
+        <p:spPr>
+          <a:xfrm>
+            <a:off x="0" y="13779"/>
+            <a:ext cx="12191695" cy="6858000"/>
+          </a:xfrm>
+          <a:prstGeom prst="rect">
+            <a:avLst/>
+          </a:prstGeom>
+        </p:spPr>
+      </p:pic>
+      <p:sp>
+        <p:nvSpPr>
+          <p:cNvPr id="4" name="TextBox 3"/>
+          <p:cNvSpPr txBox="1"/>
+          <p:nvPr/>
+        </p:nvSpPr>
+        <p:spPr>
+          <a:xfrm>
+            <a:off x="822960" y="1965960"/>
+            <a:ext cx="8229600" cy="457200"/>
+          </a:xfrm>
+          <a:prstGeom prst="rect">
+            <a:avLst/>
+          </a:prstGeom>
+          <a:noFill/>
+        </p:spPr>
+        <p:txBody>
+          <a:bodyPr wrap="square" lIns="0" tIns="0" rIns="0" bIns="0">
+            <a:spAutoFit/>
+          </a:bodyPr>
+          <a:lstStyle/>
+          <a:p>
+            <a:pPr algn="l">
+              <a:lnSpc>
+                <a:spcPct val="115000"/>
+              </a:lnSpc>
+            </a:pPr>
+            <a:r>
+              <a:rPr sz="1400" b="1" i="0">
+                <a:solidFill>
+                  <a:srgbClr val="5FA8CC"/>
+                </a:solidFill>
+                <a:latin typeface="Calibri"/>
+              </a:rPr>
+              <a:t>MOCK / PORTFOLIO REFERENCE — TECHNICAL TRACK</a:t>
+            </a:r>
+          </a:p>
+        </p:txBody>
+      </p:sp>
+      <p:sp>
+        <p:nvSpPr>
+          <p:cNvPr id="5" name="TextBox 4"/>
+          <p:cNvSpPr txBox="1"/>
+          <p:nvPr/>
+        </p:nvSpPr>
+        <p:spPr>
+          <a:xfrm>
+            <a:off x="822960" y="2377440"/>
+            <a:ext cx="9601200" cy="1554480"/>
+          </a:xfrm>
+          <a:prstGeom prst="rect">
+            <a:avLst/>
+          </a:prstGeom>
+          <a:noFill/>
+        </p:spPr>
+        <p:txBody>
+          <a:bodyPr wrap="square" lIns="0" tIns="0" rIns="0" bIns="0">
+            <a:spAutoFit/>
+          </a:bodyPr>
+          <a:lstStyle/>
+          <a:p>
+            <a:pPr algn="l">
+              <a:lnSpc>
+                <a:spcPct val="105000"/>
+              </a:lnSpc>
+            </a:pPr>
+            <a:r>
+              <a:rPr sz="4000" b="1" i="0">
+                <a:solidFill>
+                  <a:srgbClr val="FFFFFF"/>
+                </a:solidFill>
+                <a:latin typeface="Calibri"/>
+              </a:rPr>
+              <a:t>Building the Real Thing</a:t>
+            </a:r>
+          </a:p>
+        </p:txBody>
+      </p:sp>
+      <p:sp>
+        <p:nvSpPr>
+          <p:cNvPr id="6" name="TextBox 5"/>
+          <p:cNvSpPr txBox="1"/>
+          <p:nvPr/>
+        </p:nvSpPr>
+        <p:spPr>
+          <a:xfrm>
+            <a:off x="822960" y="3794760"/>
+            <a:ext cx="8412480" cy="1097280"/>
+          </a:xfrm>
+          <a:prstGeom prst="rect">
+            <a:avLst/>
+          </a:prstGeom>
+          <a:noFill/>
+        </p:spPr>
+        <p:txBody>
+          <a:bodyPr wrap="square" lIns="0" tIns="0" rIns="0" bIns="0">
+            <a:spAutoFit/>
+          </a:bodyPr>
+          <a:lstStyle/>
+          <a:p>
+            <a:pPr algn="l">
+              <a:lnSpc>
+                <a:spcPct val="130000"/>
+              </a:lnSpc>
+            </a:pPr>
+            <a:r>
+              <a:rPr sz="1600" b="0" i="1">
+                <a:solidFill>
+                  <a:srgbClr val="C7D3D8"/>
+                </a:solidFill>
+                <a:latin typeface="Calibri"/>
+              </a:rPr>
+              <a:t>Build requirements, the Datadog implementation reference, and a phased, gated plan for an agent (or engineering team) to build the production infrastructure this demo mocks.</a:t>
+            </a:r>
+          </a:p>
+        </p:txBody>
+      </p:sp>
+      <p:sp>
+        <p:nvSpPr>
+          <p:cNvPr id="7" name="Rounded Rectangle 6"/>
           <p:cNvSpPr/>
           <p:nvPr/>
         </p:nvSpPr>
         <p:spPr>
           <a:xfrm>
-            <a:off x="8869680" y="-2103120"/>
-            <a:ext cx="5943600" cy="5943600"/>
-          </a:xfrm>
-          <a:prstGeom prst="ellipse">
-            <a:avLst/>
+            <a:off x="822959" y="4937760"/>
+            <a:ext cx="5339846" cy="457200"/>
+          </a:xfrm>
+          <a:prstGeom prst="roundRect">
+            <a:avLst>
+              <a:gd name="adj" fmla="val 50000"/>
+            </a:avLst>
           </a:prstGeom>
           <a:solidFill>
             <a:srgbClr val="3F474A"/>
@@ -3152,63 +3297,20 @@
           <a:lstStyle/>
           <a:p>
             <a:pPr algn="ctr"/>
-          </a:p>
-        </p:txBody>
-      </p:sp>
-      <p:sp>
-        <p:nvSpPr>
-          <p:cNvPr id="3" name="Oval 2"/>
-          <p:cNvSpPr/>
-          <p:nvPr/>
-        </p:nvSpPr>
-        <p:spPr>
-          <a:xfrm>
-            <a:off x="9966960" y="3108960"/>
-            <a:ext cx="3291840" cy="3291840"/>
-          </a:xfrm>
-          <a:prstGeom prst="ellipse">
-            <a:avLst/>
-          </a:prstGeom>
-          <a:solidFill>
-            <a:srgbClr val="5FA8CC"/>
-          </a:solidFill>
-          <a:ln>
-            <a:noFill/>
-          </a:ln>
-          <a:effectLst/>
-        </p:spPr>
-        <p:style>
-          <a:lnRef idx="1">
-            <a:schemeClr val="accent1"/>
-          </a:lnRef>
-          <a:fillRef idx="3">
-            <a:schemeClr val="accent1"/>
-          </a:fillRef>
-          <a:effectRef idx="2">
-            <a:schemeClr val="accent1"/>
-          </a:effectRef>
-          <a:fontRef idx="minor">
-            <a:schemeClr val="lt1"/>
-          </a:fontRef>
-        </p:style>
-        <p:txBody>
-          <a:bodyPr rtlCol="0" anchor="ctr"/>
-          <a:lstStyle/>
-          <a:p>
-            <a:pPr algn="ctr"/>
-          </a:p>
-        </p:txBody>
-      </p:sp>
-      <p:sp>
-        <p:nvSpPr>
-          <p:cNvPr id="4" name="TextBox 3"/>
+            <a:endParaRPr/>
+          </a:p>
+        </p:txBody>
+      </p:sp>
+      <p:sp>
+        <p:nvSpPr>
+          <p:cNvPr id="8" name="TextBox 7"/>
           <p:cNvSpPr txBox="1"/>
           <p:nvPr/>
         </p:nvSpPr>
         <p:spPr>
           <a:xfrm>
-            <a:off x="822960" y="1965960"/>
-            <a:ext cx="8229600" cy="457200"/>
+            <a:off x="747803" y="5070564"/>
+            <a:ext cx="5865939" cy="191591"/>
           </a:xfrm>
           <a:prstGeom prst="rect">
             <a:avLst/>
@@ -3216,7 +3318,46 @@
           <a:noFill/>
         </p:spPr>
         <p:txBody>
-          <a:bodyPr wrap="square" lIns="0" rIns="0" tIns="0" bIns="0">
+          <a:bodyPr wrap="square" lIns="0" tIns="0" rIns="0" bIns="0" anchor="ctr">
+            <a:spAutoFit/>
+          </a:bodyPr>
+          <a:lstStyle/>
+          <a:p>
+            <a:pPr algn="ctr">
+              <a:lnSpc>
+                <a:spcPct val="115000"/>
+              </a:lnSpc>
+            </a:pPr>
+            <a:r>
+              <a:rPr sz="1150" b="1" i="0" dirty="0">
+                <a:solidFill>
+                  <a:srgbClr val="E3A253"/>
+                </a:solidFill>
+                <a:latin typeface="Calibri"/>
+              </a:rPr>
+              <a:t>MOCK / SYNTHETIC DATA  —  NOT CONNECTED TO ANY LIVE SYSTEM</a:t>
+            </a:r>
+          </a:p>
+        </p:txBody>
+      </p:sp>
+      <p:sp>
+        <p:nvSpPr>
+          <p:cNvPr id="9" name="TextBox 8"/>
+          <p:cNvSpPr txBox="1"/>
+          <p:nvPr/>
+        </p:nvSpPr>
+        <p:spPr>
+          <a:xfrm>
+            <a:off x="822960" y="6309360"/>
+            <a:ext cx="9144000" cy="365760"/>
+          </a:xfrm>
+          <a:prstGeom prst="rect">
+            <a:avLst/>
+          </a:prstGeom>
+          <a:noFill/>
+        </p:spPr>
+        <p:txBody>
+          <a:bodyPr wrap="square" lIns="0" tIns="0" rIns="0" bIns="0">
             <a:spAutoFit/>
           </a:bodyPr>
           <a:lstStyle/>
@@ -3227,208 +3368,6 @@
               </a:lnSpc>
             </a:pPr>
             <a:r>
-              <a:rPr sz="1400" b="1" i="0">
-                <a:solidFill>
-                  <a:srgbClr val="5FA8CC"/>
-                </a:solidFill>
-                <a:latin typeface="Calibri"/>
-              </a:rPr>
-              <a:t>MOCK / PORTFOLIO REFERENCE — TECHNICAL TRACK</a:t>
-            </a:r>
-          </a:p>
-        </p:txBody>
-      </p:sp>
-      <p:sp>
-        <p:nvSpPr>
-          <p:cNvPr id="5" name="TextBox 4"/>
-          <p:cNvSpPr txBox="1"/>
-          <p:nvPr/>
-        </p:nvSpPr>
-        <p:spPr>
-          <a:xfrm>
-            <a:off x="822960" y="2377440"/>
-            <a:ext cx="9601200" cy="1554480"/>
-          </a:xfrm>
-          <a:prstGeom prst="rect">
-            <a:avLst/>
-          </a:prstGeom>
-          <a:noFill/>
-        </p:spPr>
-        <p:txBody>
-          <a:bodyPr wrap="square" lIns="0" rIns="0" tIns="0" bIns="0">
-            <a:spAutoFit/>
-          </a:bodyPr>
-          <a:lstStyle/>
-          <a:p>
-            <a:pPr algn="l">
-              <a:lnSpc>
-                <a:spcPct val="105000"/>
-              </a:lnSpc>
-            </a:pPr>
-            <a:r>
-              <a:rPr sz="4000" b="1" i="0">
-                <a:solidFill>
-                  <a:srgbClr val="FFFFFF"/>
-                </a:solidFill>
-                <a:latin typeface="Calibri"/>
-              </a:rPr>
-              <a:t>Building the Real Thing</a:t>
-            </a:r>
-          </a:p>
-        </p:txBody>
-      </p:sp>
-      <p:sp>
-        <p:nvSpPr>
-          <p:cNvPr id="6" name="TextBox 5"/>
-          <p:cNvSpPr txBox="1"/>
-          <p:nvPr/>
-        </p:nvSpPr>
-        <p:spPr>
-          <a:xfrm>
-            <a:off x="822960" y="3794760"/>
-            <a:ext cx="8412480" cy="1097280"/>
-          </a:xfrm>
-          <a:prstGeom prst="rect">
-            <a:avLst/>
-          </a:prstGeom>
-          <a:noFill/>
-        </p:spPr>
-        <p:txBody>
-          <a:bodyPr wrap="square" lIns="0" rIns="0" tIns="0" bIns="0">
-            <a:spAutoFit/>
-          </a:bodyPr>
-          <a:lstStyle/>
-          <a:p>
-            <a:pPr algn="l">
-              <a:lnSpc>
-                <a:spcPct val="130000"/>
-              </a:lnSpc>
-            </a:pPr>
-            <a:r>
-              <a:rPr sz="1600" b="0" i="1">
-                <a:solidFill>
-                  <a:srgbClr val="C7D3D8"/>
-                </a:solidFill>
-                <a:latin typeface="Calibri"/>
-              </a:rPr>
-              <a:t>Build requirements, the Datadog implementation reference, and a phased, gated plan for an agent (or engineering team) to build the production infrastructure this demo mocks.</a:t>
-            </a:r>
-          </a:p>
-        </p:txBody>
-      </p:sp>
-      <p:sp>
-        <p:nvSpPr>
-          <p:cNvPr id="7" name="Rounded Rectangle 6"/>
-          <p:cNvSpPr/>
-          <p:nvPr/>
-        </p:nvSpPr>
-        <p:spPr>
-          <a:xfrm>
-            <a:off x="822960" y="5074920"/>
-            <a:ext cx="3931920" cy="457200"/>
-          </a:xfrm>
-          <a:prstGeom prst="roundRect">
-            <a:avLst>
-              <a:gd name="adj" fmla="val 50000"/>
-            </a:avLst>
-          </a:prstGeom>
-          <a:solidFill>
-            <a:srgbClr val="3F474A"/>
-          </a:solidFill>
-          <a:ln>
-            <a:noFill/>
-          </a:ln>
-          <a:effectLst/>
-        </p:spPr>
-        <p:style>
-          <a:lnRef idx="1">
-            <a:schemeClr val="accent1"/>
-          </a:lnRef>
-          <a:fillRef idx="3">
-            <a:schemeClr val="accent1"/>
-          </a:fillRef>
-          <a:effectRef idx="2">
-            <a:schemeClr val="accent1"/>
-          </a:effectRef>
-          <a:fontRef idx="minor">
-            <a:schemeClr val="lt1"/>
-          </a:fontRef>
-        </p:style>
-        <p:txBody>
-          <a:bodyPr rtlCol="0" anchor="ctr"/>
-          <a:lstStyle/>
-          <a:p>
-            <a:pPr algn="ctr"/>
-          </a:p>
-        </p:txBody>
-      </p:sp>
-      <p:sp>
-        <p:nvSpPr>
-          <p:cNvPr id="8" name="TextBox 7"/>
-          <p:cNvSpPr txBox="1"/>
-          <p:nvPr/>
-        </p:nvSpPr>
-        <p:spPr>
-          <a:xfrm>
-            <a:off x="822960" y="5074920"/>
-            <a:ext cx="3931920" cy="457200"/>
-          </a:xfrm>
-          <a:prstGeom prst="rect">
-            <a:avLst/>
-          </a:prstGeom>
-          <a:noFill/>
-        </p:spPr>
-        <p:txBody>
-          <a:bodyPr wrap="square" anchor="ctr" lIns="0" rIns="0" tIns="0" bIns="0">
-            <a:spAutoFit/>
-          </a:bodyPr>
-          <a:lstStyle/>
-          <a:p>
-            <a:pPr algn="ctr">
-              <a:lnSpc>
-                <a:spcPct val="115000"/>
-              </a:lnSpc>
-            </a:pPr>
-            <a:r>
-              <a:rPr sz="1150" b="1" i="0">
-                <a:solidFill>
-                  <a:srgbClr val="E3A253"/>
-                </a:solidFill>
-                <a:latin typeface="Calibri"/>
-              </a:rPr>
-              <a:t>MOCK / SYNTHETIC DATA  —  NOT CONNECTED TO ANY LIVE SYSTEM</a:t>
-            </a:r>
-          </a:p>
-        </p:txBody>
-      </p:sp>
-      <p:sp>
-        <p:nvSpPr>
-          <p:cNvPr id="9" name="TextBox 8"/>
-          <p:cNvSpPr txBox="1"/>
-          <p:nvPr/>
-        </p:nvSpPr>
-        <p:spPr>
-          <a:xfrm>
-            <a:off x="822960" y="6309360"/>
-            <a:ext cx="9144000" cy="365760"/>
-          </a:xfrm>
-          <a:prstGeom prst="rect">
-            <a:avLst/>
-          </a:prstGeom>
-          <a:noFill/>
-        </p:spPr>
-        <p:txBody>
-          <a:bodyPr wrap="square" lIns="0" rIns="0" tIns="0" bIns="0">
-            <a:spAutoFit/>
-          </a:bodyPr>
-          <a:lstStyle/>
-          <a:p>
-            <a:pPr algn="l">
-              <a:lnSpc>
-                <a:spcPct val="115000"/>
-              </a:lnSpc>
-            </a:pPr>
-            <a:r>
               <a:rPr sz="1050" b="0" i="0">
                 <a:solidFill>
                   <a:srgbClr val="B7BEC2"/>
@@ -3442,26 +3381,98 @@
       </p:sp>
       <p:pic>
         <p:nvPicPr>
-          <p:cNvPr id="900" name="Getamazednow AI badge"/>
-          <p:cNvPicPr/>
+          <p:cNvPr id="902" name="Picture 901" descr="keyline_signal.png"/>
+          <p:cNvPicPr>
+            <a:picLocks noChangeAspect="1"/>
+          </p:cNvPicPr>
           <p:nvPr/>
         </p:nvPicPr>
         <p:blipFill>
-          <a:blip r:embed="rIdGaiLogo"/>
+          <a:blip r:embed="rId3"/>
           <a:stretch>
             <a:fillRect/>
           </a:stretch>
         </p:blipFill>
         <p:spPr>
           <a:xfrm>
-            <a:off x="10896295" y="457200"/>
-            <a:ext cx="838200" cy="838200"/>
+            <a:off x="691436" y="182880"/>
+            <a:ext cx="1331517" cy="1331517"/>
           </a:xfrm>
           <a:prstGeom prst="rect">
             <a:avLst/>
           </a:prstGeom>
         </p:spPr>
       </p:pic>
+      <p:sp>
+        <p:nvSpPr>
+          <p:cNvPr id="903" name="TextBox 902"/>
+          <p:cNvSpPr txBox="1"/>
+          <p:nvPr/>
+        </p:nvSpPr>
+        <p:spPr>
+          <a:xfrm>
+            <a:off x="1847088" y="585216"/>
+            <a:ext cx="5029200" cy="457200"/>
+          </a:xfrm>
+          <a:prstGeom prst="rect">
+            <a:avLst/>
+          </a:prstGeom>
+          <a:noFill/>
+        </p:spPr>
+        <p:txBody>
+          <a:bodyPr wrap="square" lIns="0" tIns="0" rIns="0" bIns="0" anchor="t">
+            <a:spAutoFit/>
+          </a:bodyPr>
+          <a:lstStyle/>
+          <a:p>
+            <a:pPr algn="l"/>
+            <a:r>
+              <a:rPr sz="2100" b="1">
+                <a:solidFill>
+                  <a:srgbClr val="FFFFFF"/>
+                </a:solidFill>
+                <a:latin typeface="Poppins"/>
+              </a:rPr>
+              <a:t>Getamazednow AI</a:t>
+            </a:r>
+          </a:p>
+        </p:txBody>
+      </p:sp>
+      <p:sp>
+        <p:nvSpPr>
+          <p:cNvPr id="904" name="TextBox 903"/>
+          <p:cNvSpPr txBox="1"/>
+          <p:nvPr/>
+        </p:nvSpPr>
+        <p:spPr>
+          <a:xfrm>
+            <a:off x="1847088" y="960120"/>
+            <a:ext cx="5029200" cy="320040"/>
+          </a:xfrm>
+          <a:prstGeom prst="rect">
+            <a:avLst/>
+          </a:prstGeom>
+          <a:noFill/>
+        </p:spPr>
+        <p:txBody>
+          <a:bodyPr wrap="square" lIns="0" tIns="0" rIns="0" bIns="0" anchor="t">
+            <a:spAutoFit/>
+          </a:bodyPr>
+          <a:lstStyle/>
+          <a:p>
+            <a:pPr algn="l"/>
+            <a:r>
+              <a:rPr sz="1100" b="0">
+                <a:solidFill>
+                  <a:srgbClr val="A8A17B"/>
+                </a:solidFill>
+                <a:latin typeface="Inter"/>
+              </a:rPr>
+              <a:t>A Getamazednow Company</a:t>
+            </a:r>
+          </a:p>
+        </p:txBody>
+      </p:sp>
     </p:spTree>
   </p:cSld>
   <p:clrMapOvr>
@@ -3471,7 +3482,7 @@
 </file>
 
 <file path=ppt/slides/slide10.xml><?xml version="1.0" encoding="utf-8"?>
-<p:sld xmlns:a="http://schemas.openxmlformats.org/drawingml/2006/main" xmlns:p="http://schemas.openxmlformats.org/presentationml/2006/main" xmlns:r="http://schemas.openxmlformats.org/officeDocument/2006/relationships">
+<p:sld xmlns:a="http://schemas.openxmlformats.org/drawingml/2006/main" xmlns:r="http://schemas.openxmlformats.org/officeDocument/2006/relationships" xmlns:p="http://schemas.openxmlformats.org/presentationml/2006/main">
   <p:cSld>
     <p:bg>
       <p:bgPr>
@@ -3487,7 +3498,14 @@
         <p:cNvGrpSpPr/>
         <p:nvPr/>
       </p:nvGrpSpPr>
-      <p:grpSpPr/>
+      <p:grpSpPr>
+        <a:xfrm>
+          <a:off x="0" y="0"/>
+          <a:ext cx="0" cy="0"/>
+          <a:chOff x="0" y="0"/>
+          <a:chExt cx="0" cy="0"/>
+        </a:xfrm>
+      </p:grpSpPr>
       <p:sp>
         <p:nvSpPr>
           <p:cNvPr id="2" name="TextBox 1"/>
@@ -3505,7 +3523,7 @@
           <a:noFill/>
         </p:spPr>
         <p:txBody>
-          <a:bodyPr wrap="square" lIns="0" rIns="0" tIns="0" bIns="0">
+          <a:bodyPr wrap="square" lIns="0" tIns="0" rIns="0" bIns="0">
             <a:spAutoFit/>
           </a:bodyPr>
           <a:lstStyle/>
@@ -3544,7 +3562,7 @@
           <a:noFill/>
         </p:spPr>
         <p:txBody>
-          <a:bodyPr wrap="square" lIns="0" rIns="0" tIns="0" bIns="0">
+          <a:bodyPr wrap="square" lIns="0" tIns="0" rIns="0" bIns="0">
             <a:spAutoFit/>
           </a:bodyPr>
           <a:lstStyle/>
@@ -3583,7 +3601,7 @@
           <a:noFill/>
         </p:spPr>
         <p:txBody>
-          <a:bodyPr wrap="square" lIns="0" rIns="0" tIns="0" bIns="0">
+          <a:bodyPr wrap="square" lIns="0" tIns="0" rIns="0" bIns="0">
             <a:spAutoFit/>
           </a:bodyPr>
           <a:lstStyle/>
@@ -3622,7 +3640,7 @@
           <a:noFill/>
         </p:spPr>
         <p:txBody>
-          <a:bodyPr wrap="square" lIns="0" rIns="0" tIns="0" bIns="0">
+          <a:bodyPr wrap="square" lIns="0" tIns="0" rIns="0" bIns="0">
             <a:spAutoFit/>
           </a:bodyPr>
           <a:lstStyle/>
@@ -3632,6 +3650,12 @@
                 <a:spcPct val="115000"/>
               </a:lnSpc>
             </a:pPr>
+            <a:r>
+              <a:rPr lang="en-US" sz="800" b="1">
+                <a:latin typeface="Poppins"/>
+              </a:rPr>
+              <a:t>Getamazednow AI  ·  A Getamazednow Company        </a:t>
+            </a:r>
             <a:r>
               <a:rPr sz="900" b="0" i="0">
                 <a:solidFill>
@@ -3663,9 +3687,27 @@
                 <a:tableStyleId>{5C22544A-7EE6-4342-B048-85BDC9FD1C3A}</a:tableStyleId>
               </a:tblPr>
               <a:tblGrid>
-                <a:gridCol w="3569817"/>
-                <a:gridCol w="2008022"/>
-                <a:gridCol w="5577840"/>
+                <a:gridCol w="3569817">
+                  <a:extLst>
+                    <a:ext uri="{9D8B030D-6E8A-4147-A177-3AD203B41FA5}">
+                      <a16:colId xmlns:a16="http://schemas.microsoft.com/office/drawing/2014/main" val="20000"/>
+                    </a:ext>
+                  </a:extLst>
+                </a:gridCol>
+                <a:gridCol w="2008022">
+                  <a:extLst>
+                    <a:ext uri="{9D8B030D-6E8A-4147-A177-3AD203B41FA5}">
+                      <a16:colId xmlns:a16="http://schemas.microsoft.com/office/drawing/2014/main" val="20001"/>
+                    </a:ext>
+                  </a:extLst>
+                </a:gridCol>
+                <a:gridCol w="5577840">
+                  <a:extLst>
+                    <a:ext uri="{9D8B030D-6E8A-4147-A177-3AD203B41FA5}">
+                      <a16:colId xmlns:a16="http://schemas.microsoft.com/office/drawing/2014/main" val="20002"/>
+                    </a:ext>
+                  </a:extLst>
+                </a:gridCol>
               </a:tblGrid>
               <a:tr h="508000">
                 <a:tc>
@@ -3734,6 +3776,11 @@
                     </a:solidFill>
                   </a:tcPr>
                 </a:tc>
+                <a:extLst>
+                  <a:ext uri="{0D108BD9-81ED-4DB2-BD59-A6C34878D82A}">
+                    <a16:rowId xmlns:a16="http://schemas.microsoft.com/office/drawing/2014/main" val="10000"/>
+                  </a:ext>
+                </a:extLst>
               </a:tr>
               <a:tr h="508000">
                 <a:tc>
@@ -3752,7 +3799,7 @@
                       </a:r>
                     </a:p>
                   </a:txBody>
-                  <a:tcPr marT="38100" marB="38100" marL="76200" anchor="ctr">
+                  <a:tcPr marL="76200" marT="38100" marB="38100" anchor="ctr">
                     <a:solidFill>
                       <a:srgbClr val="FFFFFF"/>
                     </a:solidFill>
@@ -3774,7 +3821,7 @@
                       </a:r>
                     </a:p>
                   </a:txBody>
-                  <a:tcPr marT="38100" marB="38100" marL="76200" anchor="ctr">
+                  <a:tcPr marL="76200" marT="38100" marB="38100" anchor="ctr">
                     <a:solidFill>
                       <a:srgbClr val="FFFFFF"/>
                     </a:solidFill>
@@ -3796,12 +3843,17 @@
                       </a:r>
                     </a:p>
                   </a:txBody>
-                  <a:tcPr marT="38100" marB="38100" marL="76200" anchor="ctr">
+                  <a:tcPr marL="76200" marT="38100" marB="38100" anchor="ctr">
                     <a:solidFill>
                       <a:srgbClr val="FFFFFF"/>
                     </a:solidFill>
                   </a:tcPr>
                 </a:tc>
+                <a:extLst>
+                  <a:ext uri="{0D108BD9-81ED-4DB2-BD59-A6C34878D82A}">
+                    <a16:rowId xmlns:a16="http://schemas.microsoft.com/office/drawing/2014/main" val="10001"/>
+                  </a:ext>
+                </a:extLst>
               </a:tr>
               <a:tr h="508000">
                 <a:tc>
@@ -3820,7 +3872,7 @@
                       </a:r>
                     </a:p>
                   </a:txBody>
-                  <a:tcPr marT="38100" marB="38100" marL="76200" anchor="ctr">
+                  <a:tcPr marL="76200" marT="38100" marB="38100" anchor="ctr">
                     <a:solidFill>
                       <a:srgbClr val="F6F7F7"/>
                     </a:solidFill>
@@ -3842,7 +3894,7 @@
                       </a:r>
                     </a:p>
                   </a:txBody>
-                  <a:tcPr marT="38100" marB="38100" marL="76200" anchor="ctr">
+                  <a:tcPr marL="76200" marT="38100" marB="38100" anchor="ctr">
                     <a:solidFill>
                       <a:srgbClr val="F6F7F7"/>
                     </a:solidFill>
@@ -3864,12 +3916,17 @@
                       </a:r>
                     </a:p>
                   </a:txBody>
-                  <a:tcPr marT="38100" marB="38100" marL="76200" anchor="ctr">
+                  <a:tcPr marL="76200" marT="38100" marB="38100" anchor="ctr">
                     <a:solidFill>
                       <a:srgbClr val="F6F7F7"/>
                     </a:solidFill>
                   </a:tcPr>
                 </a:tc>
+                <a:extLst>
+                  <a:ext uri="{0D108BD9-81ED-4DB2-BD59-A6C34878D82A}">
+                    <a16:rowId xmlns:a16="http://schemas.microsoft.com/office/drawing/2014/main" val="10002"/>
+                  </a:ext>
+                </a:extLst>
               </a:tr>
               <a:tr h="508000">
                 <a:tc>
@@ -3888,7 +3945,7 @@
                       </a:r>
                     </a:p>
                   </a:txBody>
-                  <a:tcPr marT="38100" marB="38100" marL="76200" anchor="ctr">
+                  <a:tcPr marL="76200" marT="38100" marB="38100" anchor="ctr">
                     <a:solidFill>
                       <a:srgbClr val="FFFFFF"/>
                     </a:solidFill>
@@ -3910,7 +3967,7 @@
                       </a:r>
                     </a:p>
                   </a:txBody>
-                  <a:tcPr marT="38100" marB="38100" marL="76200" anchor="ctr">
+                  <a:tcPr marL="76200" marT="38100" marB="38100" anchor="ctr">
                     <a:solidFill>
                       <a:srgbClr val="FFFFFF"/>
                     </a:solidFill>
@@ -3932,12 +3989,17 @@
                       </a:r>
                     </a:p>
                   </a:txBody>
-                  <a:tcPr marT="38100" marB="38100" marL="76200" anchor="ctr">
+                  <a:tcPr marL="76200" marT="38100" marB="38100" anchor="ctr">
                     <a:solidFill>
                       <a:srgbClr val="FFFFFF"/>
                     </a:solidFill>
                   </a:tcPr>
                 </a:tc>
+                <a:extLst>
+                  <a:ext uri="{0D108BD9-81ED-4DB2-BD59-A6C34878D82A}">
+                    <a16:rowId xmlns:a16="http://schemas.microsoft.com/office/drawing/2014/main" val="10003"/>
+                  </a:ext>
+                </a:extLst>
               </a:tr>
               <a:tr h="508000">
                 <a:tc>
@@ -3956,7 +4018,7 @@
                       </a:r>
                     </a:p>
                   </a:txBody>
-                  <a:tcPr marT="38100" marB="38100" marL="76200" anchor="ctr">
+                  <a:tcPr marL="76200" marT="38100" marB="38100" anchor="ctr">
                     <a:solidFill>
                       <a:srgbClr val="F6F7F7"/>
                     </a:solidFill>
@@ -3978,7 +4040,7 @@
                       </a:r>
                     </a:p>
                   </a:txBody>
-                  <a:tcPr marT="38100" marB="38100" marL="76200" anchor="ctr">
+                  <a:tcPr marL="76200" marT="38100" marB="38100" anchor="ctr">
                     <a:solidFill>
                       <a:srgbClr val="F6F7F7"/>
                     </a:solidFill>
@@ -4000,12 +4062,17 @@
                       </a:r>
                     </a:p>
                   </a:txBody>
-                  <a:tcPr marT="38100" marB="38100" marL="76200" anchor="ctr">
+                  <a:tcPr marL="76200" marT="38100" marB="38100" anchor="ctr">
                     <a:solidFill>
                       <a:srgbClr val="F6F7F7"/>
                     </a:solidFill>
                   </a:tcPr>
                 </a:tc>
+                <a:extLst>
+                  <a:ext uri="{0D108BD9-81ED-4DB2-BD59-A6C34878D82A}">
+                    <a16:rowId xmlns:a16="http://schemas.microsoft.com/office/drawing/2014/main" val="10004"/>
+                  </a:ext>
+                </a:extLst>
               </a:tr>
               <a:tr h="508000">
                 <a:tc>
@@ -4024,7 +4091,7 @@
                       </a:r>
                     </a:p>
                   </a:txBody>
-                  <a:tcPr marT="38100" marB="38100" marL="76200" anchor="ctr">
+                  <a:tcPr marL="76200" marT="38100" marB="38100" anchor="ctr">
                     <a:solidFill>
                       <a:srgbClr val="FFFFFF"/>
                     </a:solidFill>
@@ -4046,7 +4113,7 @@
                       </a:r>
                     </a:p>
                   </a:txBody>
-                  <a:tcPr marT="38100" marB="38100" marL="76200" anchor="ctr">
+                  <a:tcPr marL="76200" marT="38100" marB="38100" anchor="ctr">
                     <a:solidFill>
                       <a:srgbClr val="FFFFFF"/>
                     </a:solidFill>
@@ -4068,12 +4135,17 @@
                       </a:r>
                     </a:p>
                   </a:txBody>
-                  <a:tcPr marT="38100" marB="38100" marL="76200" anchor="ctr">
+                  <a:tcPr marL="76200" marT="38100" marB="38100" anchor="ctr">
                     <a:solidFill>
                       <a:srgbClr val="FFFFFF"/>
                     </a:solidFill>
                   </a:tcPr>
                 </a:tc>
+                <a:extLst>
+                  <a:ext uri="{0D108BD9-81ED-4DB2-BD59-A6C34878D82A}">
+                    <a16:rowId xmlns:a16="http://schemas.microsoft.com/office/drawing/2014/main" val="10005"/>
+                  </a:ext>
+                </a:extLst>
               </a:tr>
               <a:tr h="508000">
                 <a:tc>
@@ -4092,7 +4164,7 @@
                       </a:r>
                     </a:p>
                   </a:txBody>
-                  <a:tcPr marT="38100" marB="38100" marL="76200" anchor="ctr">
+                  <a:tcPr marL="76200" marT="38100" marB="38100" anchor="ctr">
                     <a:solidFill>
                       <a:srgbClr val="F6F7F7"/>
                     </a:solidFill>
@@ -4114,7 +4186,7 @@
                       </a:r>
                     </a:p>
                   </a:txBody>
-                  <a:tcPr marT="38100" marB="38100" marL="76200" anchor="ctr">
+                  <a:tcPr marL="76200" marT="38100" marB="38100" anchor="ctr">
                     <a:solidFill>
                       <a:srgbClr val="F6F7F7"/>
                     </a:solidFill>
@@ -4136,12 +4208,17 @@
                       </a:r>
                     </a:p>
                   </a:txBody>
-                  <a:tcPr marT="38100" marB="38100" marL="76200" anchor="ctr">
+                  <a:tcPr marL="76200" marT="38100" marB="38100" anchor="ctr">
                     <a:solidFill>
                       <a:srgbClr val="F6F7F7"/>
                     </a:solidFill>
                   </a:tcPr>
                 </a:tc>
+                <a:extLst>
+                  <a:ext uri="{0D108BD9-81ED-4DB2-BD59-A6C34878D82A}">
+                    <a16:rowId xmlns:a16="http://schemas.microsoft.com/office/drawing/2014/main" val="10006"/>
+                  </a:ext>
+                </a:extLst>
               </a:tr>
               <a:tr h="508000">
                 <a:tc>
@@ -4160,7 +4237,7 @@
                       </a:r>
                     </a:p>
                   </a:txBody>
-                  <a:tcPr marT="38100" marB="38100" marL="76200" anchor="ctr">
+                  <a:tcPr marL="76200" marT="38100" marB="38100" anchor="ctr">
                     <a:solidFill>
                       <a:srgbClr val="FFFFFF"/>
                     </a:solidFill>
@@ -4182,7 +4259,7 @@
                       </a:r>
                     </a:p>
                   </a:txBody>
-                  <a:tcPr marT="38100" marB="38100" marL="76200" anchor="ctr">
+                  <a:tcPr marL="76200" marT="38100" marB="38100" anchor="ctr">
                     <a:solidFill>
                       <a:srgbClr val="FFFFFF"/>
                     </a:solidFill>
@@ -4204,12 +4281,17 @@
                       </a:r>
                     </a:p>
                   </a:txBody>
-                  <a:tcPr marT="38100" marB="38100" marL="76200" anchor="ctr">
+                  <a:tcPr marL="76200" marT="38100" marB="38100" anchor="ctr">
                     <a:solidFill>
                       <a:srgbClr val="FFFFFF"/>
                     </a:solidFill>
                   </a:tcPr>
                 </a:tc>
+                <a:extLst>
+                  <a:ext uri="{0D108BD9-81ED-4DB2-BD59-A6C34878D82A}">
+                    <a16:rowId xmlns:a16="http://schemas.microsoft.com/office/drawing/2014/main" val="10007"/>
+                  </a:ext>
+                </a:extLst>
               </a:tr>
               <a:tr h="508000">
                 <a:tc>
@@ -4228,7 +4310,7 @@
                       </a:r>
                     </a:p>
                   </a:txBody>
-                  <a:tcPr marT="38100" marB="38100" marL="76200" anchor="ctr">
+                  <a:tcPr marL="76200" marT="38100" marB="38100" anchor="ctr">
                     <a:solidFill>
                       <a:srgbClr val="F6F7F7"/>
                     </a:solidFill>
@@ -4250,7 +4332,7 @@
                       </a:r>
                     </a:p>
                   </a:txBody>
-                  <a:tcPr marT="38100" marB="38100" marL="76200" anchor="ctr">
+                  <a:tcPr marL="76200" marT="38100" marB="38100" anchor="ctr">
                     <a:solidFill>
                       <a:srgbClr val="F6F7F7"/>
                     </a:solidFill>
@@ -4272,12 +4354,17 @@
                       </a:r>
                     </a:p>
                   </a:txBody>
-                  <a:tcPr marT="38100" marB="38100" marL="76200" anchor="ctr">
+                  <a:tcPr marL="76200" marT="38100" marB="38100" anchor="ctr">
                     <a:solidFill>
                       <a:srgbClr val="F6F7F7"/>
                     </a:solidFill>
                   </a:tcPr>
                 </a:tc>
+                <a:extLst>
+                  <a:ext uri="{0D108BD9-81ED-4DB2-BD59-A6C34878D82A}">
+                    <a16:rowId xmlns:a16="http://schemas.microsoft.com/office/drawing/2014/main" val="10008"/>
+                  </a:ext>
+                </a:extLst>
               </a:tr>
             </a:tbl>
           </a:graphicData>
@@ -4300,7 +4387,7 @@
           <a:noFill/>
         </p:spPr>
         <p:txBody>
-          <a:bodyPr wrap="square" lIns="0" rIns="0" tIns="0" bIns="0">
+          <a:bodyPr wrap="square" lIns="0" tIns="0" rIns="0" bIns="0">
             <a:spAutoFit/>
           </a:bodyPr>
           <a:lstStyle/>
@@ -4322,6 +4409,30 @@
           </a:p>
         </p:txBody>
       </p:sp>
+      <p:pic>
+        <p:nvPicPr>
+          <p:cNvPr id="8" name="Picture 7" descr="mono_ink.png"/>
+          <p:cNvPicPr>
+            <a:picLocks noChangeAspect="1"/>
+          </p:cNvPicPr>
+          <p:nvPr/>
+        </p:nvPicPr>
+        <p:blipFill>
+          <a:blip r:embed="rId2"/>
+          <a:stretch>
+            <a:fillRect/>
+          </a:stretch>
+        </p:blipFill>
+        <p:spPr>
+          <a:xfrm>
+            <a:off x="201168" y="6528816"/>
+            <a:ext cx="182880" cy="182880"/>
+          </a:xfrm>
+          <a:prstGeom prst="rect">
+            <a:avLst/>
+          </a:prstGeom>
+        </p:spPr>
+      </p:pic>
     </p:spTree>
   </p:cSld>
   <p:clrMapOvr>
@@ -4331,7 +4442,7 @@
 </file>
 
 <file path=ppt/slides/slide11.xml><?xml version="1.0" encoding="utf-8"?>
-<p:sld xmlns:a="http://schemas.openxmlformats.org/drawingml/2006/main" xmlns:p="http://schemas.openxmlformats.org/presentationml/2006/main" xmlns:r="http://schemas.openxmlformats.org/officeDocument/2006/relationships">
+<p:sld xmlns:a="http://schemas.openxmlformats.org/drawingml/2006/main" xmlns:r="http://schemas.openxmlformats.org/officeDocument/2006/relationships" xmlns:p="http://schemas.openxmlformats.org/presentationml/2006/main">
   <p:cSld>
     <p:bg>
       <p:bgPr>
@@ -4347,7 +4458,14 @@
         <p:cNvGrpSpPr/>
         <p:nvPr/>
       </p:nvGrpSpPr>
-      <p:grpSpPr/>
+      <p:grpSpPr>
+        <a:xfrm>
+          <a:off x="0" y="0"/>
+          <a:ext cx="0" cy="0"/>
+          <a:chOff x="0" y="0"/>
+          <a:chExt cx="0" cy="0"/>
+        </a:xfrm>
+      </p:grpSpPr>
       <p:sp>
         <p:nvSpPr>
           <p:cNvPr id="2" name="TextBox 1"/>
@@ -4365,7 +4483,7 @@
           <a:noFill/>
         </p:spPr>
         <p:txBody>
-          <a:bodyPr wrap="square" lIns="0" rIns="0" tIns="0" bIns="0">
+          <a:bodyPr wrap="square" lIns="0" tIns="0" rIns="0" bIns="0">
             <a:spAutoFit/>
           </a:bodyPr>
           <a:lstStyle/>
@@ -4404,7 +4522,7 @@
           <a:noFill/>
         </p:spPr>
         <p:txBody>
-          <a:bodyPr wrap="square" lIns="0" rIns="0" tIns="0" bIns="0">
+          <a:bodyPr wrap="square" lIns="0" tIns="0" rIns="0" bIns="0">
             <a:spAutoFit/>
           </a:bodyPr>
           <a:lstStyle/>
@@ -4443,7 +4561,7 @@
           <a:noFill/>
         </p:spPr>
         <p:txBody>
-          <a:bodyPr wrap="square" lIns="0" rIns="0" tIns="0" bIns="0">
+          <a:bodyPr wrap="square" lIns="0" tIns="0" rIns="0" bIns="0">
             <a:spAutoFit/>
           </a:bodyPr>
           <a:lstStyle/>
@@ -4482,7 +4600,7 @@
           <a:noFill/>
         </p:spPr>
         <p:txBody>
-          <a:bodyPr wrap="square" lIns="0" rIns="0" tIns="0" bIns="0">
+          <a:bodyPr wrap="square" lIns="0" tIns="0" rIns="0" bIns="0">
             <a:spAutoFit/>
           </a:bodyPr>
           <a:lstStyle/>
@@ -4492,6 +4610,12 @@
                 <a:spcPct val="115000"/>
               </a:lnSpc>
             </a:pPr>
+            <a:r>
+              <a:rPr lang="en-US" sz="800" b="1">
+                <a:latin typeface="Poppins"/>
+              </a:rPr>
+              <a:t>Getamazednow AI  ·  A Getamazednow Company        </a:t>
+            </a:r>
             <a:r>
               <a:rPr sz="900" b="0" i="0">
                 <a:solidFill>
@@ -4523,9 +4647,27 @@
                 <a:tableStyleId>{5C22544A-7EE6-4342-B048-85BDC9FD1C3A}</a:tableStyleId>
               </a:tblPr>
               <a:tblGrid>
-                <a:gridCol w="2900476"/>
-                <a:gridCol w="5131612"/>
-                <a:gridCol w="3123590"/>
+                <a:gridCol w="2900476">
+                  <a:extLst>
+                    <a:ext uri="{9D8B030D-6E8A-4147-A177-3AD203B41FA5}">
+                      <a16:colId xmlns:a16="http://schemas.microsoft.com/office/drawing/2014/main" val="20000"/>
+                    </a:ext>
+                  </a:extLst>
+                </a:gridCol>
+                <a:gridCol w="5131612">
+                  <a:extLst>
+                    <a:ext uri="{9D8B030D-6E8A-4147-A177-3AD203B41FA5}">
+                      <a16:colId xmlns:a16="http://schemas.microsoft.com/office/drawing/2014/main" val="20001"/>
+                    </a:ext>
+                  </a:extLst>
+                </a:gridCol>
+                <a:gridCol w="3123590">
+                  <a:extLst>
+                    <a:ext uri="{9D8B030D-6E8A-4147-A177-3AD203B41FA5}">
+                      <a16:colId xmlns:a16="http://schemas.microsoft.com/office/drawing/2014/main" val="20002"/>
+                    </a:ext>
+                  </a:extLst>
+                </a:gridCol>
               </a:tblGrid>
               <a:tr h="708660">
                 <a:tc>
@@ -4594,6 +4736,11 @@
                     </a:solidFill>
                   </a:tcPr>
                 </a:tc>
+                <a:extLst>
+                  <a:ext uri="{0D108BD9-81ED-4DB2-BD59-A6C34878D82A}">
+                    <a16:rowId xmlns:a16="http://schemas.microsoft.com/office/drawing/2014/main" val="10000"/>
+                  </a:ext>
+                </a:extLst>
               </a:tr>
               <a:tr h="708660">
                 <a:tc>
@@ -4612,7 +4759,7 @@
                       </a:r>
                     </a:p>
                   </a:txBody>
-                  <a:tcPr marT="38100" marB="38100" marL="76200" anchor="ctr">
+                  <a:tcPr marL="76200" marT="38100" marB="38100" anchor="ctr">
                     <a:solidFill>
                       <a:srgbClr val="FFFFFF"/>
                     </a:solidFill>
@@ -4634,7 +4781,7 @@
                       </a:r>
                     </a:p>
                   </a:txBody>
-                  <a:tcPr marT="38100" marB="38100" marL="76200" anchor="ctr">
+                  <a:tcPr marL="76200" marT="38100" marB="38100" anchor="ctr">
                     <a:solidFill>
                       <a:srgbClr val="FFFFFF"/>
                     </a:solidFill>
@@ -4656,12 +4803,17 @@
                       </a:r>
                     </a:p>
                   </a:txBody>
-                  <a:tcPr marT="38100" marB="38100" marL="76200" anchor="ctr">
+                  <a:tcPr marL="76200" marT="38100" marB="38100" anchor="ctr">
                     <a:solidFill>
                       <a:srgbClr val="FFFFFF"/>
                     </a:solidFill>
                   </a:tcPr>
                 </a:tc>
+                <a:extLst>
+                  <a:ext uri="{0D108BD9-81ED-4DB2-BD59-A6C34878D82A}">
+                    <a16:rowId xmlns:a16="http://schemas.microsoft.com/office/drawing/2014/main" val="10001"/>
+                  </a:ext>
+                </a:extLst>
               </a:tr>
               <a:tr h="708660">
                 <a:tc>
@@ -4680,7 +4832,7 @@
                       </a:r>
                     </a:p>
                   </a:txBody>
-                  <a:tcPr marT="38100" marB="38100" marL="76200" anchor="ctr">
+                  <a:tcPr marL="76200" marT="38100" marB="38100" anchor="ctr">
                     <a:solidFill>
                       <a:srgbClr val="F6F7F7"/>
                     </a:solidFill>
@@ -4702,7 +4854,7 @@
                       </a:r>
                     </a:p>
                   </a:txBody>
-                  <a:tcPr marT="38100" marB="38100" marL="76200" anchor="ctr">
+                  <a:tcPr marL="76200" marT="38100" marB="38100" anchor="ctr">
                     <a:solidFill>
                       <a:srgbClr val="F6F7F7"/>
                     </a:solidFill>
@@ -4724,12 +4876,17 @@
                       </a:r>
                     </a:p>
                   </a:txBody>
-                  <a:tcPr marT="38100" marB="38100" marL="76200" anchor="ctr">
+                  <a:tcPr marL="76200" marT="38100" marB="38100" anchor="ctr">
                     <a:solidFill>
                       <a:srgbClr val="F6F7F7"/>
                     </a:solidFill>
                   </a:tcPr>
                 </a:tc>
+                <a:extLst>
+                  <a:ext uri="{0D108BD9-81ED-4DB2-BD59-A6C34878D82A}">
+                    <a16:rowId xmlns:a16="http://schemas.microsoft.com/office/drawing/2014/main" val="10002"/>
+                  </a:ext>
+                </a:extLst>
               </a:tr>
               <a:tr h="708660">
                 <a:tc>
@@ -4748,7 +4905,7 @@
                       </a:r>
                     </a:p>
                   </a:txBody>
-                  <a:tcPr marT="38100" marB="38100" marL="76200" anchor="ctr">
+                  <a:tcPr marL="76200" marT="38100" marB="38100" anchor="ctr">
                     <a:solidFill>
                       <a:srgbClr val="FFFFFF"/>
                     </a:solidFill>
@@ -4770,7 +4927,7 @@
                       </a:r>
                     </a:p>
                   </a:txBody>
-                  <a:tcPr marT="38100" marB="38100" marL="76200" anchor="ctr">
+                  <a:tcPr marL="76200" marT="38100" marB="38100" anchor="ctr">
                     <a:solidFill>
                       <a:srgbClr val="FFFFFF"/>
                     </a:solidFill>
@@ -4792,12 +4949,17 @@
                       </a:r>
                     </a:p>
                   </a:txBody>
-                  <a:tcPr marT="38100" marB="38100" marL="76200" anchor="ctr">
+                  <a:tcPr marL="76200" marT="38100" marB="38100" anchor="ctr">
                     <a:solidFill>
                       <a:srgbClr val="FFFFFF"/>
                     </a:solidFill>
                   </a:tcPr>
                 </a:tc>
+                <a:extLst>
+                  <a:ext uri="{0D108BD9-81ED-4DB2-BD59-A6C34878D82A}">
+                    <a16:rowId xmlns:a16="http://schemas.microsoft.com/office/drawing/2014/main" val="10003"/>
+                  </a:ext>
+                </a:extLst>
               </a:tr>
             </a:tbl>
           </a:graphicData>
@@ -4820,7 +4982,7 @@
           <a:noFill/>
         </p:spPr>
         <p:txBody>
-          <a:bodyPr wrap="square" lIns="0" rIns="0" tIns="0" bIns="0">
+          <a:bodyPr wrap="square" lIns="0" tIns="0" rIns="0" bIns="0">
             <a:spAutoFit/>
           </a:bodyPr>
           <a:lstStyle/>
@@ -4842,6 +5004,30 @@
           </a:p>
         </p:txBody>
       </p:sp>
+      <p:pic>
+        <p:nvPicPr>
+          <p:cNvPr id="8" name="Picture 7" descr="mono_ink.png"/>
+          <p:cNvPicPr>
+            <a:picLocks noChangeAspect="1"/>
+          </p:cNvPicPr>
+          <p:nvPr/>
+        </p:nvPicPr>
+        <p:blipFill>
+          <a:blip r:embed="rId2"/>
+          <a:stretch>
+            <a:fillRect/>
+          </a:stretch>
+        </p:blipFill>
+        <p:spPr>
+          <a:xfrm>
+            <a:off x="201168" y="6528816"/>
+            <a:ext cx="182880" cy="182880"/>
+          </a:xfrm>
+          <a:prstGeom prst="rect">
+            <a:avLst/>
+          </a:prstGeom>
+        </p:spPr>
+      </p:pic>
     </p:spTree>
   </p:cSld>
   <p:clrMapOvr>
@@ -4851,7 +5037,7 @@
 </file>
 
 <file path=ppt/slides/slide12.xml><?xml version="1.0" encoding="utf-8"?>
-<p:sld xmlns:a="http://schemas.openxmlformats.org/drawingml/2006/main" xmlns:p="http://schemas.openxmlformats.org/presentationml/2006/main" xmlns:r="http://schemas.openxmlformats.org/officeDocument/2006/relationships">
+<p:sld xmlns:a="http://schemas.openxmlformats.org/drawingml/2006/main" xmlns:r="http://schemas.openxmlformats.org/officeDocument/2006/relationships" xmlns:p="http://schemas.openxmlformats.org/presentationml/2006/main">
   <p:cSld>
     <p:bg>
       <p:bgPr>
@@ -4867,51 +5053,38 @@
         <p:cNvGrpSpPr/>
         <p:nvPr/>
       </p:nvGrpSpPr>
-      <p:grpSpPr/>
-      <p:sp>
-        <p:nvSpPr>
-          <p:cNvPr id="2" name="Oval 1"/>
-          <p:cNvSpPr/>
-          <p:nvPr/>
-        </p:nvSpPr>
-        <p:spPr>
-          <a:xfrm>
-            <a:off x="-2194560" y="3931920"/>
-            <a:ext cx="5486400" cy="5486400"/>
-          </a:xfrm>
-          <a:prstGeom prst="ellipse">
-            <a:avLst/>
-          </a:prstGeom>
-          <a:solidFill>
-            <a:srgbClr val="3F474A"/>
-          </a:solidFill>
-          <a:ln>
-            <a:noFill/>
-          </a:ln>
-          <a:effectLst/>
-        </p:spPr>
-        <p:style>
-          <a:lnRef idx="1">
-            <a:schemeClr val="accent1"/>
-          </a:lnRef>
-          <a:fillRef idx="3">
-            <a:schemeClr val="accent1"/>
-          </a:fillRef>
-          <a:effectRef idx="2">
-            <a:schemeClr val="accent1"/>
-          </a:effectRef>
-          <a:fontRef idx="minor">
-            <a:schemeClr val="lt1"/>
-          </a:fontRef>
-        </p:style>
-        <p:txBody>
-          <a:bodyPr rtlCol="0" anchor="ctr"/>
-          <a:lstStyle/>
-          <a:p>
-            <a:pPr algn="ctr"/>
-          </a:p>
-        </p:txBody>
-      </p:sp>
+      <p:grpSpPr>
+        <a:xfrm>
+          <a:off x="0" y="0"/>
+          <a:ext cx="0" cy="0"/>
+          <a:chOff x="0" y="0"/>
+          <a:chExt cx="0" cy="0"/>
+        </a:xfrm>
+      </p:grpSpPr>
+      <p:pic>
+        <p:nvPicPr>
+          <p:cNvPr id="7" name="Picture 6" descr="GenAIObsPPT-4.jpg"/>
+          <p:cNvPicPr>
+            <a:picLocks noChangeAspect="1"/>
+          </p:cNvPicPr>
+          <p:nvPr/>
+        </p:nvPicPr>
+        <p:blipFill>
+          <a:blip r:embed="rId2"/>
+          <a:stretch>
+            <a:fillRect/>
+          </a:stretch>
+        </p:blipFill>
+        <p:spPr>
+          <a:xfrm>
+            <a:off x="0" y="0"/>
+            <a:ext cx="12191695" cy="6858000"/>
+          </a:xfrm>
+          <a:prstGeom prst="rect">
+            <a:avLst/>
+          </a:prstGeom>
+        </p:spPr>
+      </p:pic>
       <p:sp>
         <p:nvSpPr>
           <p:cNvPr id="3" name="TextBox 2"/>
@@ -4929,7 +5102,7 @@
           <a:noFill/>
         </p:spPr>
         <p:txBody>
-          <a:bodyPr wrap="square" lIns="0" rIns="0" tIns="0" bIns="0">
+          <a:bodyPr wrap="square" lIns="0" tIns="0" rIns="0" bIns="0">
             <a:spAutoFit/>
           </a:bodyPr>
           <a:lstStyle/>
@@ -4968,7 +5141,7 @@
           <a:noFill/>
         </p:spPr>
         <p:txBody>
-          <a:bodyPr wrap="square" lIns="0" rIns="0" tIns="0" bIns="0">
+          <a:bodyPr wrap="square" lIns="0" tIns="0" rIns="0" bIns="0">
             <a:spAutoFit/>
           </a:bodyPr>
           <a:lstStyle/>
@@ -5007,7 +5180,7 @@
           <a:noFill/>
         </p:spPr>
         <p:txBody>
-          <a:bodyPr wrap="square" lIns="0" rIns="0" tIns="0" bIns="0">
+          <a:bodyPr wrap="square" lIns="0" tIns="0" rIns="0" bIns="0">
             <a:spAutoFit/>
           </a:bodyPr>
           <a:lstStyle/>
@@ -5046,7 +5219,7 @@
           <a:noFill/>
         </p:spPr>
         <p:txBody>
-          <a:bodyPr wrap="square" lIns="0" rIns="0" tIns="0" bIns="0">
+          <a:bodyPr wrap="square" lIns="0" tIns="0" rIns="0" bIns="0">
             <a:spAutoFit/>
           </a:bodyPr>
           <a:lstStyle/>
@@ -5064,6 +5237,74 @@
                 <a:latin typeface="Calibri"/>
               </a:rPr>
               <a:t>12 / 16</a:t>
+            </a:r>
+          </a:p>
+        </p:txBody>
+      </p:sp>
+      <p:pic>
+        <p:nvPicPr>
+          <p:cNvPr id="8" name="Picture 7" descr="mono_white.png"/>
+          <p:cNvPicPr>
+            <a:picLocks noChangeAspect="1"/>
+          </p:cNvPicPr>
+          <p:nvPr/>
+        </p:nvPicPr>
+        <p:blipFill>
+          <a:blip r:embed="rId3"/>
+          <a:stretch>
+            <a:fillRect/>
+          </a:stretch>
+        </p:blipFill>
+        <p:spPr>
+          <a:xfrm>
+            <a:off x="822960" y="6419088"/>
+            <a:ext cx="201168" cy="201168"/>
+          </a:xfrm>
+          <a:prstGeom prst="rect">
+            <a:avLst/>
+          </a:prstGeom>
+        </p:spPr>
+      </p:pic>
+      <p:sp>
+        <p:nvSpPr>
+          <p:cNvPr id="9" name="TextBox 8"/>
+          <p:cNvSpPr txBox="1"/>
+          <p:nvPr/>
+        </p:nvSpPr>
+        <p:spPr>
+          <a:xfrm>
+            <a:off x="1133856" y="6409944"/>
+            <a:ext cx="5943600" cy="256032"/>
+          </a:xfrm>
+          <a:prstGeom prst="rect">
+            <a:avLst/>
+          </a:prstGeom>
+          <a:noFill/>
+        </p:spPr>
+        <p:txBody>
+          <a:bodyPr wrap="square" lIns="0" tIns="0" rIns="0" bIns="0" anchor="ctr">
+            <a:spAutoFit/>
+          </a:bodyPr>
+          <a:lstStyle/>
+          <a:p>
+            <a:pPr algn="l"/>
+            <a:r>
+              <a:rPr sz="850" b="1">
+                <a:solidFill>
+                  <a:srgbClr val="A8A17B"/>
+                </a:solidFill>
+                <a:latin typeface="Poppins"/>
+              </a:rPr>
+              <a:t>Getamazednow AI</a:t>
+            </a:r>
+            <a:r>
+              <a:rPr sz="850" b="0">
+                <a:solidFill>
+                  <a:srgbClr val="A8A17B"/>
+                </a:solidFill>
+                <a:latin typeface="Inter"/>
+              </a:rPr>
+              <a:t>   ·   A Getamazednow Company</a:t>
             </a:r>
           </a:p>
         </p:txBody>
@@ -5077,7 +5318,7 @@
 </file>
 
 <file path=ppt/slides/slide13.xml><?xml version="1.0" encoding="utf-8"?>
-<p:sld xmlns:a="http://schemas.openxmlformats.org/drawingml/2006/main" xmlns:p="http://schemas.openxmlformats.org/presentationml/2006/main" xmlns:r="http://schemas.openxmlformats.org/officeDocument/2006/relationships">
+<p:sld xmlns:a="http://schemas.openxmlformats.org/drawingml/2006/main" xmlns:r="http://schemas.openxmlformats.org/officeDocument/2006/relationships" xmlns:p="http://schemas.openxmlformats.org/presentationml/2006/main">
   <p:cSld>
     <p:bg>
       <p:bgPr>
@@ -5093,7 +5334,14 @@
         <p:cNvGrpSpPr/>
         <p:nvPr/>
       </p:nvGrpSpPr>
-      <p:grpSpPr/>
+      <p:grpSpPr>
+        <a:xfrm>
+          <a:off x="0" y="0"/>
+          <a:ext cx="0" cy="0"/>
+          <a:chOff x="0" y="0"/>
+          <a:chExt cx="0" cy="0"/>
+        </a:xfrm>
+      </p:grpSpPr>
       <p:sp>
         <p:nvSpPr>
           <p:cNvPr id="2" name="TextBox 1"/>
@@ -5111,7 +5359,7 @@
           <a:noFill/>
         </p:spPr>
         <p:txBody>
-          <a:bodyPr wrap="square" lIns="0" rIns="0" tIns="0" bIns="0">
+          <a:bodyPr wrap="square" lIns="0" tIns="0" rIns="0" bIns="0">
             <a:spAutoFit/>
           </a:bodyPr>
           <a:lstStyle/>
@@ -5150,7 +5398,7 @@
           <a:noFill/>
         </p:spPr>
         <p:txBody>
-          <a:bodyPr wrap="square" lIns="0" rIns="0" tIns="0" bIns="0">
+          <a:bodyPr wrap="square" lIns="0" tIns="0" rIns="0" bIns="0">
             <a:spAutoFit/>
           </a:bodyPr>
           <a:lstStyle/>
@@ -5189,7 +5437,7 @@
           <a:noFill/>
         </p:spPr>
         <p:txBody>
-          <a:bodyPr wrap="square" lIns="0" rIns="0" tIns="0" bIns="0">
+          <a:bodyPr wrap="square" lIns="0" tIns="0" rIns="0" bIns="0">
             <a:spAutoFit/>
           </a:bodyPr>
           <a:lstStyle/>
@@ -5228,7 +5476,7 @@
           <a:noFill/>
         </p:spPr>
         <p:txBody>
-          <a:bodyPr wrap="square" lIns="0" rIns="0" tIns="0" bIns="0">
+          <a:bodyPr wrap="square" lIns="0" tIns="0" rIns="0" bIns="0">
             <a:spAutoFit/>
           </a:bodyPr>
           <a:lstStyle/>
@@ -5239,6 +5487,12 @@
               </a:lnSpc>
             </a:pPr>
             <a:r>
+              <a:rPr lang="en-US" sz="800" b="1">
+                <a:latin typeface="Poppins"/>
+              </a:rPr>
+              <a:t>Getamazednow AI  ·  A Getamazednow Company        </a:t>
+            </a:r>
+            <a:r>
               <a:rPr sz="900" b="0" i="0">
                 <a:solidFill>
                   <a:srgbClr val="8A97A0"/>
@@ -5272,7 +5526,7 @@
           </a:bodyPr>
           <a:lstStyle/>
           <a:p>
-            <a:pPr algn="l" marL="228600" indent="-228600">
+            <a:pPr marL="228600" indent="-228600" algn="l">
               <a:lnSpc>
                 <a:spcPct val="120000"/>
               </a:lnSpc>
@@ -5283,7 +5537,7 @@
               <a:buChar char="•"/>
             </a:pPr>
             <a:r>
-              <a:rPr b="1" sz="1400">
+              <a:rPr sz="1400" b="1">
                 <a:solidFill>
                   <a:srgbClr val="2C3234"/>
                 </a:solidFill>
@@ -5302,7 +5556,7 @@
             </a:r>
           </a:p>
           <a:p>
-            <a:pPr algn="l" marL="228600" indent="-228600">
+            <a:pPr marL="228600" indent="-228600" algn="l">
               <a:lnSpc>
                 <a:spcPct val="120000"/>
               </a:lnSpc>
@@ -5313,7 +5567,7 @@
               <a:buChar char="•"/>
             </a:pPr>
             <a:r>
-              <a:rPr b="1" sz="1400">
+              <a:rPr sz="1400" b="1">
                 <a:solidFill>
                   <a:srgbClr val="2C3234"/>
                 </a:solidFill>
@@ -5332,7 +5586,7 @@
             </a:r>
           </a:p>
           <a:p>
-            <a:pPr algn="l" marL="228600" indent="-228600">
+            <a:pPr marL="228600" indent="-228600" algn="l">
               <a:lnSpc>
                 <a:spcPct val="120000"/>
               </a:lnSpc>
@@ -5343,7 +5597,7 @@
               <a:buChar char="•"/>
             </a:pPr>
             <a:r>
-              <a:rPr b="1" sz="1400">
+              <a:rPr sz="1400" b="1">
                 <a:solidFill>
                   <a:srgbClr val="2C3234"/>
                 </a:solidFill>
@@ -5362,7 +5616,7 @@
             </a:r>
           </a:p>
           <a:p>
-            <a:pPr algn="l" marL="228600" indent="-228600">
+            <a:pPr marL="228600" indent="-228600" algn="l">
               <a:lnSpc>
                 <a:spcPct val="120000"/>
               </a:lnSpc>
@@ -5373,7 +5627,7 @@
               <a:buChar char="•"/>
             </a:pPr>
             <a:r>
-              <a:rPr b="1" sz="1400">
+              <a:rPr sz="1400" b="1">
                 <a:solidFill>
                   <a:srgbClr val="2C3234"/>
                 </a:solidFill>
@@ -5436,6 +5690,7 @@
           <a:lstStyle/>
           <a:p>
             <a:pPr algn="ctr"/>
+            <a:endParaRPr/>
           </a:p>
         </p:txBody>
       </p:sp>
@@ -5456,7 +5711,7 @@
           <a:noFill/>
         </p:spPr>
         <p:txBody>
-          <a:bodyPr wrap="square" anchor="ctr" lIns="0" rIns="0" tIns="0" bIns="0">
+          <a:bodyPr wrap="square" lIns="0" tIns="0" rIns="0" bIns="0" anchor="ctr">
             <a:spAutoFit/>
           </a:bodyPr>
           <a:lstStyle/>
@@ -5478,6 +5733,30 @@
           </a:p>
         </p:txBody>
       </p:sp>
+      <p:pic>
+        <p:nvPicPr>
+          <p:cNvPr id="9" name="Picture 8" descr="mono_ink.png"/>
+          <p:cNvPicPr>
+            <a:picLocks noChangeAspect="1"/>
+          </p:cNvPicPr>
+          <p:nvPr/>
+        </p:nvPicPr>
+        <p:blipFill>
+          <a:blip r:embed="rId2"/>
+          <a:stretch>
+            <a:fillRect/>
+          </a:stretch>
+        </p:blipFill>
+        <p:spPr>
+          <a:xfrm>
+            <a:off x="201168" y="6528816"/>
+            <a:ext cx="182880" cy="182880"/>
+          </a:xfrm>
+          <a:prstGeom prst="rect">
+            <a:avLst/>
+          </a:prstGeom>
+        </p:spPr>
+      </p:pic>
     </p:spTree>
   </p:cSld>
   <p:clrMapOvr>
@@ -5487,7 +5766,7 @@
 </file>
 
 <file path=ppt/slides/slide14.xml><?xml version="1.0" encoding="utf-8"?>
-<p:sld xmlns:a="http://schemas.openxmlformats.org/drawingml/2006/main" xmlns:p="http://schemas.openxmlformats.org/presentationml/2006/main" xmlns:r="http://schemas.openxmlformats.org/officeDocument/2006/relationships">
+<p:sld xmlns:a="http://schemas.openxmlformats.org/drawingml/2006/main" xmlns:r="http://schemas.openxmlformats.org/officeDocument/2006/relationships" xmlns:p="http://schemas.openxmlformats.org/presentationml/2006/main">
   <p:cSld>
     <p:bg>
       <p:bgPr>
@@ -5503,7 +5782,14 @@
         <p:cNvGrpSpPr/>
         <p:nvPr/>
       </p:nvGrpSpPr>
-      <p:grpSpPr/>
+      <p:grpSpPr>
+        <a:xfrm>
+          <a:off x="0" y="0"/>
+          <a:ext cx="0" cy="0"/>
+          <a:chOff x="0" y="0"/>
+          <a:chExt cx="0" cy="0"/>
+        </a:xfrm>
+      </p:grpSpPr>
       <p:sp>
         <p:nvSpPr>
           <p:cNvPr id="2" name="TextBox 1"/>
@@ -5521,7 +5807,7 @@
           <a:noFill/>
         </p:spPr>
         <p:txBody>
-          <a:bodyPr wrap="square" lIns="0" rIns="0" tIns="0" bIns="0">
+          <a:bodyPr wrap="square" lIns="0" tIns="0" rIns="0" bIns="0">
             <a:spAutoFit/>
           </a:bodyPr>
           <a:lstStyle/>
@@ -5560,7 +5846,7 @@
           <a:noFill/>
         </p:spPr>
         <p:txBody>
-          <a:bodyPr wrap="square" lIns="0" rIns="0" tIns="0" bIns="0">
+          <a:bodyPr wrap="square" lIns="0" tIns="0" rIns="0" bIns="0">
             <a:spAutoFit/>
           </a:bodyPr>
           <a:lstStyle/>
@@ -5599,7 +5885,7 @@
           <a:noFill/>
         </p:spPr>
         <p:txBody>
-          <a:bodyPr wrap="square" lIns="0" rIns="0" tIns="0" bIns="0">
+          <a:bodyPr wrap="square" lIns="0" tIns="0" rIns="0" bIns="0">
             <a:spAutoFit/>
           </a:bodyPr>
           <a:lstStyle/>
@@ -5638,7 +5924,7 @@
           <a:noFill/>
         </p:spPr>
         <p:txBody>
-          <a:bodyPr wrap="square" lIns="0" rIns="0" tIns="0" bIns="0">
+          <a:bodyPr wrap="square" lIns="0" tIns="0" rIns="0" bIns="0">
             <a:spAutoFit/>
           </a:bodyPr>
           <a:lstStyle/>
@@ -5648,6 +5934,12 @@
                 <a:spcPct val="115000"/>
               </a:lnSpc>
             </a:pPr>
+            <a:r>
+              <a:rPr lang="en-US" sz="800" b="1">
+                <a:latin typeface="Poppins"/>
+              </a:rPr>
+              <a:t>Getamazednow AI  ·  A Getamazednow Company        </a:t>
+            </a:r>
             <a:r>
               <a:rPr sz="900" b="0" i="0">
                 <a:solidFill>
@@ -5679,9 +5971,27 @@
                 <a:tableStyleId>{5C22544A-7EE6-4342-B048-85BDC9FD1C3A}</a:tableStyleId>
               </a:tblPr>
               <a:tblGrid>
-                <a:gridCol w="4685385"/>
-                <a:gridCol w="3681374"/>
-                <a:gridCol w="2788920"/>
+                <a:gridCol w="4685385">
+                  <a:extLst>
+                    <a:ext uri="{9D8B030D-6E8A-4147-A177-3AD203B41FA5}">
+                      <a16:colId xmlns:a16="http://schemas.microsoft.com/office/drawing/2014/main" val="20000"/>
+                    </a:ext>
+                  </a:extLst>
+                </a:gridCol>
+                <a:gridCol w="3681374">
+                  <a:extLst>
+                    <a:ext uri="{9D8B030D-6E8A-4147-A177-3AD203B41FA5}">
+                      <a16:colId xmlns:a16="http://schemas.microsoft.com/office/drawing/2014/main" val="20001"/>
+                    </a:ext>
+                  </a:extLst>
+                </a:gridCol>
+                <a:gridCol w="2788920">
+                  <a:extLst>
+                    <a:ext uri="{9D8B030D-6E8A-4147-A177-3AD203B41FA5}">
+                      <a16:colId xmlns:a16="http://schemas.microsoft.com/office/drawing/2014/main" val="20002"/>
+                    </a:ext>
+                  </a:extLst>
+                </a:gridCol>
               </a:tblGrid>
               <a:tr h="535577">
                 <a:tc>
@@ -5750,6 +6060,11 @@
                     </a:solidFill>
                   </a:tcPr>
                 </a:tc>
+                <a:extLst>
+                  <a:ext uri="{0D108BD9-81ED-4DB2-BD59-A6C34878D82A}">
+                    <a16:rowId xmlns:a16="http://schemas.microsoft.com/office/drawing/2014/main" val="10000"/>
+                  </a:ext>
+                </a:extLst>
               </a:tr>
               <a:tr h="535577">
                 <a:tc>
@@ -5768,7 +6083,7 @@
                       </a:r>
                     </a:p>
                   </a:txBody>
-                  <a:tcPr marT="38100" marB="38100" marL="76200" anchor="ctr">
+                  <a:tcPr marL="76200" marT="38100" marB="38100" anchor="ctr">
                     <a:solidFill>
                       <a:srgbClr val="FFFFFF"/>
                     </a:solidFill>
@@ -5790,7 +6105,7 @@
                       </a:r>
                     </a:p>
                   </a:txBody>
-                  <a:tcPr marT="38100" marB="38100" marL="76200" anchor="ctr">
+                  <a:tcPr marL="76200" marT="38100" marB="38100" anchor="ctr">
                     <a:solidFill>
                       <a:srgbClr val="FFFFFF"/>
                     </a:solidFill>
@@ -5812,12 +6127,17 @@
                       </a:r>
                     </a:p>
                   </a:txBody>
-                  <a:tcPr marT="38100" marB="38100" marL="76200" anchor="ctr">
+                  <a:tcPr marL="76200" marT="38100" marB="38100" anchor="ctr">
                     <a:solidFill>
                       <a:srgbClr val="FFFFFF"/>
                     </a:solidFill>
                   </a:tcPr>
                 </a:tc>
+                <a:extLst>
+                  <a:ext uri="{0D108BD9-81ED-4DB2-BD59-A6C34878D82A}">
+                    <a16:rowId xmlns:a16="http://schemas.microsoft.com/office/drawing/2014/main" val="10001"/>
+                  </a:ext>
+                </a:extLst>
               </a:tr>
               <a:tr h="535577">
                 <a:tc>
@@ -5836,7 +6156,7 @@
                       </a:r>
                     </a:p>
                   </a:txBody>
-                  <a:tcPr marT="38100" marB="38100" marL="76200" anchor="ctr">
+                  <a:tcPr marL="76200" marT="38100" marB="38100" anchor="ctr">
                     <a:solidFill>
                       <a:srgbClr val="F6F7F7"/>
                     </a:solidFill>
@@ -5858,7 +6178,7 @@
                       </a:r>
                     </a:p>
                   </a:txBody>
-                  <a:tcPr marT="38100" marB="38100" marL="76200" anchor="ctr">
+                  <a:tcPr marL="76200" marT="38100" marB="38100" anchor="ctr">
                     <a:solidFill>
                       <a:srgbClr val="F6F7F7"/>
                     </a:solidFill>
@@ -5880,12 +6200,17 @@
                       </a:r>
                     </a:p>
                   </a:txBody>
-                  <a:tcPr marT="38100" marB="38100" marL="76200" anchor="ctr">
+                  <a:tcPr marL="76200" marT="38100" marB="38100" anchor="ctr">
                     <a:solidFill>
                       <a:srgbClr val="F6F7F7"/>
                     </a:solidFill>
                   </a:tcPr>
                 </a:tc>
+                <a:extLst>
+                  <a:ext uri="{0D108BD9-81ED-4DB2-BD59-A6C34878D82A}">
+                    <a16:rowId xmlns:a16="http://schemas.microsoft.com/office/drawing/2014/main" val="10002"/>
+                  </a:ext>
+                </a:extLst>
               </a:tr>
               <a:tr h="535577">
                 <a:tc>
@@ -5904,7 +6229,7 @@
                       </a:r>
                     </a:p>
                   </a:txBody>
-                  <a:tcPr marT="38100" marB="38100" marL="76200" anchor="ctr">
+                  <a:tcPr marL="76200" marT="38100" marB="38100" anchor="ctr">
                     <a:solidFill>
                       <a:srgbClr val="FFFFFF"/>
                     </a:solidFill>
@@ -5926,7 +6251,7 @@
                       </a:r>
                     </a:p>
                   </a:txBody>
-                  <a:tcPr marT="38100" marB="38100" marL="76200" anchor="ctr">
+                  <a:tcPr marL="76200" marT="38100" marB="38100" anchor="ctr">
                     <a:solidFill>
                       <a:srgbClr val="FFFFFF"/>
                     </a:solidFill>
@@ -5948,12 +6273,17 @@
                       </a:r>
                     </a:p>
                   </a:txBody>
-                  <a:tcPr marT="38100" marB="38100" marL="76200" anchor="ctr">
+                  <a:tcPr marL="76200" marT="38100" marB="38100" anchor="ctr">
                     <a:solidFill>
                       <a:srgbClr val="FFFFFF"/>
                     </a:solidFill>
                   </a:tcPr>
                 </a:tc>
+                <a:extLst>
+                  <a:ext uri="{0D108BD9-81ED-4DB2-BD59-A6C34878D82A}">
+                    <a16:rowId xmlns:a16="http://schemas.microsoft.com/office/drawing/2014/main" val="10003"/>
+                  </a:ext>
+                </a:extLst>
               </a:tr>
               <a:tr h="535577">
                 <a:tc>
@@ -5972,7 +6302,7 @@
                       </a:r>
                     </a:p>
                   </a:txBody>
-                  <a:tcPr marT="38100" marB="38100" marL="76200" anchor="ctr">
+                  <a:tcPr marL="76200" marT="38100" marB="38100" anchor="ctr">
                     <a:solidFill>
                       <a:srgbClr val="F6F7F7"/>
                     </a:solidFill>
@@ -5994,7 +6324,7 @@
                       </a:r>
                     </a:p>
                   </a:txBody>
-                  <a:tcPr marT="38100" marB="38100" marL="76200" anchor="ctr">
+                  <a:tcPr marL="76200" marT="38100" marB="38100" anchor="ctr">
                     <a:solidFill>
                       <a:srgbClr val="F6F7F7"/>
                     </a:solidFill>
@@ -6016,12 +6346,17 @@
                       </a:r>
                     </a:p>
                   </a:txBody>
-                  <a:tcPr marT="38100" marB="38100" marL="76200" anchor="ctr">
+                  <a:tcPr marL="76200" marT="38100" marB="38100" anchor="ctr">
                     <a:solidFill>
                       <a:srgbClr val="F6F7F7"/>
                     </a:solidFill>
                   </a:tcPr>
                 </a:tc>
+                <a:extLst>
+                  <a:ext uri="{0D108BD9-81ED-4DB2-BD59-A6C34878D82A}">
+                    <a16:rowId xmlns:a16="http://schemas.microsoft.com/office/drawing/2014/main" val="10004"/>
+                  </a:ext>
+                </a:extLst>
               </a:tr>
               <a:tr h="535577">
                 <a:tc>
@@ -6040,7 +6375,7 @@
                       </a:r>
                     </a:p>
                   </a:txBody>
-                  <a:tcPr marT="38100" marB="38100" marL="76200" anchor="ctr">
+                  <a:tcPr marL="76200" marT="38100" marB="38100" anchor="ctr">
                     <a:solidFill>
                       <a:srgbClr val="FFFFFF"/>
                     </a:solidFill>
@@ -6062,7 +6397,7 @@
                       </a:r>
                     </a:p>
                   </a:txBody>
-                  <a:tcPr marT="38100" marB="38100" marL="76200" anchor="ctr">
+                  <a:tcPr marL="76200" marT="38100" marB="38100" anchor="ctr">
                     <a:solidFill>
                       <a:srgbClr val="FFFFFF"/>
                     </a:solidFill>
@@ -6084,12 +6419,17 @@
                       </a:r>
                     </a:p>
                   </a:txBody>
-                  <a:tcPr marT="38100" marB="38100" marL="76200" anchor="ctr">
+                  <a:tcPr marL="76200" marT="38100" marB="38100" anchor="ctr">
                     <a:solidFill>
                       <a:srgbClr val="FFFFFF"/>
                     </a:solidFill>
                   </a:tcPr>
                 </a:tc>
+                <a:extLst>
+                  <a:ext uri="{0D108BD9-81ED-4DB2-BD59-A6C34878D82A}">
+                    <a16:rowId xmlns:a16="http://schemas.microsoft.com/office/drawing/2014/main" val="10005"/>
+                  </a:ext>
+                </a:extLst>
               </a:tr>
               <a:tr h="535577">
                 <a:tc>
@@ -6108,7 +6448,7 @@
                       </a:r>
                     </a:p>
                   </a:txBody>
-                  <a:tcPr marT="38100" marB="38100" marL="76200" anchor="ctr">
+                  <a:tcPr marL="76200" marT="38100" marB="38100" anchor="ctr">
                     <a:solidFill>
                       <a:srgbClr val="F6F7F7"/>
                     </a:solidFill>
@@ -6130,7 +6470,7 @@
                       </a:r>
                     </a:p>
                   </a:txBody>
-                  <a:tcPr marT="38100" marB="38100" marL="76200" anchor="ctr">
+                  <a:tcPr marL="76200" marT="38100" marB="38100" anchor="ctr">
                     <a:solidFill>
                       <a:srgbClr val="F6F7F7"/>
                     </a:solidFill>
@@ -6152,12 +6492,17 @@
                       </a:r>
                     </a:p>
                   </a:txBody>
-                  <a:tcPr marT="38100" marB="38100" marL="76200" anchor="ctr">
+                  <a:tcPr marL="76200" marT="38100" marB="38100" anchor="ctr">
                     <a:solidFill>
                       <a:srgbClr val="F6F7F7"/>
                     </a:solidFill>
                   </a:tcPr>
                 </a:tc>
+                <a:extLst>
+                  <a:ext uri="{0D108BD9-81ED-4DB2-BD59-A6C34878D82A}">
+                    <a16:rowId xmlns:a16="http://schemas.microsoft.com/office/drawing/2014/main" val="10006"/>
+                  </a:ext>
+                </a:extLst>
               </a:tr>
             </a:tbl>
           </a:graphicData>
@@ -6180,7 +6525,7 @@
           <a:noFill/>
         </p:spPr>
         <p:txBody>
-          <a:bodyPr wrap="square" lIns="0" rIns="0" tIns="0" bIns="0">
+          <a:bodyPr wrap="square" lIns="0" tIns="0" rIns="0" bIns="0">
             <a:spAutoFit/>
           </a:bodyPr>
           <a:lstStyle/>
@@ -6202,6 +6547,30 @@
           </a:p>
         </p:txBody>
       </p:sp>
+      <p:pic>
+        <p:nvPicPr>
+          <p:cNvPr id="8" name="Picture 7" descr="mono_ink.png"/>
+          <p:cNvPicPr>
+            <a:picLocks noChangeAspect="1"/>
+          </p:cNvPicPr>
+          <p:nvPr/>
+        </p:nvPicPr>
+        <p:blipFill>
+          <a:blip r:embed="rId2"/>
+          <a:stretch>
+            <a:fillRect/>
+          </a:stretch>
+        </p:blipFill>
+        <p:spPr>
+          <a:xfrm>
+            <a:off x="201168" y="6528816"/>
+            <a:ext cx="182880" cy="182880"/>
+          </a:xfrm>
+          <a:prstGeom prst="rect">
+            <a:avLst/>
+          </a:prstGeom>
+        </p:spPr>
+      </p:pic>
     </p:spTree>
   </p:cSld>
   <p:clrMapOvr>
@@ -6211,7 +6580,7 @@
 </file>
 
 <file path=ppt/slides/slide15.xml><?xml version="1.0" encoding="utf-8"?>
-<p:sld xmlns:a="http://schemas.openxmlformats.org/drawingml/2006/main" xmlns:p="http://schemas.openxmlformats.org/presentationml/2006/main" xmlns:r="http://schemas.openxmlformats.org/officeDocument/2006/relationships">
+<p:sld xmlns:a="http://schemas.openxmlformats.org/drawingml/2006/main" xmlns:r="http://schemas.openxmlformats.org/officeDocument/2006/relationships" xmlns:p="http://schemas.openxmlformats.org/presentationml/2006/main">
   <p:cSld>
     <p:bg>
       <p:bgPr>
@@ -6227,7 +6596,14 @@
         <p:cNvGrpSpPr/>
         <p:nvPr/>
       </p:nvGrpSpPr>
-      <p:grpSpPr/>
+      <p:grpSpPr>
+        <a:xfrm>
+          <a:off x="0" y="0"/>
+          <a:ext cx="0" cy="0"/>
+          <a:chOff x="0" y="0"/>
+          <a:chExt cx="0" cy="0"/>
+        </a:xfrm>
+      </p:grpSpPr>
       <p:sp>
         <p:nvSpPr>
           <p:cNvPr id="2" name="TextBox 1"/>
@@ -6245,7 +6621,7 @@
           <a:noFill/>
         </p:spPr>
         <p:txBody>
-          <a:bodyPr wrap="square" lIns="0" rIns="0" tIns="0" bIns="0">
+          <a:bodyPr wrap="square" lIns="0" tIns="0" rIns="0" bIns="0">
             <a:spAutoFit/>
           </a:bodyPr>
           <a:lstStyle/>
@@ -6284,7 +6660,7 @@
           <a:noFill/>
         </p:spPr>
         <p:txBody>
-          <a:bodyPr wrap="square" lIns="0" rIns="0" tIns="0" bIns="0">
+          <a:bodyPr wrap="square" lIns="0" tIns="0" rIns="0" bIns="0">
             <a:spAutoFit/>
           </a:bodyPr>
           <a:lstStyle/>
@@ -6323,7 +6699,7 @@
           <a:noFill/>
         </p:spPr>
         <p:txBody>
-          <a:bodyPr wrap="square" lIns="0" rIns="0" tIns="0" bIns="0">
+          <a:bodyPr wrap="square" lIns="0" tIns="0" rIns="0" bIns="0">
             <a:spAutoFit/>
           </a:bodyPr>
           <a:lstStyle/>
@@ -6362,7 +6738,7 @@
           <a:noFill/>
         </p:spPr>
         <p:txBody>
-          <a:bodyPr wrap="square" lIns="0" rIns="0" tIns="0" bIns="0">
+          <a:bodyPr wrap="square" lIns="0" tIns="0" rIns="0" bIns="0">
             <a:spAutoFit/>
           </a:bodyPr>
           <a:lstStyle/>
@@ -6372,6 +6748,12 @@
                 <a:spcPct val="115000"/>
               </a:lnSpc>
             </a:pPr>
+            <a:r>
+              <a:rPr lang="en-US" sz="800" b="1">
+                <a:latin typeface="Poppins"/>
+              </a:rPr>
+              <a:t>Getamazednow AI  ·  A Getamazednow Company        </a:t>
+            </a:r>
             <a:r>
               <a:rPr sz="900" b="0" i="0">
                 <a:solidFill>
@@ -6407,13 +6789,6 @@
             <a:noFill/>
           </a:ln>
           <a:effectLst/>
-          <a:effectLst>
-            <a:outerShdw blurRad="90000" dist="30000" dir="5400000" rotWithShape="0">
-              <a:srgbClr val="2A363B">
-                <a:alpha val="20000"/>
-              </a:srgbClr>
-            </a:outerShdw>
-          </a:effectLst>
         </p:spPr>
         <p:style>
           <a:lnRef idx="1">
@@ -6434,6 +6809,7 @@
           <a:lstStyle/>
           <a:p>
             <a:pPr algn="ctr"/>
+            <a:endParaRPr/>
           </a:p>
         </p:txBody>
       </p:sp>
@@ -6478,6 +6854,7 @@
           <a:lstStyle/>
           <a:p>
             <a:pPr algn="ctr"/>
+            <a:endParaRPr/>
           </a:p>
         </p:txBody>
       </p:sp>
@@ -6673,6 +7050,30 @@
           </a:p>
         </p:txBody>
       </p:sp>
+      <p:pic>
+        <p:nvPicPr>
+          <p:cNvPr id="12" name="Picture 11" descr="mono_ink.png"/>
+          <p:cNvPicPr>
+            <a:picLocks noChangeAspect="1"/>
+          </p:cNvPicPr>
+          <p:nvPr/>
+        </p:nvPicPr>
+        <p:blipFill>
+          <a:blip r:embed="rId2"/>
+          <a:stretch>
+            <a:fillRect/>
+          </a:stretch>
+        </p:blipFill>
+        <p:spPr>
+          <a:xfrm>
+            <a:off x="201168" y="6528816"/>
+            <a:ext cx="182880" cy="182880"/>
+          </a:xfrm>
+          <a:prstGeom prst="rect">
+            <a:avLst/>
+          </a:prstGeom>
+        </p:spPr>
+      </p:pic>
     </p:spTree>
   </p:cSld>
   <p:clrMapOvr>
@@ -6682,7 +7083,7 @@
 </file>
 
 <file path=ppt/slides/slide16.xml><?xml version="1.0" encoding="utf-8"?>
-<p:sld xmlns:a="http://schemas.openxmlformats.org/drawingml/2006/main" xmlns:p="http://schemas.openxmlformats.org/presentationml/2006/main" xmlns:r="http://schemas.openxmlformats.org/officeDocument/2006/relationships">
+<p:sld xmlns:a="http://schemas.openxmlformats.org/drawingml/2006/main" xmlns:r="http://schemas.openxmlformats.org/officeDocument/2006/relationships" xmlns:p="http://schemas.openxmlformats.org/presentationml/2006/main">
   <p:cSld>
     <p:bg>
       <p:bgPr>
@@ -6698,7 +7099,14 @@
         <p:cNvGrpSpPr/>
         <p:nvPr/>
       </p:nvGrpSpPr>
-      <p:grpSpPr/>
+      <p:grpSpPr>
+        <a:xfrm>
+          <a:off x="0" y="0"/>
+          <a:ext cx="0" cy="0"/>
+          <a:chOff x="0" y="0"/>
+          <a:chExt cx="0" cy="0"/>
+        </a:xfrm>
+      </p:grpSpPr>
       <p:sp>
         <p:nvSpPr>
           <p:cNvPr id="2" name="TextBox 1"/>
@@ -6716,7 +7124,7 @@
           <a:noFill/>
         </p:spPr>
         <p:txBody>
-          <a:bodyPr wrap="square" lIns="0" rIns="0" tIns="0" bIns="0">
+          <a:bodyPr wrap="square" lIns="0" tIns="0" rIns="0" bIns="0">
             <a:spAutoFit/>
           </a:bodyPr>
           <a:lstStyle/>
@@ -6755,7 +7163,7 @@
           <a:noFill/>
         </p:spPr>
         <p:txBody>
-          <a:bodyPr wrap="square" lIns="0" rIns="0" tIns="0" bIns="0">
+          <a:bodyPr wrap="square" lIns="0" tIns="0" rIns="0" bIns="0">
             <a:spAutoFit/>
           </a:bodyPr>
           <a:lstStyle/>
@@ -6794,7 +7202,7 @@
           <a:noFill/>
         </p:spPr>
         <p:txBody>
-          <a:bodyPr wrap="square" lIns="0" rIns="0" tIns="0" bIns="0">
+          <a:bodyPr wrap="square" lIns="0" tIns="0" rIns="0" bIns="0">
             <a:spAutoFit/>
           </a:bodyPr>
           <a:lstStyle/>
@@ -6833,7 +7241,7 @@
           <a:noFill/>
         </p:spPr>
         <p:txBody>
-          <a:bodyPr wrap="square" lIns="0" rIns="0" tIns="0" bIns="0">
+          <a:bodyPr wrap="square" lIns="0" tIns="0" rIns="0" bIns="0">
             <a:spAutoFit/>
           </a:bodyPr>
           <a:lstStyle/>
@@ -6844,6 +7252,12 @@
               </a:lnSpc>
             </a:pPr>
             <a:r>
+              <a:rPr lang="en-US" sz="800" b="1">
+                <a:latin typeface="Poppins"/>
+              </a:rPr>
+              <a:t>Getamazednow AI  ·  A Getamazednow Company        </a:t>
+            </a:r>
+            <a:r>
               <a:rPr sz="900" b="0" i="0">
                 <a:solidFill>
                   <a:srgbClr val="8A97A0"/>
@@ -6872,7 +7286,7 @@
           <a:noFill/>
         </p:spPr>
         <p:txBody>
-          <a:bodyPr wrap="square" lIns="0" rIns="0" tIns="0" bIns="0">
+          <a:bodyPr wrap="square" lIns="0" tIns="0" rIns="0" bIns="0">
             <a:spAutoFit/>
           </a:bodyPr>
           <a:lstStyle/>
@@ -6916,7 +7330,7 @@
           </a:bodyPr>
           <a:lstStyle/>
           <a:p>
-            <a:pPr algn="l" marL="228600" indent="-228600">
+            <a:pPr marL="228600" indent="-228600" algn="l">
               <a:lnSpc>
                 <a:spcPct val="120000"/>
               </a:lnSpc>
@@ -6937,7 +7351,7 @@
             </a:r>
           </a:p>
           <a:p>
-            <a:pPr algn="l" marL="228600" indent="-228600">
+            <a:pPr marL="228600" indent="-228600" algn="l">
               <a:lnSpc>
                 <a:spcPct val="120000"/>
               </a:lnSpc>
@@ -6958,7 +7372,7 @@
             </a:r>
           </a:p>
           <a:p>
-            <a:pPr algn="l" marL="228600" indent="-228600">
+            <a:pPr marL="228600" indent="-228600" algn="l">
               <a:lnSpc>
                 <a:spcPct val="120000"/>
               </a:lnSpc>
@@ -7023,6 +7437,7 @@
           <a:lstStyle/>
           <a:p>
             <a:pPr algn="ctr"/>
+            <a:endParaRPr/>
           </a:p>
         </p:txBody>
       </p:sp>
@@ -7043,7 +7458,7 @@
           <a:noFill/>
         </p:spPr>
         <p:txBody>
-          <a:bodyPr wrap="square" anchor="ctr" lIns="0" rIns="0" tIns="0" bIns="0">
+          <a:bodyPr wrap="square" lIns="0" tIns="0" rIns="0" bIns="0" anchor="ctr">
             <a:spAutoFit/>
           </a:bodyPr>
           <a:lstStyle/>
@@ -7065,6 +7480,30 @@
           </a:p>
         </p:txBody>
       </p:sp>
+      <p:pic>
+        <p:nvPicPr>
+          <p:cNvPr id="10" name="Picture 9" descr="mono_ink.png"/>
+          <p:cNvPicPr>
+            <a:picLocks noChangeAspect="1"/>
+          </p:cNvPicPr>
+          <p:nvPr/>
+        </p:nvPicPr>
+        <p:blipFill>
+          <a:blip r:embed="rId2"/>
+          <a:stretch>
+            <a:fillRect/>
+          </a:stretch>
+        </p:blipFill>
+        <p:spPr>
+          <a:xfrm>
+            <a:off x="201168" y="6528816"/>
+            <a:ext cx="182880" cy="182880"/>
+          </a:xfrm>
+          <a:prstGeom prst="rect">
+            <a:avLst/>
+          </a:prstGeom>
+        </p:spPr>
+      </p:pic>
     </p:spTree>
   </p:cSld>
   <p:clrMapOvr>
@@ -7074,7 +7513,7 @@
 </file>
 
 <file path=ppt/slides/slide2.xml><?xml version="1.0" encoding="utf-8"?>
-<p:sld xmlns:a="http://schemas.openxmlformats.org/drawingml/2006/main" xmlns:p="http://schemas.openxmlformats.org/presentationml/2006/main" xmlns:r="http://schemas.openxmlformats.org/officeDocument/2006/relationships">
+<p:sld xmlns:a="http://schemas.openxmlformats.org/drawingml/2006/main" xmlns:r="http://schemas.openxmlformats.org/officeDocument/2006/relationships" xmlns:p="http://schemas.openxmlformats.org/presentationml/2006/main">
   <p:cSld>
     <p:bg>
       <p:bgPr>
@@ -7090,7 +7529,14 @@
         <p:cNvGrpSpPr/>
         <p:nvPr/>
       </p:nvGrpSpPr>
-      <p:grpSpPr/>
+      <p:grpSpPr>
+        <a:xfrm>
+          <a:off x="0" y="0"/>
+          <a:ext cx="0" cy="0"/>
+          <a:chOff x="0" y="0"/>
+          <a:chExt cx="0" cy="0"/>
+        </a:xfrm>
+      </p:grpSpPr>
       <p:sp>
         <p:nvSpPr>
           <p:cNvPr id="2" name="TextBox 1"/>
@@ -7108,7 +7554,7 @@
           <a:noFill/>
         </p:spPr>
         <p:txBody>
-          <a:bodyPr wrap="square" lIns="0" rIns="0" tIns="0" bIns="0">
+          <a:bodyPr wrap="square" lIns="0" tIns="0" rIns="0" bIns="0">
             <a:spAutoFit/>
           </a:bodyPr>
           <a:lstStyle/>
@@ -7147,7 +7593,7 @@
           <a:noFill/>
         </p:spPr>
         <p:txBody>
-          <a:bodyPr wrap="square" lIns="0" rIns="0" tIns="0" bIns="0">
+          <a:bodyPr wrap="square" lIns="0" tIns="0" rIns="0" bIns="0">
             <a:spAutoFit/>
           </a:bodyPr>
           <a:lstStyle/>
@@ -7186,7 +7632,7 @@
           <a:noFill/>
         </p:spPr>
         <p:txBody>
-          <a:bodyPr wrap="square" lIns="0" rIns="0" tIns="0" bIns="0">
+          <a:bodyPr wrap="square" lIns="0" tIns="0" rIns="0" bIns="0">
             <a:spAutoFit/>
           </a:bodyPr>
           <a:lstStyle/>
@@ -7225,7 +7671,7 @@
           <a:noFill/>
         </p:spPr>
         <p:txBody>
-          <a:bodyPr wrap="square" lIns="0" rIns="0" tIns="0" bIns="0">
+          <a:bodyPr wrap="square" lIns="0" tIns="0" rIns="0" bIns="0">
             <a:spAutoFit/>
           </a:bodyPr>
           <a:lstStyle/>
@@ -7235,6 +7681,12 @@
                 <a:spcPct val="115000"/>
               </a:lnSpc>
             </a:pPr>
+            <a:r>
+              <a:rPr lang="en-US" sz="800" b="1">
+                <a:latin typeface="Poppins"/>
+              </a:rPr>
+              <a:t>Getamazednow AI  ·  A Getamazednow Company        </a:t>
+            </a:r>
             <a:r>
               <a:rPr sz="900" b="0" i="0">
                 <a:solidFill>
@@ -7270,13 +7722,6 @@
             <a:noFill/>
           </a:ln>
           <a:effectLst/>
-          <a:effectLst>
-            <a:outerShdw blurRad="90000" dist="30000" dir="5400000" rotWithShape="0">
-              <a:srgbClr val="2A363B">
-                <a:alpha val="20000"/>
-              </a:srgbClr>
-            </a:outerShdw>
-          </a:effectLst>
         </p:spPr>
         <p:style>
           <a:lnRef idx="1">
@@ -7297,6 +7742,7 @@
           <a:lstStyle/>
           <a:p>
             <a:pPr algn="ctr"/>
+            <a:endParaRPr/>
           </a:p>
         </p:txBody>
       </p:sp>
@@ -7317,7 +7763,7 @@
           <a:noFill/>
         </p:spPr>
         <p:txBody>
-          <a:bodyPr wrap="square" anchor="ctr" lIns="0" rIns="0" tIns="0" bIns="0">
+          <a:bodyPr wrap="square" lIns="0" tIns="0" rIns="0" bIns="0" anchor="ctr">
             <a:spAutoFit/>
           </a:bodyPr>
           <a:lstStyle/>
@@ -7356,7 +7802,7 @@
           <a:noFill/>
         </p:spPr>
         <p:txBody>
-          <a:bodyPr wrap="square" lIns="0" rIns="0" tIns="0" bIns="0">
+          <a:bodyPr wrap="square" lIns="0" tIns="0" rIns="0" bIns="0">
             <a:spAutoFit/>
           </a:bodyPr>
           <a:lstStyle/>
@@ -7395,7 +7841,7 @@
           <a:noFill/>
         </p:spPr>
         <p:txBody>
-          <a:bodyPr wrap="square" lIns="0" rIns="0" tIns="0" bIns="0">
+          <a:bodyPr wrap="square" lIns="0" tIns="0" rIns="0" bIns="0">
             <a:spAutoFit/>
           </a:bodyPr>
           <a:lstStyle/>
@@ -7440,13 +7886,6 @@
             <a:noFill/>
           </a:ln>
           <a:effectLst/>
-          <a:effectLst>
-            <a:outerShdw blurRad="90000" dist="30000" dir="5400000" rotWithShape="0">
-              <a:srgbClr val="2A363B">
-                <a:alpha val="20000"/>
-              </a:srgbClr>
-            </a:outerShdw>
-          </a:effectLst>
         </p:spPr>
         <p:style>
           <a:lnRef idx="1">
@@ -7467,6 +7906,7 @@
           <a:lstStyle/>
           <a:p>
             <a:pPr algn="ctr"/>
+            <a:endParaRPr/>
           </a:p>
         </p:txBody>
       </p:sp>
@@ -7487,7 +7927,7 @@
           <a:noFill/>
         </p:spPr>
         <p:txBody>
-          <a:bodyPr wrap="square" anchor="ctr" lIns="0" rIns="0" tIns="0" bIns="0">
+          <a:bodyPr wrap="square" lIns="0" tIns="0" rIns="0" bIns="0" anchor="ctr">
             <a:spAutoFit/>
           </a:bodyPr>
           <a:lstStyle/>
@@ -7526,7 +7966,7 @@
           <a:noFill/>
         </p:spPr>
         <p:txBody>
-          <a:bodyPr wrap="square" lIns="0" rIns="0" tIns="0" bIns="0">
+          <a:bodyPr wrap="square" lIns="0" tIns="0" rIns="0" bIns="0">
             <a:spAutoFit/>
           </a:bodyPr>
           <a:lstStyle/>
@@ -7565,7 +8005,7 @@
           <a:noFill/>
         </p:spPr>
         <p:txBody>
-          <a:bodyPr wrap="square" lIns="0" rIns="0" tIns="0" bIns="0">
+          <a:bodyPr wrap="square" lIns="0" tIns="0" rIns="0" bIns="0">
             <a:spAutoFit/>
           </a:bodyPr>
           <a:lstStyle/>
@@ -7610,13 +8050,6 @@
             <a:noFill/>
           </a:ln>
           <a:effectLst/>
-          <a:effectLst>
-            <a:outerShdw blurRad="90000" dist="30000" dir="5400000" rotWithShape="0">
-              <a:srgbClr val="2A363B">
-                <a:alpha val="20000"/>
-              </a:srgbClr>
-            </a:outerShdw>
-          </a:effectLst>
         </p:spPr>
         <p:style>
           <a:lnRef idx="1">
@@ -7637,6 +8070,7 @@
           <a:lstStyle/>
           <a:p>
             <a:pPr algn="ctr"/>
+            <a:endParaRPr/>
           </a:p>
         </p:txBody>
       </p:sp>
@@ -7657,7 +8091,7 @@
           <a:noFill/>
         </p:spPr>
         <p:txBody>
-          <a:bodyPr wrap="square" anchor="ctr" lIns="0" rIns="0" tIns="0" bIns="0">
+          <a:bodyPr wrap="square" lIns="0" tIns="0" rIns="0" bIns="0" anchor="ctr">
             <a:spAutoFit/>
           </a:bodyPr>
           <a:lstStyle/>
@@ -7696,7 +8130,7 @@
           <a:noFill/>
         </p:spPr>
         <p:txBody>
-          <a:bodyPr wrap="square" lIns="0" rIns="0" tIns="0" bIns="0">
+          <a:bodyPr wrap="square" lIns="0" tIns="0" rIns="0" bIns="0">
             <a:spAutoFit/>
           </a:bodyPr>
           <a:lstStyle/>
@@ -7735,7 +8169,7 @@
           <a:noFill/>
         </p:spPr>
         <p:txBody>
-          <a:bodyPr wrap="square" lIns="0" rIns="0" tIns="0" bIns="0">
+          <a:bodyPr wrap="square" lIns="0" tIns="0" rIns="0" bIns="0">
             <a:spAutoFit/>
           </a:bodyPr>
           <a:lstStyle/>
@@ -7757,6 +8191,30 @@
           </a:p>
         </p:txBody>
       </p:sp>
+      <p:pic>
+        <p:nvPicPr>
+          <p:cNvPr id="18" name="Picture 17" descr="mono_ink.png"/>
+          <p:cNvPicPr>
+            <a:picLocks noChangeAspect="1"/>
+          </p:cNvPicPr>
+          <p:nvPr/>
+        </p:nvPicPr>
+        <p:blipFill>
+          <a:blip r:embed="rId2"/>
+          <a:stretch>
+            <a:fillRect/>
+          </a:stretch>
+        </p:blipFill>
+        <p:spPr>
+          <a:xfrm>
+            <a:off x="201168" y="6528816"/>
+            <a:ext cx="182880" cy="182880"/>
+          </a:xfrm>
+          <a:prstGeom prst="rect">
+            <a:avLst/>
+          </a:prstGeom>
+        </p:spPr>
+      </p:pic>
     </p:spTree>
   </p:cSld>
   <p:clrMapOvr>
@@ -7766,7 +8224,7 @@
 </file>
 
 <file path=ppt/slides/slide3.xml><?xml version="1.0" encoding="utf-8"?>
-<p:sld xmlns:a="http://schemas.openxmlformats.org/drawingml/2006/main" xmlns:p="http://schemas.openxmlformats.org/presentationml/2006/main" xmlns:r="http://schemas.openxmlformats.org/officeDocument/2006/relationships">
+<p:sld xmlns:a="http://schemas.openxmlformats.org/drawingml/2006/main" xmlns:r="http://schemas.openxmlformats.org/officeDocument/2006/relationships" xmlns:p="http://schemas.openxmlformats.org/presentationml/2006/main">
   <p:cSld>
     <p:bg>
       <p:bgPr>
@@ -7782,51 +8240,38 @@
         <p:cNvGrpSpPr/>
         <p:nvPr/>
       </p:nvGrpSpPr>
-      <p:grpSpPr/>
-      <p:sp>
-        <p:nvSpPr>
-          <p:cNvPr id="2" name="Oval 1"/>
-          <p:cNvSpPr/>
-          <p:nvPr/>
-        </p:nvSpPr>
-        <p:spPr>
-          <a:xfrm>
-            <a:off x="-2194560" y="3931920"/>
-            <a:ext cx="5486400" cy="5486400"/>
-          </a:xfrm>
-          <a:prstGeom prst="ellipse">
-            <a:avLst/>
-          </a:prstGeom>
-          <a:solidFill>
-            <a:srgbClr val="3F474A"/>
-          </a:solidFill>
-          <a:ln>
-            <a:noFill/>
-          </a:ln>
-          <a:effectLst/>
-        </p:spPr>
-        <p:style>
-          <a:lnRef idx="1">
-            <a:schemeClr val="accent1"/>
-          </a:lnRef>
-          <a:fillRef idx="3">
-            <a:schemeClr val="accent1"/>
-          </a:fillRef>
-          <a:effectRef idx="2">
-            <a:schemeClr val="accent1"/>
-          </a:effectRef>
-          <a:fontRef idx="minor">
-            <a:schemeClr val="lt1"/>
-          </a:fontRef>
-        </p:style>
-        <p:txBody>
-          <a:bodyPr rtlCol="0" anchor="ctr"/>
-          <a:lstStyle/>
-          <a:p>
-            <a:pPr algn="ctr"/>
-          </a:p>
-        </p:txBody>
-      </p:sp>
+      <p:grpSpPr>
+        <a:xfrm>
+          <a:off x="0" y="0"/>
+          <a:ext cx="0" cy="0"/>
+          <a:chOff x="0" y="0"/>
+          <a:chExt cx="0" cy="0"/>
+        </a:xfrm>
+      </p:grpSpPr>
+      <p:pic>
+        <p:nvPicPr>
+          <p:cNvPr id="7" name="Picture 6" descr="GenAIObsPPT-4.jpg"/>
+          <p:cNvPicPr>
+            <a:picLocks noChangeAspect="1"/>
+          </p:cNvPicPr>
+          <p:nvPr/>
+        </p:nvPicPr>
+        <p:blipFill>
+          <a:blip r:embed="rId2"/>
+          <a:stretch>
+            <a:fillRect/>
+          </a:stretch>
+        </p:blipFill>
+        <p:spPr>
+          <a:xfrm>
+            <a:off x="0" y="0"/>
+            <a:ext cx="12191695" cy="6858000"/>
+          </a:xfrm>
+          <a:prstGeom prst="rect">
+            <a:avLst/>
+          </a:prstGeom>
+        </p:spPr>
+      </p:pic>
       <p:sp>
         <p:nvSpPr>
           <p:cNvPr id="3" name="TextBox 2"/>
@@ -7844,7 +8289,7 @@
           <a:noFill/>
         </p:spPr>
         <p:txBody>
-          <a:bodyPr wrap="square" lIns="0" rIns="0" tIns="0" bIns="0">
+          <a:bodyPr wrap="square" lIns="0" tIns="0" rIns="0" bIns="0">
             <a:spAutoFit/>
           </a:bodyPr>
           <a:lstStyle/>
@@ -7883,7 +8328,7 @@
           <a:noFill/>
         </p:spPr>
         <p:txBody>
-          <a:bodyPr wrap="square" lIns="0" rIns="0" tIns="0" bIns="0">
+          <a:bodyPr wrap="square" lIns="0" tIns="0" rIns="0" bIns="0">
             <a:spAutoFit/>
           </a:bodyPr>
           <a:lstStyle/>
@@ -7922,7 +8367,7 @@
           <a:noFill/>
         </p:spPr>
         <p:txBody>
-          <a:bodyPr wrap="square" lIns="0" rIns="0" tIns="0" bIns="0">
+          <a:bodyPr wrap="square" lIns="0" tIns="0" rIns="0" bIns="0">
             <a:spAutoFit/>
           </a:bodyPr>
           <a:lstStyle/>
@@ -7961,7 +8406,7 @@
           <a:noFill/>
         </p:spPr>
         <p:txBody>
-          <a:bodyPr wrap="square" lIns="0" rIns="0" tIns="0" bIns="0">
+          <a:bodyPr wrap="square" lIns="0" tIns="0" rIns="0" bIns="0">
             <a:spAutoFit/>
           </a:bodyPr>
           <a:lstStyle/>
@@ -7979,6 +8424,74 @@
                 <a:latin typeface="Calibri"/>
               </a:rPr>
               <a:t>03 / 16</a:t>
+            </a:r>
+          </a:p>
+        </p:txBody>
+      </p:sp>
+      <p:pic>
+        <p:nvPicPr>
+          <p:cNvPr id="8" name="Picture 7" descr="mono_white.png"/>
+          <p:cNvPicPr>
+            <a:picLocks noChangeAspect="1"/>
+          </p:cNvPicPr>
+          <p:nvPr/>
+        </p:nvPicPr>
+        <p:blipFill>
+          <a:blip r:embed="rId3"/>
+          <a:stretch>
+            <a:fillRect/>
+          </a:stretch>
+        </p:blipFill>
+        <p:spPr>
+          <a:xfrm>
+            <a:off x="822960" y="6419088"/>
+            <a:ext cx="201168" cy="201168"/>
+          </a:xfrm>
+          <a:prstGeom prst="rect">
+            <a:avLst/>
+          </a:prstGeom>
+        </p:spPr>
+      </p:pic>
+      <p:sp>
+        <p:nvSpPr>
+          <p:cNvPr id="9" name="TextBox 8"/>
+          <p:cNvSpPr txBox="1"/>
+          <p:nvPr/>
+        </p:nvSpPr>
+        <p:spPr>
+          <a:xfrm>
+            <a:off x="1133856" y="6409944"/>
+            <a:ext cx="5943600" cy="256032"/>
+          </a:xfrm>
+          <a:prstGeom prst="rect">
+            <a:avLst/>
+          </a:prstGeom>
+          <a:noFill/>
+        </p:spPr>
+        <p:txBody>
+          <a:bodyPr wrap="square" lIns="0" tIns="0" rIns="0" bIns="0" anchor="ctr">
+            <a:spAutoFit/>
+          </a:bodyPr>
+          <a:lstStyle/>
+          <a:p>
+            <a:pPr algn="l"/>
+            <a:r>
+              <a:rPr sz="850" b="1">
+                <a:solidFill>
+                  <a:srgbClr val="A8A17B"/>
+                </a:solidFill>
+                <a:latin typeface="Poppins"/>
+              </a:rPr>
+              <a:t>Getamazednow AI</a:t>
+            </a:r>
+            <a:r>
+              <a:rPr sz="850" b="0">
+                <a:solidFill>
+                  <a:srgbClr val="A8A17B"/>
+                </a:solidFill>
+                <a:latin typeface="Inter"/>
+              </a:rPr>
+              <a:t>   ·   A Getamazednow Company</a:t>
             </a:r>
           </a:p>
         </p:txBody>
@@ -7992,7 +8505,7 @@
 </file>
 
 <file path=ppt/slides/slide4.xml><?xml version="1.0" encoding="utf-8"?>
-<p:sld xmlns:a="http://schemas.openxmlformats.org/drawingml/2006/main" xmlns:p="http://schemas.openxmlformats.org/presentationml/2006/main" xmlns:r="http://schemas.openxmlformats.org/officeDocument/2006/relationships">
+<p:sld xmlns:a="http://schemas.openxmlformats.org/drawingml/2006/main" xmlns:r="http://schemas.openxmlformats.org/officeDocument/2006/relationships" xmlns:p="http://schemas.openxmlformats.org/presentationml/2006/main">
   <p:cSld>
     <p:bg>
       <p:bgPr>
@@ -8008,7 +8521,14 @@
         <p:cNvGrpSpPr/>
         <p:nvPr/>
       </p:nvGrpSpPr>
-      <p:grpSpPr/>
+      <p:grpSpPr>
+        <a:xfrm>
+          <a:off x="0" y="0"/>
+          <a:ext cx="0" cy="0"/>
+          <a:chOff x="0" y="0"/>
+          <a:chExt cx="0" cy="0"/>
+        </a:xfrm>
+      </p:grpSpPr>
       <p:sp>
         <p:nvSpPr>
           <p:cNvPr id="2" name="TextBox 1"/>
@@ -8026,7 +8546,7 @@
           <a:noFill/>
         </p:spPr>
         <p:txBody>
-          <a:bodyPr wrap="square" lIns="0" rIns="0" tIns="0" bIns="0">
+          <a:bodyPr wrap="square" lIns="0" tIns="0" rIns="0" bIns="0">
             <a:spAutoFit/>
           </a:bodyPr>
           <a:lstStyle/>
@@ -8065,7 +8585,7 @@
           <a:noFill/>
         </p:spPr>
         <p:txBody>
-          <a:bodyPr wrap="square" lIns="0" rIns="0" tIns="0" bIns="0">
+          <a:bodyPr wrap="square" lIns="0" tIns="0" rIns="0" bIns="0">
             <a:spAutoFit/>
           </a:bodyPr>
           <a:lstStyle/>
@@ -8104,7 +8624,7 @@
           <a:noFill/>
         </p:spPr>
         <p:txBody>
-          <a:bodyPr wrap="square" lIns="0" rIns="0" tIns="0" bIns="0">
+          <a:bodyPr wrap="square" lIns="0" tIns="0" rIns="0" bIns="0">
             <a:spAutoFit/>
           </a:bodyPr>
           <a:lstStyle/>
@@ -8143,7 +8663,7 @@
           <a:noFill/>
         </p:spPr>
         <p:txBody>
-          <a:bodyPr wrap="square" lIns="0" rIns="0" tIns="0" bIns="0">
+          <a:bodyPr wrap="square" lIns="0" tIns="0" rIns="0" bIns="0">
             <a:spAutoFit/>
           </a:bodyPr>
           <a:lstStyle/>
@@ -8153,6 +8673,12 @@
                 <a:spcPct val="115000"/>
               </a:lnSpc>
             </a:pPr>
+            <a:r>
+              <a:rPr lang="en-US" sz="800" b="1">
+                <a:latin typeface="Poppins"/>
+              </a:rPr>
+              <a:t>Getamazednow AI  ·  A Getamazednow Company        </a:t>
+            </a:r>
             <a:r>
               <a:rPr sz="900" b="0" i="0">
                 <a:solidFill>
@@ -8183,6 +8709,30 @@
           <a:xfrm>
             <a:off x="2305153" y="1371600"/>
             <a:ext cx="7551214" cy="4937760"/>
+          </a:xfrm>
+          <a:prstGeom prst="rect">
+            <a:avLst/>
+          </a:prstGeom>
+        </p:spPr>
+      </p:pic>
+      <p:pic>
+        <p:nvPicPr>
+          <p:cNvPr id="7" name="Picture 6" descr="mono_ink.png"/>
+          <p:cNvPicPr>
+            <a:picLocks noChangeAspect="1"/>
+          </p:cNvPicPr>
+          <p:nvPr/>
+        </p:nvPicPr>
+        <p:blipFill>
+          <a:blip r:embed="rId3"/>
+          <a:stretch>
+            <a:fillRect/>
+          </a:stretch>
+        </p:blipFill>
+        <p:spPr>
+          <a:xfrm>
+            <a:off x="201168" y="6528816"/>
+            <a:ext cx="182880" cy="182880"/>
           </a:xfrm>
           <a:prstGeom prst="rect">
             <a:avLst/>
@@ -8198,7 +8748,7 @@
 </file>
 
 <file path=ppt/slides/slide5.xml><?xml version="1.0" encoding="utf-8"?>
-<p:sld xmlns:a="http://schemas.openxmlformats.org/drawingml/2006/main" xmlns:p="http://schemas.openxmlformats.org/presentationml/2006/main" xmlns:r="http://schemas.openxmlformats.org/officeDocument/2006/relationships">
+<p:sld xmlns:a="http://schemas.openxmlformats.org/drawingml/2006/main" xmlns:r="http://schemas.openxmlformats.org/officeDocument/2006/relationships" xmlns:p="http://schemas.openxmlformats.org/presentationml/2006/main">
   <p:cSld>
     <p:bg>
       <p:bgPr>
@@ -8214,7 +8764,14 @@
         <p:cNvGrpSpPr/>
         <p:nvPr/>
       </p:nvGrpSpPr>
-      <p:grpSpPr/>
+      <p:grpSpPr>
+        <a:xfrm>
+          <a:off x="0" y="0"/>
+          <a:ext cx="0" cy="0"/>
+          <a:chOff x="0" y="0"/>
+          <a:chExt cx="0" cy="0"/>
+        </a:xfrm>
+      </p:grpSpPr>
       <p:sp>
         <p:nvSpPr>
           <p:cNvPr id="2" name="TextBox 1"/>
@@ -8232,7 +8789,7 @@
           <a:noFill/>
         </p:spPr>
         <p:txBody>
-          <a:bodyPr wrap="square" lIns="0" rIns="0" tIns="0" bIns="0">
+          <a:bodyPr wrap="square" lIns="0" tIns="0" rIns="0" bIns="0">
             <a:spAutoFit/>
           </a:bodyPr>
           <a:lstStyle/>
@@ -8271,7 +8828,7 @@
           <a:noFill/>
         </p:spPr>
         <p:txBody>
-          <a:bodyPr wrap="square" lIns="0" rIns="0" tIns="0" bIns="0">
+          <a:bodyPr wrap="square" lIns="0" tIns="0" rIns="0" bIns="0">
             <a:spAutoFit/>
           </a:bodyPr>
           <a:lstStyle/>
@@ -8310,7 +8867,7 @@
           <a:noFill/>
         </p:spPr>
         <p:txBody>
-          <a:bodyPr wrap="square" lIns="0" rIns="0" tIns="0" bIns="0">
+          <a:bodyPr wrap="square" lIns="0" tIns="0" rIns="0" bIns="0">
             <a:spAutoFit/>
           </a:bodyPr>
           <a:lstStyle/>
@@ -8349,7 +8906,7 @@
           <a:noFill/>
         </p:spPr>
         <p:txBody>
-          <a:bodyPr wrap="square" lIns="0" rIns="0" tIns="0" bIns="0">
+          <a:bodyPr wrap="square" lIns="0" tIns="0" rIns="0" bIns="0">
             <a:spAutoFit/>
           </a:bodyPr>
           <a:lstStyle/>
@@ -8360,6 +8917,12 @@
               </a:lnSpc>
             </a:pPr>
             <a:r>
+              <a:rPr lang="en-US" sz="800" b="1">
+                <a:latin typeface="Poppins"/>
+              </a:rPr>
+              <a:t>Getamazednow AI  ·  A Getamazednow Company        </a:t>
+            </a:r>
+            <a:r>
               <a:rPr sz="900" b="0" i="0">
                 <a:solidFill>
                   <a:srgbClr val="8A97A0"/>
@@ -8388,7 +8951,7 @@
           <a:noFill/>
         </p:spPr>
         <p:txBody>
-          <a:bodyPr wrap="square" lIns="0" rIns="0" tIns="0" bIns="0">
+          <a:bodyPr wrap="square" lIns="0" tIns="0" rIns="0" bIns="0">
             <a:spAutoFit/>
           </a:bodyPr>
           <a:lstStyle/>
@@ -8432,7 +8995,7 @@
           </a:bodyPr>
           <a:lstStyle/>
           <a:p>
-            <a:pPr algn="l" marL="228600" indent="-228600">
+            <a:pPr marL="228600" indent="-228600" algn="l">
               <a:lnSpc>
                 <a:spcPct val="120000"/>
               </a:lnSpc>
@@ -8453,7 +9016,7 @@
             </a:r>
           </a:p>
           <a:p>
-            <a:pPr algn="l" marL="228600" indent="-228600">
+            <a:pPr marL="228600" indent="-228600" algn="l">
               <a:lnSpc>
                 <a:spcPct val="120000"/>
               </a:lnSpc>
@@ -8474,7 +9037,7 @@
             </a:r>
           </a:p>
           <a:p>
-            <a:pPr algn="l" marL="228600" indent="-228600">
+            <a:pPr marL="228600" indent="-228600" algn="l">
               <a:lnSpc>
                 <a:spcPct val="120000"/>
               </a:lnSpc>
@@ -8495,7 +9058,7 @@
             </a:r>
           </a:p>
           <a:p>
-            <a:pPr algn="l" marL="228600" indent="-228600">
+            <a:pPr marL="228600" indent="-228600" algn="l">
               <a:lnSpc>
                 <a:spcPct val="120000"/>
               </a:lnSpc>
@@ -8534,7 +9097,7 @@
           <a:noFill/>
         </p:spPr>
         <p:txBody>
-          <a:bodyPr wrap="square" lIns="0" rIns="0" tIns="0" bIns="0">
+          <a:bodyPr wrap="square" lIns="0" tIns="0" rIns="0" bIns="0">
             <a:spAutoFit/>
           </a:bodyPr>
           <a:lstStyle/>
@@ -8578,7 +9141,7 @@
           </a:bodyPr>
           <a:lstStyle/>
           <a:p>
-            <a:pPr algn="l" marL="228600" indent="-228600">
+            <a:pPr marL="228600" indent="-228600" algn="l">
               <a:lnSpc>
                 <a:spcPct val="120000"/>
               </a:lnSpc>
@@ -8599,7 +9162,7 @@
             </a:r>
           </a:p>
           <a:p>
-            <a:pPr algn="l" marL="228600" indent="-228600">
+            <a:pPr marL="228600" indent="-228600" algn="l">
               <a:lnSpc>
                 <a:spcPct val="120000"/>
               </a:lnSpc>
@@ -8620,7 +9183,7 @@
             </a:r>
           </a:p>
           <a:p>
-            <a:pPr algn="l" marL="228600" indent="-228600">
+            <a:pPr marL="228600" indent="-228600" algn="l">
               <a:lnSpc>
                 <a:spcPct val="120000"/>
               </a:lnSpc>
@@ -8641,7 +9204,7 @@
             </a:r>
           </a:p>
           <a:p>
-            <a:pPr algn="l" marL="228600" indent="-228600">
+            <a:pPr marL="228600" indent="-228600" algn="l">
               <a:lnSpc>
                 <a:spcPct val="120000"/>
               </a:lnSpc>
@@ -8662,7 +9225,7 @@
             </a:r>
           </a:p>
           <a:p>
-            <a:pPr algn="l" marL="228600" indent="-228600">
+            <a:pPr marL="228600" indent="-228600" algn="l">
               <a:lnSpc>
                 <a:spcPct val="120000"/>
               </a:lnSpc>
@@ -8684,6 +9247,30 @@
           </a:p>
         </p:txBody>
       </p:sp>
+      <p:pic>
+        <p:nvPicPr>
+          <p:cNvPr id="10" name="Picture 9" descr="mono_ink.png"/>
+          <p:cNvPicPr>
+            <a:picLocks noChangeAspect="1"/>
+          </p:cNvPicPr>
+          <p:nvPr/>
+        </p:nvPicPr>
+        <p:blipFill>
+          <a:blip r:embed="rId2"/>
+          <a:stretch>
+            <a:fillRect/>
+          </a:stretch>
+        </p:blipFill>
+        <p:spPr>
+          <a:xfrm>
+            <a:off x="201168" y="6528816"/>
+            <a:ext cx="182880" cy="182880"/>
+          </a:xfrm>
+          <a:prstGeom prst="rect">
+            <a:avLst/>
+          </a:prstGeom>
+        </p:spPr>
+      </p:pic>
     </p:spTree>
   </p:cSld>
   <p:clrMapOvr>
@@ -8693,7 +9280,7 @@
 </file>
 
 <file path=ppt/slides/slide6.xml><?xml version="1.0" encoding="utf-8"?>
-<p:sld xmlns:a="http://schemas.openxmlformats.org/drawingml/2006/main" xmlns:p="http://schemas.openxmlformats.org/presentationml/2006/main" xmlns:r="http://schemas.openxmlformats.org/officeDocument/2006/relationships">
+<p:sld xmlns:a="http://schemas.openxmlformats.org/drawingml/2006/main" xmlns:r="http://schemas.openxmlformats.org/officeDocument/2006/relationships" xmlns:p="http://schemas.openxmlformats.org/presentationml/2006/main">
   <p:cSld>
     <p:bg>
       <p:bgPr>
@@ -8709,7 +9296,14 @@
         <p:cNvGrpSpPr/>
         <p:nvPr/>
       </p:nvGrpSpPr>
-      <p:grpSpPr/>
+      <p:grpSpPr>
+        <a:xfrm>
+          <a:off x="0" y="0"/>
+          <a:ext cx="0" cy="0"/>
+          <a:chOff x="0" y="0"/>
+          <a:chExt cx="0" cy="0"/>
+        </a:xfrm>
+      </p:grpSpPr>
       <p:sp>
         <p:nvSpPr>
           <p:cNvPr id="2" name="TextBox 1"/>
@@ -8727,7 +9321,7 @@
           <a:noFill/>
         </p:spPr>
         <p:txBody>
-          <a:bodyPr wrap="square" lIns="0" rIns="0" tIns="0" bIns="0">
+          <a:bodyPr wrap="square" lIns="0" tIns="0" rIns="0" bIns="0">
             <a:spAutoFit/>
           </a:bodyPr>
           <a:lstStyle/>
@@ -8766,7 +9360,7 @@
           <a:noFill/>
         </p:spPr>
         <p:txBody>
-          <a:bodyPr wrap="square" lIns="0" rIns="0" tIns="0" bIns="0">
+          <a:bodyPr wrap="square" lIns="0" tIns="0" rIns="0" bIns="0">
             <a:spAutoFit/>
           </a:bodyPr>
           <a:lstStyle/>
@@ -8805,7 +9399,7 @@
           <a:noFill/>
         </p:spPr>
         <p:txBody>
-          <a:bodyPr wrap="square" lIns="0" rIns="0" tIns="0" bIns="0">
+          <a:bodyPr wrap="square" lIns="0" tIns="0" rIns="0" bIns="0">
             <a:spAutoFit/>
           </a:bodyPr>
           <a:lstStyle/>
@@ -8844,7 +9438,7 @@
           <a:noFill/>
         </p:spPr>
         <p:txBody>
-          <a:bodyPr wrap="square" lIns="0" rIns="0" tIns="0" bIns="0">
+          <a:bodyPr wrap="square" lIns="0" tIns="0" rIns="0" bIns="0">
             <a:spAutoFit/>
           </a:bodyPr>
           <a:lstStyle/>
@@ -8854,6 +9448,12 @@
                 <a:spcPct val="115000"/>
               </a:lnSpc>
             </a:pPr>
+            <a:r>
+              <a:rPr lang="en-US" sz="800" b="1">
+                <a:latin typeface="Poppins"/>
+              </a:rPr>
+              <a:t>Getamazednow AI  ·  A Getamazednow Company        </a:t>
+            </a:r>
             <a:r>
               <a:rPr sz="900" b="0" i="0">
                 <a:solidFill>
@@ -8889,13 +9489,6 @@
             <a:noFill/>
           </a:ln>
           <a:effectLst/>
-          <a:effectLst>
-            <a:outerShdw blurRad="90000" dist="30000" dir="5400000" rotWithShape="0">
-              <a:srgbClr val="2A363B">
-                <a:alpha val="20000"/>
-              </a:srgbClr>
-            </a:outerShdw>
-          </a:effectLst>
         </p:spPr>
         <p:style>
           <a:lnRef idx="1">
@@ -8916,6 +9509,7 @@
           <a:lstStyle/>
           <a:p>
             <a:pPr algn="ctr"/>
+            <a:endParaRPr/>
           </a:p>
         </p:txBody>
       </p:sp>
@@ -8960,6 +9554,7 @@
           <a:lstStyle/>
           <a:p>
             <a:pPr algn="ctr"/>
+            <a:endParaRPr/>
           </a:p>
         </p:txBody>
       </p:sp>
@@ -8980,7 +9575,7 @@
           <a:noFill/>
         </p:spPr>
         <p:txBody>
-          <a:bodyPr wrap="square" lIns="0" rIns="0" tIns="0" bIns="0">
+          <a:bodyPr wrap="square" lIns="0" tIns="0" rIns="0" bIns="0">
             <a:spAutoFit/>
           </a:bodyPr>
           <a:lstStyle/>
@@ -9019,7 +9614,7 @@
           <a:noFill/>
         </p:spPr>
         <p:txBody>
-          <a:bodyPr wrap="square" lIns="0" rIns="0" tIns="0" bIns="0">
+          <a:bodyPr wrap="square" lIns="0" tIns="0" rIns="0" bIns="0">
             <a:spAutoFit/>
           </a:bodyPr>
           <a:lstStyle/>
@@ -9058,7 +9653,7 @@
           <a:noFill/>
         </p:spPr>
         <p:txBody>
-          <a:bodyPr wrap="square" lIns="0" rIns="0" tIns="0" bIns="0">
+          <a:bodyPr wrap="square" lIns="0" tIns="0" rIns="0" bIns="0">
             <a:spAutoFit/>
           </a:bodyPr>
           <a:lstStyle/>
@@ -9080,6 +9675,30 @@
           </a:p>
         </p:txBody>
       </p:sp>
+      <p:pic>
+        <p:nvPicPr>
+          <p:cNvPr id="11" name="Picture 10" descr="mono_ink.png"/>
+          <p:cNvPicPr>
+            <a:picLocks noChangeAspect="1"/>
+          </p:cNvPicPr>
+          <p:nvPr/>
+        </p:nvPicPr>
+        <p:blipFill>
+          <a:blip r:embed="rId2"/>
+          <a:stretch>
+            <a:fillRect/>
+          </a:stretch>
+        </p:blipFill>
+        <p:spPr>
+          <a:xfrm>
+            <a:off x="201168" y="6528816"/>
+            <a:ext cx="182880" cy="182880"/>
+          </a:xfrm>
+          <a:prstGeom prst="rect">
+            <a:avLst/>
+          </a:prstGeom>
+        </p:spPr>
+      </p:pic>
     </p:spTree>
   </p:cSld>
   <p:clrMapOvr>
@@ -9089,7 +9708,7 @@
 </file>
 
 <file path=ppt/slides/slide7.xml><?xml version="1.0" encoding="utf-8"?>
-<p:sld xmlns:a="http://schemas.openxmlformats.org/drawingml/2006/main" xmlns:p="http://schemas.openxmlformats.org/presentationml/2006/main" xmlns:r="http://schemas.openxmlformats.org/officeDocument/2006/relationships">
+<p:sld xmlns:a="http://schemas.openxmlformats.org/drawingml/2006/main" xmlns:r="http://schemas.openxmlformats.org/officeDocument/2006/relationships" xmlns:p="http://schemas.openxmlformats.org/presentationml/2006/main">
   <p:cSld>
     <p:bg>
       <p:bgPr>
@@ -9105,51 +9724,38 @@
         <p:cNvGrpSpPr/>
         <p:nvPr/>
       </p:nvGrpSpPr>
-      <p:grpSpPr/>
-      <p:sp>
-        <p:nvSpPr>
-          <p:cNvPr id="2" name="Oval 1"/>
-          <p:cNvSpPr/>
-          <p:nvPr/>
-        </p:nvSpPr>
-        <p:spPr>
-          <a:xfrm>
-            <a:off x="-2194560" y="3931920"/>
-            <a:ext cx="5486400" cy="5486400"/>
-          </a:xfrm>
-          <a:prstGeom prst="ellipse">
-            <a:avLst/>
-          </a:prstGeom>
-          <a:solidFill>
-            <a:srgbClr val="3F474A"/>
-          </a:solidFill>
-          <a:ln>
-            <a:noFill/>
-          </a:ln>
-          <a:effectLst/>
-        </p:spPr>
-        <p:style>
-          <a:lnRef idx="1">
-            <a:schemeClr val="accent1"/>
-          </a:lnRef>
-          <a:fillRef idx="3">
-            <a:schemeClr val="accent1"/>
-          </a:fillRef>
-          <a:effectRef idx="2">
-            <a:schemeClr val="accent1"/>
-          </a:effectRef>
-          <a:fontRef idx="minor">
-            <a:schemeClr val="lt1"/>
-          </a:fontRef>
-        </p:style>
-        <p:txBody>
-          <a:bodyPr rtlCol="0" anchor="ctr"/>
-          <a:lstStyle/>
-          <a:p>
-            <a:pPr algn="ctr"/>
-          </a:p>
-        </p:txBody>
-      </p:sp>
+      <p:grpSpPr>
+        <a:xfrm>
+          <a:off x="0" y="0"/>
+          <a:ext cx="0" cy="0"/>
+          <a:chOff x="0" y="0"/>
+          <a:chExt cx="0" cy="0"/>
+        </a:xfrm>
+      </p:grpSpPr>
+      <p:pic>
+        <p:nvPicPr>
+          <p:cNvPr id="7" name="Picture 6" descr="GenAIObsPPT-4.jpg"/>
+          <p:cNvPicPr>
+            <a:picLocks noChangeAspect="1"/>
+          </p:cNvPicPr>
+          <p:nvPr/>
+        </p:nvPicPr>
+        <p:blipFill>
+          <a:blip r:embed="rId2"/>
+          <a:stretch>
+            <a:fillRect/>
+          </a:stretch>
+        </p:blipFill>
+        <p:spPr>
+          <a:xfrm>
+            <a:off x="0" y="0"/>
+            <a:ext cx="12191695" cy="6858000"/>
+          </a:xfrm>
+          <a:prstGeom prst="rect">
+            <a:avLst/>
+          </a:prstGeom>
+        </p:spPr>
+      </p:pic>
       <p:sp>
         <p:nvSpPr>
           <p:cNvPr id="3" name="TextBox 2"/>
@@ -9167,7 +9773,7 @@
           <a:noFill/>
         </p:spPr>
         <p:txBody>
-          <a:bodyPr wrap="square" lIns="0" rIns="0" tIns="0" bIns="0">
+          <a:bodyPr wrap="square" lIns="0" tIns="0" rIns="0" bIns="0">
             <a:spAutoFit/>
           </a:bodyPr>
           <a:lstStyle/>
@@ -9206,7 +9812,7 @@
           <a:noFill/>
         </p:spPr>
         <p:txBody>
-          <a:bodyPr wrap="square" lIns="0" rIns="0" tIns="0" bIns="0">
+          <a:bodyPr wrap="square" lIns="0" tIns="0" rIns="0" bIns="0">
             <a:spAutoFit/>
           </a:bodyPr>
           <a:lstStyle/>
@@ -9245,7 +9851,7 @@
           <a:noFill/>
         </p:spPr>
         <p:txBody>
-          <a:bodyPr wrap="square" lIns="0" rIns="0" tIns="0" bIns="0">
+          <a:bodyPr wrap="square" lIns="0" tIns="0" rIns="0" bIns="0">
             <a:spAutoFit/>
           </a:bodyPr>
           <a:lstStyle/>
@@ -9284,7 +9890,7 @@
           <a:noFill/>
         </p:spPr>
         <p:txBody>
-          <a:bodyPr wrap="square" lIns="0" rIns="0" tIns="0" bIns="0">
+          <a:bodyPr wrap="square" lIns="0" tIns="0" rIns="0" bIns="0">
             <a:spAutoFit/>
           </a:bodyPr>
           <a:lstStyle/>
@@ -9302,6 +9908,74 @@
                 <a:latin typeface="Calibri"/>
               </a:rPr>
               <a:t>07 / 16</a:t>
+            </a:r>
+          </a:p>
+        </p:txBody>
+      </p:sp>
+      <p:pic>
+        <p:nvPicPr>
+          <p:cNvPr id="8" name="Picture 7" descr="mono_white.png"/>
+          <p:cNvPicPr>
+            <a:picLocks noChangeAspect="1"/>
+          </p:cNvPicPr>
+          <p:nvPr/>
+        </p:nvPicPr>
+        <p:blipFill>
+          <a:blip r:embed="rId3"/>
+          <a:stretch>
+            <a:fillRect/>
+          </a:stretch>
+        </p:blipFill>
+        <p:spPr>
+          <a:xfrm>
+            <a:off x="822960" y="6419088"/>
+            <a:ext cx="201168" cy="201168"/>
+          </a:xfrm>
+          <a:prstGeom prst="rect">
+            <a:avLst/>
+          </a:prstGeom>
+        </p:spPr>
+      </p:pic>
+      <p:sp>
+        <p:nvSpPr>
+          <p:cNvPr id="9" name="TextBox 8"/>
+          <p:cNvSpPr txBox="1"/>
+          <p:nvPr/>
+        </p:nvSpPr>
+        <p:spPr>
+          <a:xfrm>
+            <a:off x="1133856" y="6409944"/>
+            <a:ext cx="5943600" cy="256032"/>
+          </a:xfrm>
+          <a:prstGeom prst="rect">
+            <a:avLst/>
+          </a:prstGeom>
+          <a:noFill/>
+        </p:spPr>
+        <p:txBody>
+          <a:bodyPr wrap="square" lIns="0" tIns="0" rIns="0" bIns="0" anchor="ctr">
+            <a:spAutoFit/>
+          </a:bodyPr>
+          <a:lstStyle/>
+          <a:p>
+            <a:pPr algn="l"/>
+            <a:r>
+              <a:rPr sz="850" b="1">
+                <a:solidFill>
+                  <a:srgbClr val="A8A17B"/>
+                </a:solidFill>
+                <a:latin typeface="Poppins"/>
+              </a:rPr>
+              <a:t>Getamazednow AI</a:t>
+            </a:r>
+            <a:r>
+              <a:rPr sz="850" b="0">
+                <a:solidFill>
+                  <a:srgbClr val="A8A17B"/>
+                </a:solidFill>
+                <a:latin typeface="Inter"/>
+              </a:rPr>
+              <a:t>   ·   A Getamazednow Company</a:t>
             </a:r>
           </a:p>
         </p:txBody>
@@ -9315,7 +9989,7 @@
 </file>
 
 <file path=ppt/slides/slide8.xml><?xml version="1.0" encoding="utf-8"?>
-<p:sld xmlns:a="http://schemas.openxmlformats.org/drawingml/2006/main" xmlns:p="http://schemas.openxmlformats.org/presentationml/2006/main" xmlns:r="http://schemas.openxmlformats.org/officeDocument/2006/relationships">
+<p:sld xmlns:a="http://schemas.openxmlformats.org/drawingml/2006/main" xmlns:r="http://schemas.openxmlformats.org/officeDocument/2006/relationships" xmlns:p="http://schemas.openxmlformats.org/presentationml/2006/main">
   <p:cSld>
     <p:bg>
       <p:bgPr>
@@ -9331,7 +10005,14 @@
         <p:cNvGrpSpPr/>
         <p:nvPr/>
       </p:nvGrpSpPr>
-      <p:grpSpPr/>
+      <p:grpSpPr>
+        <a:xfrm>
+          <a:off x="0" y="0"/>
+          <a:ext cx="0" cy="0"/>
+          <a:chOff x="0" y="0"/>
+          <a:chExt cx="0" cy="0"/>
+        </a:xfrm>
+      </p:grpSpPr>
       <p:sp>
         <p:nvSpPr>
           <p:cNvPr id="2" name="TextBox 1"/>
@@ -9349,7 +10030,7 @@
           <a:noFill/>
         </p:spPr>
         <p:txBody>
-          <a:bodyPr wrap="square" lIns="0" rIns="0" tIns="0" bIns="0">
+          <a:bodyPr wrap="square" lIns="0" tIns="0" rIns="0" bIns="0">
             <a:spAutoFit/>
           </a:bodyPr>
           <a:lstStyle/>
@@ -9388,7 +10069,7 @@
           <a:noFill/>
         </p:spPr>
         <p:txBody>
-          <a:bodyPr wrap="square" lIns="0" rIns="0" tIns="0" bIns="0">
+          <a:bodyPr wrap="square" lIns="0" tIns="0" rIns="0" bIns="0">
             <a:spAutoFit/>
           </a:bodyPr>
           <a:lstStyle/>
@@ -9427,7 +10108,7 @@
           <a:noFill/>
         </p:spPr>
         <p:txBody>
-          <a:bodyPr wrap="square" lIns="0" rIns="0" tIns="0" bIns="0">
+          <a:bodyPr wrap="square" lIns="0" tIns="0" rIns="0" bIns="0">
             <a:spAutoFit/>
           </a:bodyPr>
           <a:lstStyle/>
@@ -9466,7 +10147,7 @@
           <a:noFill/>
         </p:spPr>
         <p:txBody>
-          <a:bodyPr wrap="square" lIns="0" rIns="0" tIns="0" bIns="0">
+          <a:bodyPr wrap="square" lIns="0" tIns="0" rIns="0" bIns="0">
             <a:spAutoFit/>
           </a:bodyPr>
           <a:lstStyle/>
@@ -9476,6 +10157,12 @@
                 <a:spcPct val="115000"/>
               </a:lnSpc>
             </a:pPr>
+            <a:r>
+              <a:rPr lang="en-US" sz="800" b="1">
+                <a:latin typeface="Poppins"/>
+              </a:rPr>
+              <a:t>Getamazednow AI  ·  A Getamazednow Company        </a:t>
+            </a:r>
             <a:r>
               <a:rPr sz="900" b="0" i="0">
                 <a:solidFill>
@@ -9507,8 +10194,20 @@
                 <a:tableStyleId>{5C22544A-7EE6-4342-B048-85BDC9FD1C3A}</a:tableStyleId>
               </a:tblPr>
               <a:tblGrid>
-                <a:gridCol w="3792931"/>
-                <a:gridCol w="7362748"/>
+                <a:gridCol w="3792931">
+                  <a:extLst>
+                    <a:ext uri="{9D8B030D-6E8A-4147-A177-3AD203B41FA5}">
+                      <a16:colId xmlns:a16="http://schemas.microsoft.com/office/drawing/2014/main" val="20000"/>
+                    </a:ext>
+                  </a:extLst>
+                </a:gridCol>
+                <a:gridCol w="7362748">
+                  <a:extLst>
+                    <a:ext uri="{9D8B030D-6E8A-4147-A177-3AD203B41FA5}">
+                      <a16:colId xmlns:a16="http://schemas.microsoft.com/office/drawing/2014/main" val="20001"/>
+                    </a:ext>
+                  </a:extLst>
+                </a:gridCol>
               </a:tblGrid>
               <a:tr h="640080">
                 <a:tc>
@@ -9555,6 +10254,11 @@
                     </a:solidFill>
                   </a:tcPr>
                 </a:tc>
+                <a:extLst>
+                  <a:ext uri="{0D108BD9-81ED-4DB2-BD59-A6C34878D82A}">
+                    <a16:rowId xmlns:a16="http://schemas.microsoft.com/office/drawing/2014/main" val="10000"/>
+                  </a:ext>
+                </a:extLst>
               </a:tr>
               <a:tr h="640080">
                 <a:tc>
@@ -9573,7 +10277,7 @@
                       </a:r>
                     </a:p>
                   </a:txBody>
-                  <a:tcPr marT="38100" marB="38100" marL="76200" anchor="ctr">
+                  <a:tcPr marL="76200" marT="38100" marB="38100" anchor="ctr">
                     <a:solidFill>
                       <a:srgbClr val="FFFFFF"/>
                     </a:solidFill>
@@ -9595,12 +10299,17 @@
                       </a:r>
                     </a:p>
                   </a:txBody>
-                  <a:tcPr marT="38100" marB="38100" marL="76200" anchor="ctr">
+                  <a:tcPr marL="76200" marT="38100" marB="38100" anchor="ctr">
                     <a:solidFill>
                       <a:srgbClr val="FFFFFF"/>
                     </a:solidFill>
                   </a:tcPr>
                 </a:tc>
+                <a:extLst>
+                  <a:ext uri="{0D108BD9-81ED-4DB2-BD59-A6C34878D82A}">
+                    <a16:rowId xmlns:a16="http://schemas.microsoft.com/office/drawing/2014/main" val="10001"/>
+                  </a:ext>
+                </a:extLst>
               </a:tr>
               <a:tr h="640080">
                 <a:tc>
@@ -9619,7 +10328,7 @@
                       </a:r>
                     </a:p>
                   </a:txBody>
-                  <a:tcPr marT="38100" marB="38100" marL="76200" anchor="ctr">
+                  <a:tcPr marL="76200" marT="38100" marB="38100" anchor="ctr">
                     <a:solidFill>
                       <a:srgbClr val="F6F7F7"/>
                     </a:solidFill>
@@ -9641,12 +10350,17 @@
                       </a:r>
                     </a:p>
                   </a:txBody>
-                  <a:tcPr marT="38100" marB="38100" marL="76200" anchor="ctr">
+                  <a:tcPr marL="76200" marT="38100" marB="38100" anchor="ctr">
                     <a:solidFill>
                       <a:srgbClr val="F6F7F7"/>
                     </a:solidFill>
                   </a:tcPr>
                 </a:tc>
+                <a:extLst>
+                  <a:ext uri="{0D108BD9-81ED-4DB2-BD59-A6C34878D82A}">
+                    <a16:rowId xmlns:a16="http://schemas.microsoft.com/office/drawing/2014/main" val="10002"/>
+                  </a:ext>
+                </a:extLst>
               </a:tr>
               <a:tr h="640080">
                 <a:tc>
@@ -9665,7 +10379,7 @@
                       </a:r>
                     </a:p>
                   </a:txBody>
-                  <a:tcPr marT="38100" marB="38100" marL="76200" anchor="ctr">
+                  <a:tcPr marL="76200" marT="38100" marB="38100" anchor="ctr">
                     <a:solidFill>
                       <a:srgbClr val="FFFFFF"/>
                     </a:solidFill>
@@ -9687,12 +10401,17 @@
                       </a:r>
                     </a:p>
                   </a:txBody>
-                  <a:tcPr marT="38100" marB="38100" marL="76200" anchor="ctr">
+                  <a:tcPr marL="76200" marT="38100" marB="38100" anchor="ctr">
                     <a:solidFill>
                       <a:srgbClr val="FFFFFF"/>
                     </a:solidFill>
                   </a:tcPr>
                 </a:tc>
+                <a:extLst>
+                  <a:ext uri="{0D108BD9-81ED-4DB2-BD59-A6C34878D82A}">
+                    <a16:rowId xmlns:a16="http://schemas.microsoft.com/office/drawing/2014/main" val="10003"/>
+                  </a:ext>
+                </a:extLst>
               </a:tr>
               <a:tr h="640080">
                 <a:tc>
@@ -9711,7 +10430,7 @@
                       </a:r>
                     </a:p>
                   </a:txBody>
-                  <a:tcPr marT="38100" marB="38100" marL="76200" anchor="ctr">
+                  <a:tcPr marL="76200" marT="38100" marB="38100" anchor="ctr">
                     <a:solidFill>
                       <a:srgbClr val="F6F7F7"/>
                     </a:solidFill>
@@ -9733,12 +10452,17 @@
                       </a:r>
                     </a:p>
                   </a:txBody>
-                  <a:tcPr marT="38100" marB="38100" marL="76200" anchor="ctr">
+                  <a:tcPr marL="76200" marT="38100" marB="38100" anchor="ctr">
                     <a:solidFill>
                       <a:srgbClr val="F6F7F7"/>
                     </a:solidFill>
                   </a:tcPr>
                 </a:tc>
+                <a:extLst>
+                  <a:ext uri="{0D108BD9-81ED-4DB2-BD59-A6C34878D82A}">
+                    <a16:rowId xmlns:a16="http://schemas.microsoft.com/office/drawing/2014/main" val="10004"/>
+                  </a:ext>
+                </a:extLst>
               </a:tr>
             </a:tbl>
           </a:graphicData>
@@ -9761,7 +10485,7 @@
           <a:noFill/>
         </p:spPr>
         <p:txBody>
-          <a:bodyPr wrap="square" lIns="0" rIns="0" tIns="0" bIns="0">
+          <a:bodyPr wrap="square" lIns="0" tIns="0" rIns="0" bIns="0">
             <a:spAutoFit/>
           </a:bodyPr>
           <a:lstStyle/>
@@ -9783,6 +10507,30 @@
           </a:p>
         </p:txBody>
       </p:sp>
+      <p:pic>
+        <p:nvPicPr>
+          <p:cNvPr id="8" name="Picture 7" descr="mono_ink.png"/>
+          <p:cNvPicPr>
+            <a:picLocks noChangeAspect="1"/>
+          </p:cNvPicPr>
+          <p:nvPr/>
+        </p:nvPicPr>
+        <p:blipFill>
+          <a:blip r:embed="rId2"/>
+          <a:stretch>
+            <a:fillRect/>
+          </a:stretch>
+        </p:blipFill>
+        <p:spPr>
+          <a:xfrm>
+            <a:off x="201168" y="6528816"/>
+            <a:ext cx="182880" cy="182880"/>
+          </a:xfrm>
+          <a:prstGeom prst="rect">
+            <a:avLst/>
+          </a:prstGeom>
+        </p:spPr>
+      </p:pic>
     </p:spTree>
   </p:cSld>
   <p:clrMapOvr>
@@ -9792,7 +10540,7 @@
 </file>
 
 <file path=ppt/slides/slide9.xml><?xml version="1.0" encoding="utf-8"?>
-<p:sld xmlns:a="http://schemas.openxmlformats.org/drawingml/2006/main" xmlns:p="http://schemas.openxmlformats.org/presentationml/2006/main" xmlns:r="http://schemas.openxmlformats.org/officeDocument/2006/relationships">
+<p:sld xmlns:a="http://schemas.openxmlformats.org/drawingml/2006/main" xmlns:r="http://schemas.openxmlformats.org/officeDocument/2006/relationships" xmlns:p="http://schemas.openxmlformats.org/presentationml/2006/main">
   <p:cSld>
     <p:bg>
       <p:bgPr>
@@ -9808,7 +10556,14 @@
         <p:cNvGrpSpPr/>
         <p:nvPr/>
       </p:nvGrpSpPr>
-      <p:grpSpPr/>
+      <p:grpSpPr>
+        <a:xfrm>
+          <a:off x="0" y="0"/>
+          <a:ext cx="0" cy="0"/>
+          <a:chOff x="0" y="0"/>
+          <a:chExt cx="0" cy="0"/>
+        </a:xfrm>
+      </p:grpSpPr>
       <p:sp>
         <p:nvSpPr>
           <p:cNvPr id="2" name="TextBox 1"/>
@@ -9826,7 +10581,7 @@
           <a:noFill/>
         </p:spPr>
         <p:txBody>
-          <a:bodyPr wrap="square" lIns="0" rIns="0" tIns="0" bIns="0">
+          <a:bodyPr wrap="square" lIns="0" tIns="0" rIns="0" bIns="0">
             <a:spAutoFit/>
           </a:bodyPr>
           <a:lstStyle/>
@@ -9865,7 +10620,7 @@
           <a:noFill/>
         </p:spPr>
         <p:txBody>
-          <a:bodyPr wrap="square" lIns="0" rIns="0" tIns="0" bIns="0">
+          <a:bodyPr wrap="square" lIns="0" tIns="0" rIns="0" bIns="0">
             <a:spAutoFit/>
           </a:bodyPr>
           <a:lstStyle/>
@@ -9904,7 +10659,7 @@
           <a:noFill/>
         </p:spPr>
         <p:txBody>
-          <a:bodyPr wrap="square" lIns="0" rIns="0" tIns="0" bIns="0">
+          <a:bodyPr wrap="square" lIns="0" tIns="0" rIns="0" bIns="0">
             <a:spAutoFit/>
           </a:bodyPr>
           <a:lstStyle/>
@@ -9943,7 +10698,7 @@
           <a:noFill/>
         </p:spPr>
         <p:txBody>
-          <a:bodyPr wrap="square" lIns="0" rIns="0" tIns="0" bIns="0">
+          <a:bodyPr wrap="square" lIns="0" tIns="0" rIns="0" bIns="0">
             <a:spAutoFit/>
           </a:bodyPr>
           <a:lstStyle/>
@@ -9953,6 +10708,12 @@
                 <a:spcPct val="115000"/>
               </a:lnSpc>
             </a:pPr>
+            <a:r>
+              <a:rPr lang="en-US" sz="800" b="1">
+                <a:latin typeface="Poppins"/>
+              </a:rPr>
+              <a:t>Getamazednow AI  ·  A Getamazednow Company        </a:t>
+            </a:r>
             <a:r>
               <a:rPr sz="900" b="0" i="0">
                 <a:solidFill>
@@ -9983,6 +10744,30 @@
           <a:xfrm>
             <a:off x="2746829" y="1371600"/>
             <a:ext cx="6667862" cy="4937760"/>
+          </a:xfrm>
+          <a:prstGeom prst="rect">
+            <a:avLst/>
+          </a:prstGeom>
+        </p:spPr>
+      </p:pic>
+      <p:pic>
+        <p:nvPicPr>
+          <p:cNvPr id="7" name="Picture 6" descr="mono_ink.png"/>
+          <p:cNvPicPr>
+            <a:picLocks noChangeAspect="1"/>
+          </p:cNvPicPr>
+          <p:nvPr/>
+        </p:nvPicPr>
+        <p:blipFill>
+          <a:blip r:embed="rId3"/>
+          <a:stretch>
+            <a:fillRect/>
+          </a:stretch>
+        </p:blipFill>
+        <p:spPr>
+          <a:xfrm>
+            <a:off x="201168" y="6528816"/>
+            <a:ext cx="182880" cy="182880"/>
           </a:xfrm>
           <a:prstGeom prst="rect">
             <a:avLst/>
